--- a/clientes/lucas-martini/Brand-Book-Lucas-Martini.pptx
+++ b/clientes/lucas-martini/Brand-Book-Lucas-Martini.pptx
@@ -3450,7 +3450,7 @@
         </p:nvSpPr>
         <p:spPr>
           <a:xfrm>
-            <a:off x="914400" y="1261872"/>
+            <a:off x="914400" y="1463040"/>
             <a:ext cx="6400800" cy="274320"/>
           </a:xfrm>
           <a:prstGeom prst="rect">
@@ -3489,7 +3489,7 @@
         </p:nvSpPr>
         <p:spPr>
           <a:xfrm>
-            <a:off x="914400" y="1737360"/>
+            <a:off x="914400" y="1938528"/>
             <a:ext cx="8412480" cy="913486"/>
           </a:xfrm>
           <a:prstGeom prst="rect">
@@ -3528,7 +3528,7 @@
         </p:nvSpPr>
         <p:spPr>
           <a:xfrm>
-            <a:off x="7248580" y="2214146"/>
+            <a:off x="7248580" y="2415314"/>
             <a:ext cx="10125020" cy="12802"/>
           </a:xfrm>
           <a:prstGeom prst="rect">
@@ -3572,7 +3572,7 @@
         </p:nvSpPr>
         <p:spPr>
           <a:xfrm>
-            <a:off x="914400" y="4206240"/>
+            <a:off x="914400" y="4407408"/>
             <a:ext cx="3634740" cy="274320"/>
           </a:xfrm>
           <a:prstGeom prst="rect">
@@ -3611,8 +3611,8 @@
         </p:nvSpPr>
         <p:spPr>
           <a:xfrm>
-            <a:off x="914400" y="4572000"/>
-            <a:ext cx="3634740" cy="1012190"/>
+            <a:off x="914400" y="4773168"/>
+            <a:ext cx="3634740" cy="1049020"/>
           </a:xfrm>
           <a:prstGeom prst="rect">
             <a:avLst/>
@@ -3631,7 +3631,7 @@
               </a:lnSpc>
             </a:pPr>
             <a:r>
-              <a:rPr sz="2500" i="0" b="0" spc="40">
+              <a:rPr sz="2600" i="0" b="0" spc="40">
                 <a:solidFill>
                   <a:srgbClr val="2C322E"/>
                 </a:solidFill>
@@ -3650,7 +3650,7 @@
         </p:nvSpPr>
         <p:spPr>
           <a:xfrm>
-            <a:off x="914400" y="5565902"/>
+            <a:off x="914400" y="5803900"/>
             <a:ext cx="3634740" cy="10973"/>
           </a:xfrm>
           <a:prstGeom prst="rect">
@@ -3694,8 +3694,8 @@
         </p:nvSpPr>
         <p:spPr>
           <a:xfrm>
-            <a:off x="914400" y="5821934"/>
-            <a:ext cx="3634740" cy="454013"/>
+            <a:off x="914400" y="6059932"/>
+            <a:ext cx="3634740" cy="937193"/>
           </a:xfrm>
           <a:prstGeom prst="rect">
             <a:avLst/>
@@ -3714,7 +3714,7 @@
               </a:lnSpc>
             </a:pPr>
             <a:r>
-              <a:rPr sz="1748" i="0" b="0">
+              <a:rPr sz="1932" i="0" b="0">
                 <a:solidFill>
                   <a:srgbClr val="5F6661"/>
                 </a:solidFill>
@@ -3733,7 +3733,7 @@
         </p:nvSpPr>
         <p:spPr>
           <a:xfrm>
-            <a:off x="5189220" y="4206240"/>
+            <a:off x="5189220" y="4407408"/>
             <a:ext cx="3634740" cy="274320"/>
           </a:xfrm>
           <a:prstGeom prst="rect">
@@ -3772,8 +3772,8 @@
         </p:nvSpPr>
         <p:spPr>
           <a:xfrm>
-            <a:off x="5189220" y="4572000"/>
-            <a:ext cx="3634740" cy="1012190"/>
+            <a:off x="5189220" y="4773168"/>
+            <a:ext cx="3634740" cy="1049020"/>
           </a:xfrm>
           <a:prstGeom prst="rect">
             <a:avLst/>
@@ -3792,7 +3792,7 @@
               </a:lnSpc>
             </a:pPr>
             <a:r>
-              <a:rPr sz="2500" i="0" b="0" spc="40">
+              <a:rPr sz="2600" i="0" b="0" spc="40">
                 <a:solidFill>
                   <a:srgbClr val="2C322E"/>
                 </a:solidFill>
@@ -3811,7 +3811,7 @@
         </p:nvSpPr>
         <p:spPr>
           <a:xfrm>
-            <a:off x="5189220" y="5565902"/>
+            <a:off x="5189220" y="5803900"/>
             <a:ext cx="3634740" cy="10973"/>
           </a:xfrm>
           <a:prstGeom prst="rect">
@@ -3855,8 +3855,8 @@
         </p:nvSpPr>
         <p:spPr>
           <a:xfrm>
-            <a:off x="5189220" y="5821934"/>
-            <a:ext cx="3634740" cy="853162"/>
+            <a:off x="5189220" y="6059932"/>
+            <a:ext cx="3634740" cy="937193"/>
           </a:xfrm>
           <a:prstGeom prst="rect">
             <a:avLst/>
@@ -3875,7 +3875,7 @@
               </a:lnSpc>
             </a:pPr>
             <a:r>
-              <a:rPr sz="1748" i="0" b="0">
+              <a:rPr sz="1932" i="0" b="0">
                 <a:solidFill>
                   <a:srgbClr val="5F6661"/>
                 </a:solidFill>
@@ -3894,7 +3894,7 @@
         </p:nvSpPr>
         <p:spPr>
           <a:xfrm>
-            <a:off x="9464040" y="4206240"/>
+            <a:off x="9464040" y="4407408"/>
             <a:ext cx="3634740" cy="274320"/>
           </a:xfrm>
           <a:prstGeom prst="rect">
@@ -3933,8 +3933,8 @@
         </p:nvSpPr>
         <p:spPr>
           <a:xfrm>
-            <a:off x="9464040" y="4572000"/>
-            <a:ext cx="3634740" cy="551815"/>
+            <a:off x="9464040" y="4773168"/>
+            <a:ext cx="3634740" cy="570230"/>
           </a:xfrm>
           <a:prstGeom prst="rect">
             <a:avLst/>
@@ -3953,7 +3953,7 @@
               </a:lnSpc>
             </a:pPr>
             <a:r>
-              <a:rPr sz="2500" i="0" b="0" spc="40">
+              <a:rPr sz="2600" i="0" b="0" spc="40">
                 <a:solidFill>
                   <a:srgbClr val="2C322E"/>
                 </a:solidFill>
@@ -3972,7 +3972,7 @@
         </p:nvSpPr>
         <p:spPr>
           <a:xfrm>
-            <a:off x="9464040" y="5565902"/>
+            <a:off x="9464040" y="5803900"/>
             <a:ext cx="3634740" cy="10973"/>
           </a:xfrm>
           <a:prstGeom prst="rect">
@@ -4016,8 +4016,8 @@
         </p:nvSpPr>
         <p:spPr>
           <a:xfrm>
-            <a:off x="9464040" y="5821934"/>
-            <a:ext cx="3634740" cy="454013"/>
+            <a:off x="9464040" y="6059932"/>
+            <a:ext cx="3634740" cy="937193"/>
           </a:xfrm>
           <a:prstGeom prst="rect">
             <a:avLst/>
@@ -4036,7 +4036,7 @@
               </a:lnSpc>
             </a:pPr>
             <a:r>
-              <a:rPr sz="1748" i="0" b="0">
+              <a:rPr sz="1932" i="0" b="0">
                 <a:solidFill>
                   <a:srgbClr val="5F6661"/>
                 </a:solidFill>
@@ -4055,7 +4055,7 @@
         </p:nvSpPr>
         <p:spPr>
           <a:xfrm>
-            <a:off x="13738860" y="4206240"/>
+            <a:off x="13738860" y="4407408"/>
             <a:ext cx="3634740" cy="274320"/>
           </a:xfrm>
           <a:prstGeom prst="rect">
@@ -4094,8 +4094,8 @@
         </p:nvSpPr>
         <p:spPr>
           <a:xfrm>
-            <a:off x="13738860" y="4572000"/>
-            <a:ext cx="3634740" cy="1012190"/>
+            <a:off x="13738860" y="4773168"/>
+            <a:ext cx="3634740" cy="1049020"/>
           </a:xfrm>
           <a:prstGeom prst="rect">
             <a:avLst/>
@@ -4114,7 +4114,7 @@
               </a:lnSpc>
             </a:pPr>
             <a:r>
-              <a:rPr sz="2500" i="0" b="0" spc="40">
+              <a:rPr sz="2600" i="0" b="0" spc="40">
                 <a:solidFill>
                   <a:srgbClr val="2C322E"/>
                 </a:solidFill>
@@ -4133,7 +4133,7 @@
         </p:nvSpPr>
         <p:spPr>
           <a:xfrm>
-            <a:off x="13738860" y="5565902"/>
+            <a:off x="13738860" y="5803900"/>
             <a:ext cx="3634740" cy="10973"/>
           </a:xfrm>
           <a:prstGeom prst="rect">
@@ -4177,8 +4177,8 @@
         </p:nvSpPr>
         <p:spPr>
           <a:xfrm>
-            <a:off x="13738860" y="5821934"/>
-            <a:ext cx="3634740" cy="853162"/>
+            <a:off x="13738860" y="6059932"/>
+            <a:ext cx="3634740" cy="937193"/>
           </a:xfrm>
           <a:prstGeom prst="rect">
             <a:avLst/>
@@ -4197,7 +4197,7 @@
               </a:lnSpc>
             </a:pPr>
             <a:r>
-              <a:rPr sz="1748" i="0" b="0">
+              <a:rPr sz="1932" i="0" b="0">
                 <a:solidFill>
                   <a:srgbClr val="5F6661"/>
                 </a:solidFill>
@@ -4216,8 +4216,8 @@
         </p:nvSpPr>
         <p:spPr>
           <a:xfrm>
-            <a:off x="914400" y="7379184"/>
-            <a:ext cx="12179808" cy="922579"/>
+            <a:off x="914400" y="7701213"/>
+            <a:ext cx="12179808" cy="1013917"/>
           </a:xfrm>
           <a:prstGeom prst="rect">
             <a:avLst/>
@@ -4236,7 +4236,7 @@
               </a:lnSpc>
             </a:pPr>
             <a:r>
-              <a:rPr sz="1900" i="0" b="0">
+              <a:rPr sz="2100" i="0" b="0">
                 <a:solidFill>
                   <a:srgbClr val="5F6661"/>
                 </a:solidFill>
@@ -4245,7 +4245,7 @@
               <a:t>A confiança está associada à pessoa: a indicação chega pelo nome e o relacionamento acontece com Lucas. </a:t>
             </a:r>
             <a:r>
-              <a:rPr sz="1900" i="0" b="0">
+              <a:rPr sz="2100" i="0" b="0">
                 <a:solidFill>
                   <a:srgbClr val="2C322E"/>
                 </a:solidFill>
@@ -4815,7 +4815,7 @@
         </p:nvSpPr>
         <p:spPr>
           <a:xfrm>
-            <a:off x="914400" y="1261872"/>
+            <a:off x="914400" y="1463040"/>
             <a:ext cx="6400800" cy="274320"/>
           </a:xfrm>
           <a:prstGeom prst="rect">
@@ -4854,7 +4854,7 @@
         </p:nvSpPr>
         <p:spPr>
           <a:xfrm>
-            <a:off x="914400" y="1737360"/>
+            <a:off x="914400" y="1938528"/>
             <a:ext cx="8412480" cy="1735531"/>
           </a:xfrm>
           <a:prstGeom prst="rect">
@@ -4909,7 +4909,7 @@
         </p:nvSpPr>
         <p:spPr>
           <a:xfrm>
-            <a:off x="7030694" y="3036192"/>
+            <a:off x="7030694" y="3237360"/>
             <a:ext cx="1107466" cy="12802"/>
           </a:xfrm>
           <a:prstGeom prst="rect">
@@ -4953,8 +4953,8 @@
         </p:nvSpPr>
         <p:spPr>
           <a:xfrm>
-            <a:off x="914400" y="3792931"/>
-            <a:ext cx="6400800" cy="922579"/>
+            <a:off x="914400" y="3994099"/>
+            <a:ext cx="6400800" cy="1493444"/>
           </a:xfrm>
           <a:prstGeom prst="rect">
             <a:avLst/>
@@ -4973,7 +4973,7 @@
               </a:lnSpc>
             </a:pPr>
             <a:r>
-              <a:rPr sz="1900" i="0" b="0">
+              <a:rPr sz="2100" i="0" b="0">
                 <a:solidFill>
                   <a:srgbClr val="5F6661"/>
                 </a:solidFill>
@@ -4992,7 +4992,7 @@
         </p:nvSpPr>
         <p:spPr>
           <a:xfrm>
-            <a:off x="9921240" y="2103120"/>
+            <a:off x="9921240" y="2304288"/>
             <a:ext cx="6400800" cy="274320"/>
           </a:xfrm>
           <a:prstGeom prst="rect">
@@ -5031,7 +5031,7 @@
         </p:nvSpPr>
         <p:spPr>
           <a:xfrm>
-            <a:off x="9921240" y="2487168"/>
+            <a:off x="9921240" y="2688336"/>
             <a:ext cx="6858000" cy="7315"/>
           </a:xfrm>
           <a:prstGeom prst="rect">
@@ -5075,7 +5075,7 @@
         </p:nvSpPr>
         <p:spPr>
           <a:xfrm>
-            <a:off x="9921240" y="2674620"/>
+            <a:off x="9921240" y="2875788"/>
             <a:ext cx="365760" cy="274320"/>
           </a:xfrm>
           <a:prstGeom prst="rect">
@@ -5095,7 +5095,7 @@
               </a:lnSpc>
             </a:pPr>
             <a:r>
-              <a:rPr sz="1433" i="0" b="0">
+              <a:rPr sz="1353" i="0" b="0">
                 <a:solidFill>
                   <a:srgbClr val="AE8C4E"/>
                 </a:solidFill>
@@ -5114,8 +5114,8 @@
         </p:nvSpPr>
         <p:spPr>
           <a:xfrm>
-            <a:off x="10424160" y="2633472"/>
-            <a:ext cx="6355080" cy="873221"/>
+            <a:off x="10424160" y="2834640"/>
+            <a:ext cx="6355080" cy="829391"/>
           </a:xfrm>
           <a:prstGeom prst="rect">
             <a:avLst/>
@@ -5134,7 +5134,7 @@
               </a:lnSpc>
             </a:pPr>
             <a:r>
-              <a:rPr sz="1748" i="0" b="0">
+              <a:rPr sz="1650" i="0" b="0">
                 <a:solidFill>
                   <a:srgbClr val="2C322E"/>
                 </a:solidFill>
@@ -5143,7 +5143,7 @@
               <a:t>Quem produz a própria renda</a:t>
             </a:r>
             <a:r>
-              <a:rPr sz="1748" i="0" b="0">
+              <a:rPr sz="1650" i="0" b="0">
                 <a:solidFill>
                   <a:srgbClr val="5F6661"/>
                 </a:solidFill>
@@ -5162,7 +5162,7 @@
         </p:nvSpPr>
         <p:spPr>
           <a:xfrm>
-            <a:off x="9921240" y="3744437"/>
+            <a:off x="9921240" y="3901775"/>
             <a:ext cx="6858000" cy="7315"/>
           </a:xfrm>
           <a:prstGeom prst="rect">
@@ -5206,7 +5206,7 @@
         </p:nvSpPr>
         <p:spPr>
           <a:xfrm>
-            <a:off x="9921240" y="3931889"/>
+            <a:off x="9921240" y="4089227"/>
             <a:ext cx="365760" cy="274320"/>
           </a:xfrm>
           <a:prstGeom prst="rect">
@@ -5226,7 +5226,7 @@
               </a:lnSpc>
             </a:pPr>
             <a:r>
-              <a:rPr sz="1433" i="0" b="0">
+              <a:rPr sz="1353" i="0" b="0">
                 <a:solidFill>
                   <a:srgbClr val="AE8C4E"/>
                 </a:solidFill>
@@ -5245,8 +5245,8 @@
         </p:nvSpPr>
         <p:spPr>
           <a:xfrm>
-            <a:off x="10424160" y="3890741"/>
-            <a:ext cx="6355080" cy="873221"/>
+            <a:off x="10424160" y="4048079"/>
+            <a:ext cx="6355080" cy="829391"/>
           </a:xfrm>
           <a:prstGeom prst="rect">
             <a:avLst/>
@@ -5265,7 +5265,7 @@
               </a:lnSpc>
             </a:pPr>
             <a:r>
-              <a:rPr sz="1748" i="0" b="0">
+              <a:rPr sz="1650" i="0" b="0">
                 <a:solidFill>
                   <a:srgbClr val="2C322E"/>
                 </a:solidFill>
@@ -5274,7 +5274,7 @@
               <a:t>Quem sustenta outras pessoas</a:t>
             </a:r>
             <a:r>
-              <a:rPr sz="1748" i="0" b="0">
+              <a:rPr sz="1650" i="0" b="0">
                 <a:solidFill>
                   <a:srgbClr val="5F6661"/>
                 </a:solidFill>
@@ -5293,7 +5293,7 @@
         </p:nvSpPr>
         <p:spPr>
           <a:xfrm>
-            <a:off x="9921240" y="5001706"/>
+            <a:off x="9921240" y="5115215"/>
             <a:ext cx="6858000" cy="7315"/>
           </a:xfrm>
           <a:prstGeom prst="rect">
@@ -5337,7 +5337,7 @@
         </p:nvSpPr>
         <p:spPr>
           <a:xfrm>
-            <a:off x="9921240" y="5189158"/>
+            <a:off x="9921240" y="5302667"/>
             <a:ext cx="365760" cy="274320"/>
           </a:xfrm>
           <a:prstGeom prst="rect">
@@ -5357,7 +5357,7 @@
               </a:lnSpc>
             </a:pPr>
             <a:r>
-              <a:rPr sz="1433" i="0" b="0">
+              <a:rPr sz="1353" i="0" b="0">
                 <a:solidFill>
                   <a:srgbClr val="AE8C4E"/>
                 </a:solidFill>
@@ -5376,8 +5376,8 @@
         </p:nvSpPr>
         <p:spPr>
           <a:xfrm>
-            <a:off x="10424160" y="5148010"/>
-            <a:ext cx="6355080" cy="1264112"/>
+            <a:off x="10424160" y="5261519"/>
+            <a:ext cx="6355080" cy="829391"/>
           </a:xfrm>
           <a:prstGeom prst="rect">
             <a:avLst/>
@@ -5396,7 +5396,7 @@
               </a:lnSpc>
             </a:pPr>
             <a:r>
-              <a:rPr sz="1748" i="0" b="0">
+              <a:rPr sz="1650" i="0" b="0">
                 <a:solidFill>
                   <a:srgbClr val="2C322E"/>
                 </a:solidFill>
@@ -5405,7 +5405,7 @@
               <a:t>Quem responde por uma empresa</a:t>
             </a:r>
             <a:r>
-              <a:rPr sz="1748" i="0" b="0">
+              <a:rPr sz="1650" i="0" b="0">
                 <a:solidFill>
                   <a:srgbClr val="5F6661"/>
                 </a:solidFill>
@@ -5424,7 +5424,7 @@
         </p:nvSpPr>
         <p:spPr>
           <a:xfrm>
-            <a:off x="9921240" y="6649866"/>
+            <a:off x="9921240" y="6328654"/>
             <a:ext cx="6858000" cy="7315"/>
           </a:xfrm>
           <a:prstGeom prst="rect">
@@ -5468,7 +5468,7 @@
         </p:nvSpPr>
         <p:spPr>
           <a:xfrm>
-            <a:off x="9921240" y="6837318"/>
+            <a:off x="9921240" y="6516106"/>
             <a:ext cx="365760" cy="274320"/>
           </a:xfrm>
           <a:prstGeom prst="rect">
@@ -5488,7 +5488,7 @@
               </a:lnSpc>
             </a:pPr>
             <a:r>
-              <a:rPr sz="1433" i="0" b="0">
+              <a:rPr sz="1353" i="0" b="0">
                 <a:solidFill>
                   <a:srgbClr val="AE8C4E"/>
                 </a:solidFill>
@@ -5507,8 +5507,8 @@
         </p:nvSpPr>
         <p:spPr>
           <a:xfrm>
-            <a:off x="10424160" y="6796170"/>
-            <a:ext cx="6355080" cy="873221"/>
+            <a:off x="10424160" y="6474958"/>
+            <a:ext cx="6355080" cy="829391"/>
           </a:xfrm>
           <a:prstGeom prst="rect">
             <a:avLst/>
@@ -5527,7 +5527,7 @@
               </a:lnSpc>
             </a:pPr>
             <a:r>
-              <a:rPr sz="1748" i="0" b="0">
+              <a:rPr sz="1650" i="0" b="0">
                 <a:solidFill>
                   <a:srgbClr val="2C322E"/>
                 </a:solidFill>
@@ -5536,7 +5536,7 @@
               <a:t>Quem construiu patrimônio</a:t>
             </a:r>
             <a:r>
-              <a:rPr sz="1748" i="0" b="0">
+              <a:rPr sz="1650" i="0" b="0">
                 <a:solidFill>
                   <a:srgbClr val="5F6661"/>
                 </a:solidFill>
@@ -5555,7 +5555,7 @@
         </p:nvSpPr>
         <p:spPr>
           <a:xfrm>
-            <a:off x="9921240" y="7907135"/>
+            <a:off x="9921240" y="7542093"/>
             <a:ext cx="6858000" cy="7315"/>
           </a:xfrm>
           <a:prstGeom prst="rect">
@@ -5599,8 +5599,8 @@
         </p:nvSpPr>
         <p:spPr>
           <a:xfrm>
-            <a:off x="9921240" y="8291183"/>
-            <a:ext cx="6858000" cy="853162"/>
+            <a:off x="9921240" y="7926141"/>
+            <a:ext cx="6858000" cy="808406"/>
           </a:xfrm>
           <a:prstGeom prst="rect">
             <a:avLst/>
@@ -5619,7 +5619,7 @@
               </a:lnSpc>
             </a:pPr>
             <a:r>
-              <a:rPr sz="1748" i="0" b="0">
+              <a:rPr sz="1650" i="0" b="0">
                 <a:solidFill>
                   <a:srgbClr val="5F6661"/>
                 </a:solidFill>
@@ -5628,7 +5628,7 @@
               <a:t>São pessoas que decidem com responsabilidade sobre outros. </a:t>
             </a:r>
             <a:r>
-              <a:rPr sz="1748" i="0" b="0">
+              <a:rPr sz="1650" i="0" b="0">
                 <a:solidFill>
                   <a:srgbClr val="2C322E"/>
                 </a:solidFill>
@@ -5795,7 +5795,7 @@
         </p:nvSpPr>
         <p:spPr>
           <a:xfrm>
-            <a:off x="914400" y="1261872"/>
+            <a:off x="914400" y="1463040"/>
             <a:ext cx="6400800" cy="274320"/>
           </a:xfrm>
           <a:prstGeom prst="rect">
@@ -5834,7 +5834,7 @@
         </p:nvSpPr>
         <p:spPr>
           <a:xfrm>
-            <a:off x="914400" y="1737360"/>
+            <a:off x="914400" y="1938528"/>
             <a:ext cx="8412480" cy="1735531"/>
           </a:xfrm>
           <a:prstGeom prst="rect">
@@ -5889,7 +5889,7 @@
         </p:nvSpPr>
         <p:spPr>
           <a:xfrm>
-            <a:off x="5891114" y="3036192"/>
+            <a:off x="5891114" y="3237360"/>
             <a:ext cx="2247046" cy="12802"/>
           </a:xfrm>
           <a:prstGeom prst="rect">
@@ -5933,8 +5933,8 @@
         </p:nvSpPr>
         <p:spPr>
           <a:xfrm>
-            <a:off x="914400" y="3792931"/>
-            <a:ext cx="6400800" cy="1356436"/>
+            <a:off x="914400" y="3994099"/>
+            <a:ext cx="6400800" cy="1493444"/>
           </a:xfrm>
           <a:prstGeom prst="rect">
             <a:avLst/>
@@ -5953,7 +5953,7 @@
               </a:lnSpc>
             </a:pPr>
             <a:r>
-              <a:rPr sz="1900" i="0" b="0">
+              <a:rPr sz="2100" i="0" b="0">
                 <a:solidFill>
                   <a:srgbClr val="5F6661"/>
                 </a:solidFill>
@@ -5972,7 +5972,7 @@
         </p:nvSpPr>
         <p:spPr>
           <a:xfrm>
-            <a:off x="9921240" y="2103120"/>
+            <a:off x="9921240" y="2304288"/>
             <a:ext cx="6400800" cy="274320"/>
           </a:xfrm>
           <a:prstGeom prst="rect">
@@ -6011,7 +6011,7 @@
         </p:nvSpPr>
         <p:spPr>
           <a:xfrm>
-            <a:off x="9921240" y="2487168"/>
+            <a:off x="9921240" y="2688336"/>
             <a:ext cx="6858000" cy="7315"/>
           </a:xfrm>
           <a:prstGeom prst="rect">
@@ -6055,7 +6055,7 @@
         </p:nvSpPr>
         <p:spPr>
           <a:xfrm>
-            <a:off x="9921240" y="2674620"/>
+            <a:off x="9921240" y="2875788"/>
             <a:ext cx="365760" cy="274320"/>
           </a:xfrm>
           <a:prstGeom prst="rect">
@@ -6075,7 +6075,7 @@
               </a:lnSpc>
             </a:pPr>
             <a:r>
-              <a:rPr sz="1557" i="0" b="0">
+              <a:rPr sz="1584" i="0" b="0">
                 <a:solidFill>
                   <a:srgbClr val="AE8C4E"/>
                 </a:solidFill>
@@ -6094,8 +6094,8 @@
         </p:nvSpPr>
         <p:spPr>
           <a:xfrm>
-            <a:off x="10424160" y="2633472"/>
-            <a:ext cx="6355080" cy="941202"/>
+            <a:off x="10424160" y="2834640"/>
+            <a:ext cx="6355080" cy="955514"/>
           </a:xfrm>
           <a:prstGeom prst="rect">
             <a:avLst/>
@@ -6114,7 +6114,7 @@
               </a:lnSpc>
             </a:pPr>
             <a:r>
-              <a:rPr sz="1900" i="0" b="0">
+              <a:rPr sz="1932" i="0" b="0">
                 <a:solidFill>
                   <a:srgbClr val="2C322E"/>
                 </a:solidFill>
@@ -6123,7 +6123,7 @@
               <a:t>Continuidade</a:t>
             </a:r>
             <a:r>
-              <a:rPr sz="1900" i="0" b="0">
+              <a:rPr sz="1932" i="0" b="0">
                 <a:solidFill>
                   <a:srgbClr val="5F6661"/>
                 </a:solidFill>
@@ -6142,7 +6142,7 @@
         </p:nvSpPr>
         <p:spPr>
           <a:xfrm>
-            <a:off x="9921240" y="3812418"/>
+            <a:off x="9921240" y="4027898"/>
             <a:ext cx="6858000" cy="7315"/>
           </a:xfrm>
           <a:prstGeom prst="rect">
@@ -6186,7 +6186,7 @@
         </p:nvSpPr>
         <p:spPr>
           <a:xfrm>
-            <a:off x="9921240" y="3999870"/>
+            <a:off x="9921240" y="4215350"/>
             <a:ext cx="365760" cy="274320"/>
           </a:xfrm>
           <a:prstGeom prst="rect">
@@ -6206,7 +6206,7 @@
               </a:lnSpc>
             </a:pPr>
             <a:r>
-              <a:rPr sz="1557" i="0" b="0">
+              <a:rPr sz="1584" i="0" b="0">
                 <a:solidFill>
                   <a:srgbClr val="AE8C4E"/>
                 </a:solidFill>
@@ -6225,8 +6225,8 @@
         </p:nvSpPr>
         <p:spPr>
           <a:xfrm>
-            <a:off x="10424160" y="3958722"/>
-            <a:ext cx="6355080" cy="941202"/>
+            <a:off x="10424160" y="4174202"/>
+            <a:ext cx="6355080" cy="955514"/>
           </a:xfrm>
           <a:prstGeom prst="rect">
             <a:avLst/>
@@ -6245,7 +6245,7 @@
               </a:lnSpc>
             </a:pPr>
             <a:r>
-              <a:rPr sz="1900" i="0" b="0">
+              <a:rPr sz="1932" i="0" b="0">
                 <a:solidFill>
                   <a:srgbClr val="2C322E"/>
                 </a:solidFill>
@@ -6254,7 +6254,7 @@
               <a:t>Proteção</a:t>
             </a:r>
             <a:r>
-              <a:rPr sz="1900" i="0" b="0">
+              <a:rPr sz="1932" i="0" b="0">
                 <a:solidFill>
                   <a:srgbClr val="5F6661"/>
                 </a:solidFill>
@@ -6273,7 +6273,7 @@
         </p:nvSpPr>
         <p:spPr>
           <a:xfrm>
-            <a:off x="9921240" y="5137668"/>
+            <a:off x="9921240" y="5367460"/>
             <a:ext cx="6858000" cy="7315"/>
           </a:xfrm>
           <a:prstGeom prst="rect">
@@ -6317,7 +6317,7 @@
         </p:nvSpPr>
         <p:spPr>
           <a:xfrm>
-            <a:off x="9921240" y="5325120"/>
+            <a:off x="9921240" y="5554912"/>
             <a:ext cx="365760" cy="274320"/>
           </a:xfrm>
           <a:prstGeom prst="rect">
@@ -6337,7 +6337,7 @@
               </a:lnSpc>
             </a:pPr>
             <a:r>
-              <a:rPr sz="1557" i="0" b="0">
+              <a:rPr sz="1584" i="0" b="0">
                 <a:solidFill>
                   <a:srgbClr val="AE8C4E"/>
                 </a:solidFill>
@@ -6356,8 +6356,8 @@
         </p:nvSpPr>
         <p:spPr>
           <a:xfrm>
-            <a:off x="10424160" y="5283972"/>
-            <a:ext cx="6355080" cy="941202"/>
+            <a:off x="10424160" y="5513764"/>
+            <a:ext cx="6355080" cy="955514"/>
           </a:xfrm>
           <a:prstGeom prst="rect">
             <a:avLst/>
@@ -6376,7 +6376,7 @@
               </a:lnSpc>
             </a:pPr>
             <a:r>
-              <a:rPr sz="1900" i="0" b="0">
+              <a:rPr sz="1932" i="0" b="0">
                 <a:solidFill>
                   <a:srgbClr val="2C322E"/>
                 </a:solidFill>
@@ -6385,7 +6385,7 @@
               <a:t>Sucessão</a:t>
             </a:r>
             <a:r>
-              <a:rPr sz="1900" i="0" b="0">
+              <a:rPr sz="1932" i="0" b="0">
                 <a:solidFill>
                   <a:srgbClr val="5F6661"/>
                 </a:solidFill>
@@ -6404,7 +6404,7 @@
         </p:nvSpPr>
         <p:spPr>
           <a:xfrm>
-            <a:off x="9921240" y="6462918"/>
+            <a:off x="9921240" y="6707022"/>
             <a:ext cx="6858000" cy="7315"/>
           </a:xfrm>
           <a:prstGeom prst="rect">
@@ -6448,7 +6448,7 @@
         </p:nvSpPr>
         <p:spPr>
           <a:xfrm>
-            <a:off x="9921240" y="6650370"/>
+            <a:off x="9921240" y="6894474"/>
             <a:ext cx="365760" cy="274320"/>
           </a:xfrm>
           <a:prstGeom prst="rect">
@@ -6468,7 +6468,7 @@
               </a:lnSpc>
             </a:pPr>
             <a:r>
-              <a:rPr sz="1557" i="0" b="0">
+              <a:rPr sz="1584" i="0" b="0">
                 <a:solidFill>
                   <a:srgbClr val="AE8C4E"/>
                 </a:solidFill>
@@ -6487,8 +6487,8 @@
         </p:nvSpPr>
         <p:spPr>
           <a:xfrm>
-            <a:off x="10424160" y="6609222"/>
-            <a:ext cx="6355080" cy="941202"/>
+            <a:off x="10424160" y="6853326"/>
+            <a:ext cx="6355080" cy="955514"/>
           </a:xfrm>
           <a:prstGeom prst="rect">
             <a:avLst/>
@@ -6507,7 +6507,7 @@
               </a:lnSpc>
             </a:pPr>
             <a:r>
-              <a:rPr sz="1900" i="0" b="0">
+              <a:rPr sz="1932" i="0" b="0">
                 <a:solidFill>
                   <a:srgbClr val="2C322E"/>
                 </a:solidFill>
@@ -6516,7 +6516,7 @@
               <a:t>Dignidade financeira</a:t>
             </a:r>
             <a:r>
-              <a:rPr sz="1900" i="0" b="0">
+              <a:rPr sz="1932" i="0" b="0">
                 <a:solidFill>
                   <a:srgbClr val="5F6661"/>
                 </a:solidFill>
@@ -6535,7 +6535,7 @@
         </p:nvSpPr>
         <p:spPr>
           <a:xfrm>
-            <a:off x="9921240" y="7788168"/>
+            <a:off x="9921240" y="8046583"/>
             <a:ext cx="6858000" cy="7315"/>
           </a:xfrm>
           <a:prstGeom prst="rect">
@@ -6579,7 +6579,7 @@
         </p:nvSpPr>
         <p:spPr>
           <a:xfrm>
-            <a:off x="9921240" y="7975620"/>
+            <a:off x="9921240" y="8234035"/>
             <a:ext cx="365760" cy="274320"/>
           </a:xfrm>
           <a:prstGeom prst="rect">
@@ -6599,7 +6599,7 @@
               </a:lnSpc>
             </a:pPr>
             <a:r>
-              <a:rPr sz="1557" i="0" b="0">
+              <a:rPr sz="1584" i="0" b="0">
                 <a:solidFill>
                   <a:srgbClr val="AE8C4E"/>
                 </a:solidFill>
@@ -6618,8 +6618,8 @@
         </p:nvSpPr>
         <p:spPr>
           <a:xfrm>
-            <a:off x="10424160" y="7934472"/>
-            <a:ext cx="6355080" cy="941202"/>
+            <a:off x="10424160" y="8192887"/>
+            <a:ext cx="6355080" cy="955514"/>
           </a:xfrm>
           <a:prstGeom prst="rect">
             <a:avLst/>
@@ -6638,7 +6638,7 @@
               </a:lnSpc>
             </a:pPr>
             <a:r>
-              <a:rPr sz="1900" i="0" b="0">
+              <a:rPr sz="1932" i="0" b="0">
                 <a:solidFill>
                   <a:srgbClr val="2C322E"/>
                 </a:solidFill>
@@ -6647,7 +6647,7 @@
               <a:t>Escolha e responsabilidade</a:t>
             </a:r>
             <a:r>
-              <a:rPr sz="1900" i="0" b="0">
+              <a:rPr sz="1932" i="0" b="0">
                 <a:solidFill>
                   <a:srgbClr val="5F6661"/>
                 </a:solidFill>
@@ -6666,7 +6666,7 @@
         </p:nvSpPr>
         <p:spPr>
           <a:xfrm>
-            <a:off x="9921240" y="9113418"/>
+            <a:off x="9921240" y="9386145"/>
             <a:ext cx="6858000" cy="7315"/>
           </a:xfrm>
           <a:prstGeom prst="rect">
@@ -6858,7 +6858,7 @@
         </p:nvSpPr>
         <p:spPr>
           <a:xfrm>
-            <a:off x="914400" y="1261872"/>
+            <a:off x="914400" y="2011096"/>
             <a:ext cx="6400800" cy="274320"/>
           </a:xfrm>
           <a:prstGeom prst="rect">
@@ -6897,7 +6897,7 @@
         </p:nvSpPr>
         <p:spPr>
           <a:xfrm>
-            <a:off x="914400" y="1737360"/>
+            <a:off x="914400" y="2486584"/>
             <a:ext cx="8412480" cy="913486"/>
           </a:xfrm>
           <a:prstGeom prst="rect">
@@ -6936,7 +6936,7 @@
         </p:nvSpPr>
         <p:spPr>
           <a:xfrm>
-            <a:off x="6534388" y="2214146"/>
+            <a:off x="6534388" y="2963370"/>
             <a:ext cx="10839212" cy="12802"/>
           </a:xfrm>
           <a:prstGeom prst="rect">
@@ -6980,7 +6980,7 @@
         </p:nvSpPr>
         <p:spPr>
           <a:xfrm>
-            <a:off x="914400" y="4343400"/>
+            <a:off x="914400" y="5092624"/>
             <a:ext cx="2838298" cy="726440"/>
           </a:xfrm>
           <a:prstGeom prst="rect">
@@ -7019,7 +7019,7 @@
         </p:nvSpPr>
         <p:spPr>
           <a:xfrm>
-            <a:off x="914400" y="5124704"/>
+            <a:off x="914400" y="5873928"/>
             <a:ext cx="2838298" cy="337820"/>
           </a:xfrm>
           <a:prstGeom prst="rect">
@@ -7058,7 +7058,7 @@
         </p:nvSpPr>
         <p:spPr>
           <a:xfrm>
-            <a:off x="914400" y="5553964"/>
+            <a:off x="914400" y="6303188"/>
             <a:ext cx="2838298" cy="10973"/>
           </a:xfrm>
           <a:prstGeom prst="rect">
@@ -7102,8 +7102,8 @@
         </p:nvSpPr>
         <p:spPr>
           <a:xfrm>
-            <a:off x="914400" y="5828284"/>
-            <a:ext cx="2838298" cy="853162"/>
+            <a:off x="914400" y="6577508"/>
+            <a:ext cx="2838298" cy="937193"/>
           </a:xfrm>
           <a:prstGeom prst="rect">
             <a:avLst/>
@@ -7122,7 +7122,7 @@
               </a:lnSpc>
             </a:pPr>
             <a:r>
-              <a:rPr sz="1748" i="0" b="0">
+              <a:rPr sz="1932" i="0" b="0">
                 <a:solidFill>
                   <a:srgbClr val="5F6661"/>
                 </a:solidFill>
@@ -7141,7 +7141,7 @@
         </p:nvSpPr>
         <p:spPr>
           <a:xfrm>
-            <a:off x="4319626" y="4343400"/>
+            <a:off x="4319626" y="5092624"/>
             <a:ext cx="2838298" cy="726440"/>
           </a:xfrm>
           <a:prstGeom prst="rect">
@@ -7180,7 +7180,7 @@
         </p:nvSpPr>
         <p:spPr>
           <a:xfrm>
-            <a:off x="4319626" y="5124704"/>
+            <a:off x="4319626" y="5873928"/>
             <a:ext cx="2838298" cy="337820"/>
           </a:xfrm>
           <a:prstGeom prst="rect">
@@ -7219,7 +7219,7 @@
         </p:nvSpPr>
         <p:spPr>
           <a:xfrm>
-            <a:off x="4319626" y="5553964"/>
+            <a:off x="4319626" y="6303188"/>
             <a:ext cx="2838298" cy="10973"/>
           </a:xfrm>
           <a:prstGeom prst="rect">
@@ -7263,8 +7263,8 @@
         </p:nvSpPr>
         <p:spPr>
           <a:xfrm>
-            <a:off x="4319626" y="5828284"/>
-            <a:ext cx="2838298" cy="853162"/>
+            <a:off x="4319626" y="6577508"/>
+            <a:ext cx="2838298" cy="937193"/>
           </a:xfrm>
           <a:prstGeom prst="rect">
             <a:avLst/>
@@ -7283,7 +7283,7 @@
               </a:lnSpc>
             </a:pPr>
             <a:r>
-              <a:rPr sz="1748" i="0" b="0">
+              <a:rPr sz="1932" i="0" b="0">
                 <a:solidFill>
                   <a:srgbClr val="5F6661"/>
                 </a:solidFill>
@@ -7302,7 +7302,7 @@
         </p:nvSpPr>
         <p:spPr>
           <a:xfrm>
-            <a:off x="7724851" y="4343400"/>
+            <a:off x="7724851" y="5092624"/>
             <a:ext cx="2838298" cy="726440"/>
           </a:xfrm>
           <a:prstGeom prst="rect">
@@ -7341,7 +7341,7 @@
         </p:nvSpPr>
         <p:spPr>
           <a:xfrm>
-            <a:off x="7724851" y="5124704"/>
+            <a:off x="7724851" y="5873928"/>
             <a:ext cx="2838298" cy="337820"/>
           </a:xfrm>
           <a:prstGeom prst="rect">
@@ -7380,7 +7380,7 @@
         </p:nvSpPr>
         <p:spPr>
           <a:xfrm>
-            <a:off x="7724851" y="5553964"/>
+            <a:off x="7724851" y="6303188"/>
             <a:ext cx="2838298" cy="10973"/>
           </a:xfrm>
           <a:prstGeom prst="rect">
@@ -7424,8 +7424,8 @@
         </p:nvSpPr>
         <p:spPr>
           <a:xfrm>
-            <a:off x="7724851" y="5828284"/>
-            <a:ext cx="2838298" cy="1252310"/>
+            <a:off x="7724851" y="6577508"/>
+            <a:ext cx="2838298" cy="1378357"/>
           </a:xfrm>
           <a:prstGeom prst="rect">
             <a:avLst/>
@@ -7444,7 +7444,7 @@
               </a:lnSpc>
             </a:pPr>
             <a:r>
-              <a:rPr sz="1748" i="0" b="0">
+              <a:rPr sz="1932" i="0" b="0">
                 <a:solidFill>
                   <a:srgbClr val="5F6661"/>
                 </a:solidFill>
@@ -7463,7 +7463,7 @@
         </p:nvSpPr>
         <p:spPr>
           <a:xfrm>
-            <a:off x="11130077" y="4343400"/>
+            <a:off x="11130077" y="5092624"/>
             <a:ext cx="2838298" cy="726440"/>
           </a:xfrm>
           <a:prstGeom prst="rect">
@@ -7502,7 +7502,7 @@
         </p:nvSpPr>
         <p:spPr>
           <a:xfrm>
-            <a:off x="11130077" y="5124704"/>
+            <a:off x="11130077" y="5873928"/>
             <a:ext cx="2838298" cy="337820"/>
           </a:xfrm>
           <a:prstGeom prst="rect">
@@ -7541,7 +7541,7 @@
         </p:nvSpPr>
         <p:spPr>
           <a:xfrm>
-            <a:off x="11130077" y="5553964"/>
+            <a:off x="11130077" y="6303188"/>
             <a:ext cx="2838298" cy="10973"/>
           </a:xfrm>
           <a:prstGeom prst="rect">
@@ -7585,8 +7585,8 @@
         </p:nvSpPr>
         <p:spPr>
           <a:xfrm>
-            <a:off x="11130077" y="5828284"/>
-            <a:ext cx="2838298" cy="853162"/>
+            <a:off x="11130077" y="6577508"/>
+            <a:ext cx="2838298" cy="937193"/>
           </a:xfrm>
           <a:prstGeom prst="rect">
             <a:avLst/>
@@ -7605,7 +7605,7 @@
               </a:lnSpc>
             </a:pPr>
             <a:r>
-              <a:rPr sz="1748" i="0" b="0">
+              <a:rPr sz="1932" i="0" b="0">
                 <a:solidFill>
                   <a:srgbClr val="5F6661"/>
                 </a:solidFill>
@@ -7624,7 +7624,7 @@
         </p:nvSpPr>
         <p:spPr>
           <a:xfrm>
-            <a:off x="14535302" y="4343400"/>
+            <a:off x="14535302" y="5092624"/>
             <a:ext cx="2838298" cy="726440"/>
           </a:xfrm>
           <a:prstGeom prst="rect">
@@ -7663,7 +7663,7 @@
         </p:nvSpPr>
         <p:spPr>
           <a:xfrm>
-            <a:off x="14535302" y="5124704"/>
+            <a:off x="14535302" y="5873928"/>
             <a:ext cx="2838298" cy="337820"/>
           </a:xfrm>
           <a:prstGeom prst="rect">
@@ -7702,7 +7702,7 @@
         </p:nvSpPr>
         <p:spPr>
           <a:xfrm>
-            <a:off x="14535302" y="5553964"/>
+            <a:off x="14535302" y="6303188"/>
             <a:ext cx="2838298" cy="10973"/>
           </a:xfrm>
           <a:prstGeom prst="rect">
@@ -7746,8 +7746,8 @@
         </p:nvSpPr>
         <p:spPr>
           <a:xfrm>
-            <a:off x="14535302" y="5828284"/>
-            <a:ext cx="2838298" cy="853162"/>
+            <a:off x="14535302" y="6577508"/>
+            <a:ext cx="2838298" cy="937193"/>
           </a:xfrm>
           <a:prstGeom prst="rect">
             <a:avLst/>
@@ -7766,7 +7766,7 @@
               </a:lnSpc>
             </a:pPr>
             <a:r>
-              <a:rPr sz="1748" i="0" b="0">
+              <a:rPr sz="1932" i="0" b="0">
                 <a:solidFill>
                   <a:srgbClr val="5F6661"/>
                 </a:solidFill>
@@ -8320,7 +8320,7 @@
         </p:nvSpPr>
         <p:spPr>
           <a:xfrm>
-            <a:off x="914400" y="1261872"/>
+            <a:off x="914400" y="1905173"/>
             <a:ext cx="6400800" cy="274320"/>
           </a:xfrm>
           <a:prstGeom prst="rect">
@@ -8359,7 +8359,7 @@
         </p:nvSpPr>
         <p:spPr>
           <a:xfrm>
-            <a:off x="914400" y="1737360"/>
+            <a:off x="914400" y="2380661"/>
             <a:ext cx="8412480" cy="913486"/>
           </a:xfrm>
           <a:prstGeom prst="rect">
@@ -8398,7 +8398,7 @@
         </p:nvSpPr>
         <p:spPr>
           <a:xfrm>
-            <a:off x="8004263" y="2214146"/>
+            <a:off x="8004263" y="2857447"/>
             <a:ext cx="9369337" cy="12802"/>
           </a:xfrm>
           <a:prstGeom prst="rect">
@@ -8442,7 +8442,7 @@
         </p:nvSpPr>
         <p:spPr>
           <a:xfrm>
-            <a:off x="914400" y="4069080"/>
+            <a:off x="914400" y="4712381"/>
             <a:ext cx="5059680" cy="274320"/>
           </a:xfrm>
           <a:prstGeom prst="rect">
@@ -8481,8 +8481,8 @@
         </p:nvSpPr>
         <p:spPr>
           <a:xfrm>
-            <a:off x="914400" y="4434840"/>
-            <a:ext cx="5059680" cy="551815"/>
+            <a:off x="914400" y="5078141"/>
+            <a:ext cx="5059680" cy="570230"/>
           </a:xfrm>
           <a:prstGeom prst="rect">
             <a:avLst/>
@@ -8501,7 +8501,7 @@
               </a:lnSpc>
             </a:pPr>
             <a:r>
-              <a:rPr sz="2500" i="0" b="0" spc="40">
+              <a:rPr sz="2600" i="0" b="0" spc="40">
                 <a:solidFill>
                   <a:srgbClr val="2C322E"/>
                 </a:solidFill>
@@ -8520,7 +8520,7 @@
         </p:nvSpPr>
         <p:spPr>
           <a:xfrm>
-            <a:off x="914400" y="4968367"/>
+            <a:off x="914400" y="5630083"/>
             <a:ext cx="5059680" cy="10973"/>
           </a:xfrm>
           <a:prstGeom prst="rect">
@@ -8564,8 +8564,8 @@
         </p:nvSpPr>
         <p:spPr>
           <a:xfrm>
-            <a:off x="914400" y="5224399"/>
-            <a:ext cx="5059680" cy="853162"/>
+            <a:off x="914400" y="5886115"/>
+            <a:ext cx="5059680" cy="937193"/>
           </a:xfrm>
           <a:prstGeom prst="rect">
             <a:avLst/>
@@ -8584,7 +8584,7 @@
               </a:lnSpc>
             </a:pPr>
             <a:r>
-              <a:rPr sz="1748" i="0" b="0">
+              <a:rPr sz="1932" i="0" b="0">
                 <a:solidFill>
                   <a:srgbClr val="5F6661"/>
                 </a:solidFill>
@@ -8603,7 +8603,7 @@
         </p:nvSpPr>
         <p:spPr>
           <a:xfrm>
-            <a:off x="6614160" y="4069080"/>
+            <a:off x="6614160" y="4712381"/>
             <a:ext cx="5059680" cy="274320"/>
           </a:xfrm>
           <a:prstGeom prst="rect">
@@ -8642,8 +8642,8 @@
         </p:nvSpPr>
         <p:spPr>
           <a:xfrm>
-            <a:off x="6614160" y="4434840"/>
-            <a:ext cx="5059680" cy="551815"/>
+            <a:off x="6614160" y="5078141"/>
+            <a:ext cx="5059680" cy="570230"/>
           </a:xfrm>
           <a:prstGeom prst="rect">
             <a:avLst/>
@@ -8662,7 +8662,7 @@
               </a:lnSpc>
             </a:pPr>
             <a:r>
-              <a:rPr sz="2500" i="0" b="0" spc="40">
+              <a:rPr sz="2600" i="0" b="0" spc="40">
                 <a:solidFill>
                   <a:srgbClr val="2C322E"/>
                 </a:solidFill>
@@ -8681,7 +8681,7 @@
         </p:nvSpPr>
         <p:spPr>
           <a:xfrm>
-            <a:off x="6614160" y="4968367"/>
+            <a:off x="6614160" y="5630083"/>
             <a:ext cx="5059680" cy="10973"/>
           </a:xfrm>
           <a:prstGeom prst="rect">
@@ -8725,8 +8725,8 @@
         </p:nvSpPr>
         <p:spPr>
           <a:xfrm>
-            <a:off x="6614160" y="5224399"/>
-            <a:ext cx="5059680" cy="853162"/>
+            <a:off x="6614160" y="5886115"/>
+            <a:ext cx="5059680" cy="937193"/>
           </a:xfrm>
           <a:prstGeom prst="rect">
             <a:avLst/>
@@ -8745,7 +8745,7 @@
               </a:lnSpc>
             </a:pPr>
             <a:r>
-              <a:rPr sz="1748" i="0" b="0">
+              <a:rPr sz="1932" i="0" b="0">
                 <a:solidFill>
                   <a:srgbClr val="5F6661"/>
                 </a:solidFill>
@@ -8764,7 +8764,7 @@
         </p:nvSpPr>
         <p:spPr>
           <a:xfrm>
-            <a:off x="12313920" y="4069080"/>
+            <a:off x="12313920" y="4712381"/>
             <a:ext cx="5059680" cy="274320"/>
           </a:xfrm>
           <a:prstGeom prst="rect">
@@ -8803,8 +8803,8 @@
         </p:nvSpPr>
         <p:spPr>
           <a:xfrm>
-            <a:off x="12313920" y="4434840"/>
-            <a:ext cx="5059680" cy="551815"/>
+            <a:off x="12313920" y="5078141"/>
+            <a:ext cx="5059680" cy="570230"/>
           </a:xfrm>
           <a:prstGeom prst="rect">
             <a:avLst/>
@@ -8823,7 +8823,7 @@
               </a:lnSpc>
             </a:pPr>
             <a:r>
-              <a:rPr sz="2500" i="0" b="0" spc="40">
+              <a:rPr sz="2600" i="0" b="0" spc="40">
                 <a:solidFill>
                   <a:srgbClr val="2C322E"/>
                 </a:solidFill>
@@ -8842,7 +8842,7 @@
         </p:nvSpPr>
         <p:spPr>
           <a:xfrm>
-            <a:off x="12313920" y="4968367"/>
+            <a:off x="12313920" y="5630083"/>
             <a:ext cx="5059680" cy="10973"/>
           </a:xfrm>
           <a:prstGeom prst="rect">
@@ -8886,8 +8886,8 @@
         </p:nvSpPr>
         <p:spPr>
           <a:xfrm>
-            <a:off x="12313920" y="5224399"/>
-            <a:ext cx="5059680" cy="853162"/>
+            <a:off x="12313920" y="5886115"/>
+            <a:ext cx="5059680" cy="937193"/>
           </a:xfrm>
           <a:prstGeom prst="rect">
             <a:avLst/>
@@ -8906,7 +8906,7 @@
               </a:lnSpc>
             </a:pPr>
             <a:r>
-              <a:rPr sz="1748" i="0" b="0">
+              <a:rPr sz="1932" i="0" b="0">
                 <a:solidFill>
                   <a:srgbClr val="5F6661"/>
                 </a:solidFill>
@@ -8925,8 +8925,8 @@
         </p:nvSpPr>
         <p:spPr>
           <a:xfrm>
-            <a:off x="914400" y="6781649"/>
-            <a:ext cx="12179808" cy="488721"/>
+            <a:off x="914400" y="7527396"/>
+            <a:ext cx="12179808" cy="534391"/>
           </a:xfrm>
           <a:prstGeom prst="rect">
             <a:avLst/>
@@ -8945,7 +8945,7 @@
               </a:lnSpc>
             </a:pPr>
             <a:r>
-              <a:rPr sz="1900" i="0" b="0">
+              <a:rPr sz="2100" i="0" b="0">
                 <a:solidFill>
                   <a:srgbClr val="2C322E"/>
                 </a:solidFill>
@@ -8954,7 +8954,7 @@
               <a:t>Nunca:</a:t>
             </a:r>
             <a:r>
-              <a:rPr sz="1900" i="0" b="0">
+              <a:rPr sz="2100" i="0" b="0">
                 <a:solidFill>
                   <a:srgbClr val="5F6661"/>
                 </a:solidFill>
@@ -9121,7 +9121,7 @@
         </p:nvSpPr>
         <p:spPr>
           <a:xfrm>
-            <a:off x="914400" y="1261872"/>
+            <a:off x="914400" y="1463040"/>
             <a:ext cx="6400800" cy="274320"/>
           </a:xfrm>
           <a:prstGeom prst="rect">
@@ -9160,7 +9160,7 @@
         </p:nvSpPr>
         <p:spPr>
           <a:xfrm>
-            <a:off x="914400" y="1737360"/>
+            <a:off x="914400" y="1938528"/>
             <a:ext cx="8412480" cy="1735531"/>
           </a:xfrm>
           <a:prstGeom prst="rect">
@@ -9215,7 +9215,7 @@
         </p:nvSpPr>
         <p:spPr>
           <a:xfrm>
-            <a:off x="6400916" y="3036192"/>
+            <a:off x="6400916" y="3237360"/>
             <a:ext cx="1737244" cy="12802"/>
           </a:xfrm>
           <a:prstGeom prst="rect">
@@ -9259,8 +9259,8 @@
         </p:nvSpPr>
         <p:spPr>
           <a:xfrm>
-            <a:off x="914400" y="3792931"/>
-            <a:ext cx="6400800" cy="922579"/>
+            <a:off x="914400" y="3994099"/>
+            <a:ext cx="6400800" cy="1013917"/>
           </a:xfrm>
           <a:prstGeom prst="rect">
             <a:avLst/>
@@ -9279,7 +9279,7 @@
               </a:lnSpc>
             </a:pPr>
             <a:r>
-              <a:rPr sz="1900" i="0" b="0">
+              <a:rPr sz="2100" i="0" b="0">
                 <a:solidFill>
                   <a:srgbClr val="5F6661"/>
                 </a:solidFill>
@@ -9298,8 +9298,8 @@
         </p:nvSpPr>
         <p:spPr>
           <a:xfrm>
-            <a:off x="914400" y="4971542"/>
-            <a:ext cx="6400800" cy="488721"/>
+            <a:off x="914400" y="5264048"/>
+            <a:ext cx="6400800" cy="534391"/>
           </a:xfrm>
           <a:prstGeom prst="rect">
             <a:avLst/>
@@ -9318,7 +9318,7 @@
               </a:lnSpc>
             </a:pPr>
             <a:r>
-              <a:rPr sz="1900" i="0" b="0">
+              <a:rPr sz="2100" i="0" b="0">
                 <a:solidFill>
                   <a:srgbClr val="5F6661"/>
                 </a:solidFill>
@@ -9337,7 +9337,7 @@
         </p:nvSpPr>
         <p:spPr>
           <a:xfrm>
-            <a:off x="9921240" y="1783080"/>
+            <a:off x="9921240" y="1847088"/>
             <a:ext cx="6858000" cy="7315"/>
           </a:xfrm>
           <a:prstGeom prst="rect">
@@ -9381,7 +9381,7 @@
         </p:nvSpPr>
         <p:spPr>
           <a:xfrm>
-            <a:off x="9921240" y="1965960"/>
+            <a:off x="9921240" y="2029968"/>
             <a:ext cx="6858000" cy="274320"/>
           </a:xfrm>
           <a:prstGeom prst="rect">
@@ -9420,8 +9420,8 @@
         </p:nvSpPr>
         <p:spPr>
           <a:xfrm>
-            <a:off x="9921240" y="2276856"/>
-            <a:ext cx="6858000" cy="495077"/>
+            <a:off x="9921240" y="2340864"/>
+            <a:ext cx="6858000" cy="537565"/>
           </a:xfrm>
           <a:prstGeom prst="rect">
             <a:avLst/>
@@ -9440,7 +9440,7 @@
               </a:lnSpc>
             </a:pPr>
             <a:r>
-              <a:rPr sz="1805" i="0" b="0" strike="sngStrike">
+              <a:rPr sz="1995" i="0" b="0" strike="sngStrike">
                 <a:solidFill>
                   <a:srgbClr val="AE8C4E"/>
                 </a:solidFill>
@@ -9459,7 +9459,7 @@
         </p:nvSpPr>
         <p:spPr>
           <a:xfrm>
-            <a:off x="9921240" y="2954813"/>
+            <a:off x="9921240" y="3061309"/>
             <a:ext cx="6858000" cy="274320"/>
           </a:xfrm>
           <a:prstGeom prst="rect">
@@ -9498,8 +9498,8 @@
         </p:nvSpPr>
         <p:spPr>
           <a:xfrm>
-            <a:off x="9921240" y="3265709"/>
-            <a:ext cx="6858000" cy="495077"/>
+            <a:off x="9921240" y="3372205"/>
+            <a:ext cx="6858000" cy="537565"/>
           </a:xfrm>
           <a:prstGeom prst="rect">
             <a:avLst/>
@@ -9518,7 +9518,7 @@
               </a:lnSpc>
             </a:pPr>
             <a:r>
-              <a:rPr sz="1805" i="0" b="0">
+              <a:rPr sz="1995" i="0" b="0">
                 <a:solidFill>
                   <a:srgbClr val="2C322E"/>
                 </a:solidFill>
@@ -9537,7 +9537,7 @@
         </p:nvSpPr>
         <p:spPr>
           <a:xfrm>
-            <a:off x="9921240" y="4035106"/>
+            <a:off x="9921240" y="4184090"/>
             <a:ext cx="6858000" cy="7315"/>
           </a:xfrm>
           <a:prstGeom prst="rect">
@@ -9581,7 +9581,7 @@
         </p:nvSpPr>
         <p:spPr>
           <a:xfrm>
-            <a:off x="9921240" y="4217986"/>
+            <a:off x="9921240" y="4366970"/>
             <a:ext cx="6858000" cy="274320"/>
           </a:xfrm>
           <a:prstGeom prst="rect">
@@ -9620,8 +9620,8 @@
         </p:nvSpPr>
         <p:spPr>
           <a:xfrm>
-            <a:off x="9921240" y="4528882"/>
-            <a:ext cx="6858000" cy="495077"/>
+            <a:off x="9921240" y="4677866"/>
+            <a:ext cx="6858000" cy="537565"/>
           </a:xfrm>
           <a:prstGeom prst="rect">
             <a:avLst/>
@@ -9640,7 +9640,7 @@
               </a:lnSpc>
             </a:pPr>
             <a:r>
-              <a:rPr sz="1805" i="0" b="0" strike="sngStrike">
+              <a:rPr sz="1995" i="0" b="0" strike="sngStrike">
                 <a:solidFill>
                   <a:srgbClr val="AE8C4E"/>
                 </a:solidFill>
@@ -9659,7 +9659,7 @@
         </p:nvSpPr>
         <p:spPr>
           <a:xfrm>
-            <a:off x="9921240" y="5206839"/>
+            <a:off x="9921240" y="5398311"/>
             <a:ext cx="6858000" cy="274320"/>
           </a:xfrm>
           <a:prstGeom prst="rect">
@@ -9698,8 +9698,8 @@
         </p:nvSpPr>
         <p:spPr>
           <a:xfrm>
-            <a:off x="9921240" y="5517735"/>
-            <a:ext cx="6858000" cy="898714"/>
+            <a:off x="9921240" y="5709207"/>
+            <a:ext cx="6858000" cy="983690"/>
           </a:xfrm>
           <a:prstGeom prst="rect">
             <a:avLst/>
@@ -9718,7 +9718,7 @@
               </a:lnSpc>
             </a:pPr>
             <a:r>
-              <a:rPr sz="1805" i="0" b="0">
+              <a:rPr sz="1995" i="0" b="0">
                 <a:solidFill>
                   <a:srgbClr val="2C322E"/>
                 </a:solidFill>
@@ -9737,7 +9737,7 @@
         </p:nvSpPr>
         <p:spPr>
           <a:xfrm>
-            <a:off x="9921240" y="6690769"/>
+            <a:off x="9921240" y="6967217"/>
             <a:ext cx="6858000" cy="7315"/>
           </a:xfrm>
           <a:prstGeom prst="rect">
@@ -9781,7 +9781,7 @@
         </p:nvSpPr>
         <p:spPr>
           <a:xfrm>
-            <a:off x="9921240" y="6873649"/>
+            <a:off x="9921240" y="7150097"/>
             <a:ext cx="6858000" cy="274320"/>
           </a:xfrm>
           <a:prstGeom prst="rect">
@@ -9820,8 +9820,8 @@
         </p:nvSpPr>
         <p:spPr>
           <a:xfrm>
-            <a:off x="9921240" y="7184545"/>
-            <a:ext cx="6858000" cy="495077"/>
+            <a:off x="9921240" y="7460993"/>
+            <a:ext cx="6858000" cy="537565"/>
           </a:xfrm>
           <a:prstGeom prst="rect">
             <a:avLst/>
@@ -9840,7 +9840,7 @@
               </a:lnSpc>
             </a:pPr>
             <a:r>
-              <a:rPr sz="1805" i="0" b="0" strike="sngStrike">
+              <a:rPr sz="1995" i="0" b="0" strike="sngStrike">
                 <a:solidFill>
                   <a:srgbClr val="AE8C4E"/>
                 </a:solidFill>
@@ -9859,7 +9859,7 @@
         </p:nvSpPr>
         <p:spPr>
           <a:xfrm>
-            <a:off x="9921240" y="7862502"/>
+            <a:off x="9921240" y="8181439"/>
             <a:ext cx="6858000" cy="274320"/>
           </a:xfrm>
           <a:prstGeom prst="rect">
@@ -9898,8 +9898,8 @@
         </p:nvSpPr>
         <p:spPr>
           <a:xfrm>
-            <a:off x="9921240" y="8173398"/>
-            <a:ext cx="6858000" cy="898714"/>
+            <a:off x="9921240" y="8492335"/>
+            <a:ext cx="6858000" cy="983690"/>
           </a:xfrm>
           <a:prstGeom prst="rect">
             <a:avLst/>
@@ -9918,7 +9918,7 @@
               </a:lnSpc>
             </a:pPr>
             <a:r>
-              <a:rPr sz="1805" i="0" b="0">
+              <a:rPr sz="1995" i="0" b="0">
                 <a:solidFill>
                   <a:srgbClr val="2C322E"/>
                 </a:solidFill>
@@ -10085,7 +10085,7 @@
         </p:nvSpPr>
         <p:spPr>
           <a:xfrm>
-            <a:off x="914400" y="1261872"/>
+            <a:off x="914400" y="1463040"/>
             <a:ext cx="6400800" cy="274320"/>
           </a:xfrm>
           <a:prstGeom prst="rect">
@@ -10124,7 +10124,7 @@
         </p:nvSpPr>
         <p:spPr>
           <a:xfrm>
-            <a:off x="914400" y="1737360"/>
+            <a:off x="914400" y="1938528"/>
             <a:ext cx="8412480" cy="913486"/>
           </a:xfrm>
           <a:prstGeom prst="rect">
@@ -10163,7 +10163,7 @@
         </p:nvSpPr>
         <p:spPr>
           <a:xfrm>
-            <a:off x="8253313" y="2214146"/>
+            <a:off x="8253313" y="2415314"/>
             <a:ext cx="9120287" cy="12802"/>
           </a:xfrm>
           <a:prstGeom prst="rect">
@@ -10207,7 +10207,7 @@
         </p:nvSpPr>
         <p:spPr>
           <a:xfrm>
-            <a:off x="914400" y="4069080"/>
+            <a:off x="914400" y="4270248"/>
             <a:ext cx="5059680" cy="274320"/>
           </a:xfrm>
           <a:prstGeom prst="rect">
@@ -10246,8 +10246,8 @@
         </p:nvSpPr>
         <p:spPr>
           <a:xfrm>
-            <a:off x="914400" y="4434840"/>
-            <a:ext cx="5059680" cy="551815"/>
+            <a:off x="914400" y="4636008"/>
+            <a:ext cx="5059680" cy="570230"/>
           </a:xfrm>
           <a:prstGeom prst="rect">
             <a:avLst/>
@@ -10266,7 +10266,7 @@
               </a:lnSpc>
             </a:pPr>
             <a:r>
-              <a:rPr sz="2500" i="0" b="0" spc="40">
+              <a:rPr sz="2600" i="0" b="0" spc="40">
                 <a:solidFill>
                   <a:srgbClr val="2C322E"/>
                 </a:solidFill>
@@ -10285,7 +10285,7 @@
         </p:nvSpPr>
         <p:spPr>
           <a:xfrm>
-            <a:off x="914400" y="4968367"/>
+            <a:off x="914400" y="5187950"/>
             <a:ext cx="5059680" cy="10973"/>
           </a:xfrm>
           <a:prstGeom prst="rect">
@@ -10329,8 +10329,8 @@
         </p:nvSpPr>
         <p:spPr>
           <a:xfrm>
-            <a:off x="914400" y="5224399"/>
-            <a:ext cx="5059680" cy="1252310"/>
+            <a:off x="914400" y="5443982"/>
+            <a:ext cx="5059680" cy="1378357"/>
           </a:xfrm>
           <a:prstGeom prst="rect">
             <a:avLst/>
@@ -10349,7 +10349,7 @@
               </a:lnSpc>
             </a:pPr>
             <a:r>
-              <a:rPr sz="1748" i="0" b="0">
+              <a:rPr sz="1932" i="0" b="0">
                 <a:solidFill>
                   <a:srgbClr val="5F6661"/>
                 </a:solidFill>
@@ -10368,7 +10368,7 @@
         </p:nvSpPr>
         <p:spPr>
           <a:xfrm>
-            <a:off x="6614160" y="4069080"/>
+            <a:off x="6614160" y="4270248"/>
             <a:ext cx="5059680" cy="274320"/>
           </a:xfrm>
           <a:prstGeom prst="rect">
@@ -10407,8 +10407,8 @@
         </p:nvSpPr>
         <p:spPr>
           <a:xfrm>
-            <a:off x="6614160" y="4434840"/>
-            <a:ext cx="5059680" cy="551815"/>
+            <a:off x="6614160" y="4636008"/>
+            <a:ext cx="5059680" cy="570230"/>
           </a:xfrm>
           <a:prstGeom prst="rect">
             <a:avLst/>
@@ -10427,7 +10427,7 @@
               </a:lnSpc>
             </a:pPr>
             <a:r>
-              <a:rPr sz="2500" i="0" b="0" spc="40">
+              <a:rPr sz="2600" i="0" b="0" spc="40">
                 <a:solidFill>
                   <a:srgbClr val="2C322E"/>
                 </a:solidFill>
@@ -10446,7 +10446,7 @@
         </p:nvSpPr>
         <p:spPr>
           <a:xfrm>
-            <a:off x="6614160" y="4968367"/>
+            <a:off x="6614160" y="5187950"/>
             <a:ext cx="5059680" cy="10973"/>
           </a:xfrm>
           <a:prstGeom prst="rect">
@@ -10490,8 +10490,8 @@
         </p:nvSpPr>
         <p:spPr>
           <a:xfrm>
-            <a:off x="6614160" y="5224399"/>
-            <a:ext cx="5059680" cy="853162"/>
+            <a:off x="6614160" y="5443982"/>
+            <a:ext cx="5059680" cy="1378357"/>
           </a:xfrm>
           <a:prstGeom prst="rect">
             <a:avLst/>
@@ -10510,7 +10510,7 @@
               </a:lnSpc>
             </a:pPr>
             <a:r>
-              <a:rPr sz="1748" i="0" b="0">
+              <a:rPr sz="1932" i="0" b="0">
                 <a:solidFill>
                   <a:srgbClr val="5F6661"/>
                 </a:solidFill>
@@ -10529,7 +10529,7 @@
         </p:nvSpPr>
         <p:spPr>
           <a:xfrm>
-            <a:off x="12313920" y="4069080"/>
+            <a:off x="12313920" y="4270248"/>
             <a:ext cx="5059680" cy="274320"/>
           </a:xfrm>
           <a:prstGeom prst="rect">
@@ -10568,8 +10568,8 @@
         </p:nvSpPr>
         <p:spPr>
           <a:xfrm>
-            <a:off x="12313920" y="4434840"/>
-            <a:ext cx="5059680" cy="551815"/>
+            <a:off x="12313920" y="4636008"/>
+            <a:ext cx="5059680" cy="570230"/>
           </a:xfrm>
           <a:prstGeom prst="rect">
             <a:avLst/>
@@ -10588,7 +10588,7 @@
               </a:lnSpc>
             </a:pPr>
             <a:r>
-              <a:rPr sz="2500" i="0" b="0" spc="40" strike="sngStrike">
+              <a:rPr sz="2600" i="0" b="0" spc="40" strike="sngStrike">
                 <a:solidFill>
                   <a:srgbClr val="2C322E"/>
                 </a:solidFill>
@@ -10607,7 +10607,7 @@
         </p:nvSpPr>
         <p:spPr>
           <a:xfrm>
-            <a:off x="12313920" y="4968367"/>
+            <a:off x="12313920" y="5187950"/>
             <a:ext cx="5059680" cy="10973"/>
           </a:xfrm>
           <a:prstGeom prst="rect">
@@ -10651,8 +10651,8 @@
         </p:nvSpPr>
         <p:spPr>
           <a:xfrm>
-            <a:off x="12313920" y="5224399"/>
-            <a:ext cx="5059680" cy="1252310"/>
+            <a:off x="12313920" y="5443982"/>
+            <a:ext cx="5059680" cy="1378357"/>
           </a:xfrm>
           <a:prstGeom prst="rect">
             <a:avLst/>
@@ -10671,7 +10671,7 @@
               </a:lnSpc>
             </a:pPr>
             <a:r>
-              <a:rPr sz="1748" i="0" b="0" strike="sngStrike">
+              <a:rPr sz="1932" i="0" b="0" strike="sngStrike">
                 <a:solidFill>
                   <a:srgbClr val="5F6661"/>
                 </a:solidFill>
@@ -10680,7 +10680,7 @@
               <a:t>Fatalidade · desespero · oportunidade imperdível · a melhor proteção do mercado.</a:t>
             </a:r>
             <a:r>
-              <a:rPr sz="1748" i="0" b="0">
+              <a:rPr sz="1932" i="0" b="0">
                 <a:solidFill>
                   <a:srgbClr val="5F6661"/>
                 </a:solidFill>
@@ -10699,8 +10699,8 @@
         </p:nvSpPr>
         <p:spPr>
           <a:xfrm>
-            <a:off x="914400" y="7180797"/>
-            <a:ext cx="12179808" cy="922579"/>
+            <a:off x="914400" y="7526427"/>
+            <a:ext cx="12179808" cy="1013917"/>
           </a:xfrm>
           <a:prstGeom prst="rect">
             <a:avLst/>
@@ -10719,7 +10719,7 @@
               </a:lnSpc>
             </a:pPr>
             <a:r>
-              <a:rPr sz="1900" i="0" b="0">
+              <a:rPr sz="2100" i="0" b="0">
                 <a:solidFill>
                   <a:srgbClr val="5F6661"/>
                 </a:solidFill>
@@ -10728,7 +10728,7 @@
               <a:t>Frases curtas. Ponto final. Argumento concreto. A comunicação acompanha o comportamento da marca: </a:t>
             </a:r>
             <a:r>
-              <a:rPr sz="1900" i="0" b="0">
+              <a:rPr sz="2100" i="0" b="0">
                 <a:solidFill>
                   <a:srgbClr val="2C322E"/>
                 </a:solidFill>
@@ -11298,7 +11298,7 @@
         </p:nvSpPr>
         <p:spPr>
           <a:xfrm>
-            <a:off x="914400" y="1261872"/>
+            <a:off x="914400" y="2180958"/>
             <a:ext cx="6400800" cy="274320"/>
           </a:xfrm>
           <a:prstGeom prst="rect">
@@ -11337,7 +11337,7 @@
         </p:nvSpPr>
         <p:spPr>
           <a:xfrm>
-            <a:off x="914400" y="1737360"/>
+            <a:off x="914400" y="2656446"/>
             <a:ext cx="8412480" cy="1735531"/>
           </a:xfrm>
           <a:prstGeom prst="rect">
@@ -11392,7 +11392,7 @@
         </p:nvSpPr>
         <p:spPr>
           <a:xfrm>
-            <a:off x="6729984" y="3036192"/>
+            <a:off x="6729984" y="3955278"/>
             <a:ext cx="1408176" cy="12802"/>
           </a:xfrm>
           <a:prstGeom prst="rect">
@@ -11436,8 +11436,8 @@
         </p:nvSpPr>
         <p:spPr>
           <a:xfrm>
-            <a:off x="9921240" y="1874520"/>
-            <a:ext cx="6858000" cy="1356436"/>
+            <a:off x="9921240" y="2793606"/>
+            <a:ext cx="6858000" cy="1493444"/>
           </a:xfrm>
           <a:prstGeom prst="rect">
             <a:avLst/>
@@ -11456,7 +11456,7 @@
               </a:lnSpc>
             </a:pPr>
             <a:r>
-              <a:rPr sz="1900" i="0" b="0">
+              <a:rPr sz="2100" i="0" b="0">
                 <a:solidFill>
                   <a:srgbClr val="5F6661"/>
                 </a:solidFill>
@@ -11465,7 +11465,7 @@
               <a:t>Este documento reúne, em um só lugar, a </a:t>
             </a:r>
             <a:r>
-              <a:rPr sz="1900" i="0" b="0">
+              <a:rPr sz="2100" i="0" b="0">
                 <a:solidFill>
                   <a:srgbClr val="2C322E"/>
                 </a:solidFill>
@@ -11474,7 +11474,7 @@
               <a:t>essência, a voz, o posicionamento e a identidade visual</a:t>
             </a:r>
             <a:r>
-              <a:rPr sz="1900" i="0" b="0">
+              <a:rPr sz="2100" i="0" b="0">
                 <a:solidFill>
                   <a:srgbClr val="5F6661"/>
                 </a:solidFill>
@@ -11493,8 +11493,8 @@
         </p:nvSpPr>
         <p:spPr>
           <a:xfrm>
-            <a:off x="9921240" y="3486988"/>
-            <a:ext cx="6858000" cy="1356436"/>
+            <a:off x="9921240" y="4543082"/>
+            <a:ext cx="6858000" cy="1493444"/>
           </a:xfrm>
           <a:prstGeom prst="rect">
             <a:avLst/>
@@ -11513,7 +11513,7 @@
               </a:lnSpc>
             </a:pPr>
             <a:r>
-              <a:rPr sz="1900" i="0" b="0">
+              <a:rPr sz="2100" i="0" b="0">
                 <a:solidFill>
                   <a:srgbClr val="5F6661"/>
                 </a:solidFill>
@@ -11522,7 +11522,7 @@
               <a:t>Ele existe para garantir a </a:t>
             </a:r>
             <a:r>
-              <a:rPr sz="1900" i="0" b="0">
+              <a:rPr sz="2100" i="0" b="0">
                 <a:solidFill>
                   <a:srgbClr val="2C322E"/>
                 </a:solidFill>
@@ -11531,7 +11531,7 @@
               <a:t>unidade da marca</a:t>
             </a:r>
             <a:r>
-              <a:rPr sz="1900" i="0" b="0">
+              <a:rPr sz="2100" i="0" b="0">
                 <a:solidFill>
                   <a:srgbClr val="5F6661"/>
                 </a:solidFill>
@@ -11550,8 +11550,8 @@
         </p:nvSpPr>
         <p:spPr>
           <a:xfrm>
-            <a:off x="9921240" y="5099456"/>
-            <a:ext cx="6858000" cy="922579"/>
+            <a:off x="9921240" y="6292558"/>
+            <a:ext cx="6858000" cy="1493444"/>
           </a:xfrm>
           <a:prstGeom prst="rect">
             <a:avLst/>
@@ -11570,7 +11570,7 @@
               </a:lnSpc>
             </a:pPr>
             <a:r>
-              <a:rPr sz="1900" i="0" b="0">
+              <a:rPr sz="2100" i="0" b="0">
                 <a:solidFill>
                   <a:srgbClr val="5F6661"/>
                 </a:solidFill>
@@ -11579,7 +11579,7 @@
               <a:t>Use como guia antes de criar, aprovar ou contratar qualquer material. </a:t>
             </a:r>
             <a:r>
-              <a:rPr sz="1900" i="0" b="0">
+              <a:rPr sz="2100" i="0" b="0">
                 <a:solidFill>
                   <a:srgbClr val="2C322E"/>
                 </a:solidFill>
@@ -11746,7 +11746,7 @@
         </p:nvSpPr>
         <p:spPr>
           <a:xfrm>
-            <a:off x="914400" y="1261872"/>
+            <a:off x="914400" y="1570901"/>
             <a:ext cx="6400800" cy="274320"/>
           </a:xfrm>
           <a:prstGeom prst="rect">
@@ -11785,7 +11785,7 @@
         </p:nvSpPr>
         <p:spPr>
           <a:xfrm>
-            <a:off x="914400" y="1737360"/>
+            <a:off x="914400" y="2046389"/>
             <a:ext cx="8412480" cy="913486"/>
           </a:xfrm>
           <a:prstGeom prst="rect">
@@ -11824,7 +11824,7 @@
         </p:nvSpPr>
         <p:spPr>
           <a:xfrm>
-            <a:off x="7961290" y="2214146"/>
+            <a:off x="7961290" y="2523175"/>
             <a:ext cx="9412310" cy="12802"/>
           </a:xfrm>
           <a:prstGeom prst="rect">
@@ -11868,7 +11868,7 @@
         </p:nvSpPr>
         <p:spPr>
           <a:xfrm>
-            <a:off x="914400" y="3977640"/>
+            <a:off x="914400" y="4286669"/>
             <a:ext cx="3703320" cy="2697480"/>
           </a:xfrm>
           <a:prstGeom prst="rect">
@@ -11936,7 +11936,7 @@
         </p:nvSpPr>
         <p:spPr>
           <a:xfrm>
-            <a:off x="914400" y="6931152"/>
+            <a:off x="914400" y="7240181"/>
             <a:ext cx="3703320" cy="310896"/>
           </a:xfrm>
           <a:prstGeom prst="rect">
@@ -11975,8 +11975,8 @@
         </p:nvSpPr>
         <p:spPr>
           <a:xfrm>
-            <a:off x="914400" y="7278624"/>
-            <a:ext cx="3703320" cy="762737"/>
+            <a:off x="914400" y="7587653"/>
+            <a:ext cx="3703320" cy="808406"/>
           </a:xfrm>
           <a:prstGeom prst="rect">
             <a:avLst/>
@@ -11995,7 +11995,7 @@
               </a:lnSpc>
             </a:pPr>
             <a:r>
-              <a:rPr sz="1550" i="0" b="0">
+              <a:rPr sz="1650" i="0" b="0">
                 <a:solidFill>
                   <a:srgbClr val="5F6661"/>
                 </a:solidFill>
@@ -12014,7 +12014,7 @@
         </p:nvSpPr>
         <p:spPr>
           <a:xfrm>
-            <a:off x="5166360" y="3977640"/>
+            <a:off x="5166360" y="4286669"/>
             <a:ext cx="3703320" cy="2697480"/>
           </a:xfrm>
           <a:prstGeom prst="rect">
@@ -12082,7 +12082,7 @@
         </p:nvSpPr>
         <p:spPr>
           <a:xfrm>
-            <a:off x="5166360" y="6931152"/>
+            <a:off x="5166360" y="7240181"/>
             <a:ext cx="3703320" cy="310896"/>
           </a:xfrm>
           <a:prstGeom prst="rect">
@@ -12121,8 +12121,8 @@
         </p:nvSpPr>
         <p:spPr>
           <a:xfrm>
-            <a:off x="5166360" y="7278624"/>
-            <a:ext cx="3703320" cy="762737"/>
+            <a:off x="5166360" y="7587653"/>
+            <a:ext cx="3703320" cy="808406"/>
           </a:xfrm>
           <a:prstGeom prst="rect">
             <a:avLst/>
@@ -12141,7 +12141,7 @@
               </a:lnSpc>
             </a:pPr>
             <a:r>
-              <a:rPr sz="1550" i="0" b="0">
+              <a:rPr sz="1650" i="0" b="0">
                 <a:solidFill>
                   <a:srgbClr val="5F6661"/>
                 </a:solidFill>
@@ -12160,7 +12160,7 @@
         </p:nvSpPr>
         <p:spPr>
           <a:xfrm>
-            <a:off x="9418320" y="3977640"/>
+            <a:off x="9418320" y="4286669"/>
             <a:ext cx="3703320" cy="2697480"/>
           </a:xfrm>
           <a:prstGeom prst="rect">
@@ -12228,7 +12228,7 @@
         </p:nvSpPr>
         <p:spPr>
           <a:xfrm>
-            <a:off x="9418320" y="6931152"/>
+            <a:off x="9418320" y="7240181"/>
             <a:ext cx="3703320" cy="310896"/>
           </a:xfrm>
           <a:prstGeom prst="rect">
@@ -12267,8 +12267,8 @@
         </p:nvSpPr>
         <p:spPr>
           <a:xfrm>
-            <a:off x="9418320" y="7278624"/>
-            <a:ext cx="3703320" cy="762737"/>
+            <a:off x="9418320" y="7587653"/>
+            <a:ext cx="3703320" cy="808406"/>
           </a:xfrm>
           <a:prstGeom prst="rect">
             <a:avLst/>
@@ -12287,7 +12287,7 @@
               </a:lnSpc>
             </a:pPr>
             <a:r>
-              <a:rPr sz="1550" i="0" b="0">
+              <a:rPr sz="1650" i="0" b="0">
                 <a:solidFill>
                   <a:srgbClr val="5F6661"/>
                 </a:solidFill>
@@ -12306,7 +12306,7 @@
         </p:nvSpPr>
         <p:spPr>
           <a:xfrm>
-            <a:off x="13670280" y="3977640"/>
+            <a:off x="13670280" y="4286669"/>
             <a:ext cx="3703320" cy="2697480"/>
           </a:xfrm>
           <a:prstGeom prst="rect">
@@ -12374,7 +12374,7 @@
         </p:nvSpPr>
         <p:spPr>
           <a:xfrm>
-            <a:off x="13670280" y="6931152"/>
+            <a:off x="13670280" y="7240181"/>
             <a:ext cx="3703320" cy="310896"/>
           </a:xfrm>
           <a:prstGeom prst="rect">
@@ -12413,8 +12413,8 @@
         </p:nvSpPr>
         <p:spPr>
           <a:xfrm>
-            <a:off x="13670280" y="7278624"/>
-            <a:ext cx="3703320" cy="762737"/>
+            <a:off x="13670280" y="7587653"/>
+            <a:ext cx="3703320" cy="808406"/>
           </a:xfrm>
           <a:prstGeom prst="rect">
             <a:avLst/>
@@ -12433,7 +12433,7 @@
               </a:lnSpc>
             </a:pPr>
             <a:r>
-              <a:rPr sz="1550" i="0" b="0">
+              <a:rPr sz="1650" i="0" b="0">
                 <a:solidFill>
                   <a:srgbClr val="5F6661"/>
                 </a:solidFill>
@@ -12600,7 +12600,7 @@
         </p:nvSpPr>
         <p:spPr>
           <a:xfrm>
-            <a:off x="914400" y="1261872"/>
+            <a:off x="914400" y="1463040"/>
             <a:ext cx="6400800" cy="274320"/>
           </a:xfrm>
           <a:prstGeom prst="rect">
@@ -12639,7 +12639,7 @@
         </p:nvSpPr>
         <p:spPr>
           <a:xfrm>
-            <a:off x="914400" y="1737360"/>
+            <a:off x="914400" y="1938528"/>
             <a:ext cx="8412480" cy="913486"/>
           </a:xfrm>
           <a:prstGeom prst="rect">
@@ -12678,7 +12678,7 @@
         </p:nvSpPr>
         <p:spPr>
           <a:xfrm>
-            <a:off x="8866638" y="2214146"/>
+            <a:off x="8866638" y="2415314"/>
             <a:ext cx="-728478" cy="12802"/>
           </a:xfrm>
           <a:prstGeom prst="rect">
@@ -12722,8 +12722,8 @@
         </p:nvSpPr>
         <p:spPr>
           <a:xfrm>
-            <a:off x="914400" y="2970886"/>
-            <a:ext cx="6400800" cy="922579"/>
+            <a:off x="914400" y="3172054"/>
+            <a:ext cx="6400800" cy="1013917"/>
           </a:xfrm>
           <a:prstGeom prst="rect">
             <a:avLst/>
@@ -12742,7 +12742,7 @@
               </a:lnSpc>
             </a:pPr>
             <a:r>
-              <a:rPr sz="1900" i="0" b="0">
+              <a:rPr sz="2100" i="0" b="0">
                 <a:solidFill>
                   <a:srgbClr val="5F6661"/>
                 </a:solidFill>
@@ -12761,7 +12761,7 @@
         </p:nvSpPr>
         <p:spPr>
           <a:xfrm>
-            <a:off x="9921240" y="2103120"/>
+            <a:off x="9921240" y="2304288"/>
             <a:ext cx="6400800" cy="274320"/>
           </a:xfrm>
           <a:prstGeom prst="rect">
@@ -12800,7 +12800,7 @@
         </p:nvSpPr>
         <p:spPr>
           <a:xfrm>
-            <a:off x="9921240" y="2487168"/>
+            <a:off x="9921240" y="2688336"/>
             <a:ext cx="6858000" cy="7315"/>
           </a:xfrm>
           <a:prstGeom prst="rect">
@@ -12844,7 +12844,7 @@
         </p:nvSpPr>
         <p:spPr>
           <a:xfrm>
-            <a:off x="9921240" y="2674620"/>
+            <a:off x="9921240" y="2875788"/>
             <a:ext cx="365760" cy="274320"/>
           </a:xfrm>
           <a:prstGeom prst="rect">
@@ -12864,7 +12864,7 @@
               </a:lnSpc>
             </a:pPr>
             <a:r>
-              <a:rPr sz="1433" i="0" b="0">
+              <a:rPr sz="1353" i="0" b="0">
                 <a:solidFill>
                   <a:srgbClr val="AE8C4E"/>
                 </a:solidFill>
@@ -12883,8 +12883,8 @@
         </p:nvSpPr>
         <p:spPr>
           <a:xfrm>
-            <a:off x="10424160" y="2633472"/>
-            <a:ext cx="6355080" cy="873221"/>
+            <a:off x="10424160" y="2834640"/>
+            <a:ext cx="6355080" cy="829391"/>
           </a:xfrm>
           <a:prstGeom prst="rect">
             <a:avLst/>
@@ -12903,7 +12903,7 @@
               </a:lnSpc>
             </a:pPr>
             <a:r>
-              <a:rPr sz="1748" i="0" b="0">
+              <a:rPr sz="1650" i="0" b="0">
                 <a:solidFill>
                   <a:srgbClr val="2C322E"/>
                 </a:solidFill>
@@ -12912,7 +12912,7 @@
               <a:t>Respiro.</a:t>
             </a:r>
             <a:r>
-              <a:rPr sz="1748" i="0" b="0">
+              <a:rPr sz="1650" i="0" b="0">
                 <a:solidFill>
                   <a:srgbClr val="5F6661"/>
                 </a:solidFill>
@@ -12931,7 +12931,7 @@
         </p:nvSpPr>
         <p:spPr>
           <a:xfrm>
-            <a:off x="9921240" y="3744437"/>
+            <a:off x="9921240" y="3901775"/>
             <a:ext cx="6858000" cy="7315"/>
           </a:xfrm>
           <a:prstGeom prst="rect">
@@ -12975,7 +12975,7 @@
         </p:nvSpPr>
         <p:spPr>
           <a:xfrm>
-            <a:off x="9921240" y="3931889"/>
+            <a:off x="9921240" y="4089227"/>
             <a:ext cx="365760" cy="274320"/>
           </a:xfrm>
           <a:prstGeom prst="rect">
@@ -12995,7 +12995,7 @@
               </a:lnSpc>
             </a:pPr>
             <a:r>
-              <a:rPr sz="1433" i="0" b="0">
+              <a:rPr sz="1353" i="0" b="0">
                 <a:solidFill>
                   <a:srgbClr val="AE8C4E"/>
                 </a:solidFill>
@@ -13014,8 +13014,8 @@
         </p:nvSpPr>
         <p:spPr>
           <a:xfrm>
-            <a:off x="10424160" y="3890741"/>
-            <a:ext cx="6355080" cy="873221"/>
+            <a:off x="10424160" y="4048079"/>
+            <a:ext cx="6355080" cy="829391"/>
           </a:xfrm>
           <a:prstGeom prst="rect">
             <a:avLst/>
@@ -13034,7 +13034,7 @@
               </a:lnSpc>
             </a:pPr>
             <a:r>
-              <a:rPr sz="1748" i="0" b="0">
+              <a:rPr sz="1650" i="0" b="0">
                 <a:solidFill>
                   <a:srgbClr val="2C322E"/>
                 </a:solidFill>
@@ -13043,7 +13043,7 @@
               <a:t>Contraste.</a:t>
             </a:r>
             <a:r>
-              <a:rPr sz="1748" i="0" b="0">
+              <a:rPr sz="1650" i="0" b="0">
                 <a:solidFill>
                   <a:srgbClr val="5F6661"/>
                 </a:solidFill>
@@ -13062,7 +13062,7 @@
         </p:nvSpPr>
         <p:spPr>
           <a:xfrm>
-            <a:off x="9921240" y="5001706"/>
+            <a:off x="9921240" y="5115215"/>
             <a:ext cx="6858000" cy="7315"/>
           </a:xfrm>
           <a:prstGeom prst="rect">
@@ -13106,7 +13106,7 @@
         </p:nvSpPr>
         <p:spPr>
           <a:xfrm>
-            <a:off x="9921240" y="5189158"/>
+            <a:off x="9921240" y="5302667"/>
             <a:ext cx="365760" cy="274320"/>
           </a:xfrm>
           <a:prstGeom prst="rect">
@@ -13126,7 +13126,7 @@
               </a:lnSpc>
             </a:pPr>
             <a:r>
-              <a:rPr sz="1433" i="0" b="0">
+              <a:rPr sz="1353" i="0" b="0">
                 <a:solidFill>
                   <a:srgbClr val="AE8C4E"/>
                 </a:solidFill>
@@ -13145,8 +13145,8 @@
         </p:nvSpPr>
         <p:spPr>
           <a:xfrm>
-            <a:off x="10424160" y="5148010"/>
-            <a:ext cx="6355080" cy="482331"/>
+            <a:off x="10424160" y="5261519"/>
+            <a:ext cx="6355080" cy="460416"/>
           </a:xfrm>
           <a:prstGeom prst="rect">
             <a:avLst/>
@@ -13165,7 +13165,7 @@
               </a:lnSpc>
             </a:pPr>
             <a:r>
-              <a:rPr sz="1748" i="0" b="0">
+              <a:rPr sz="1650" i="0" b="0">
                 <a:solidFill>
                   <a:srgbClr val="2C322E"/>
                 </a:solidFill>
@@ -13174,7 +13174,7 @@
               <a:t>Proporção.</a:t>
             </a:r>
             <a:r>
-              <a:rPr sz="1748" i="0" b="0">
+              <a:rPr sz="1650" i="0" b="0">
                 <a:solidFill>
                   <a:srgbClr val="5F6661"/>
                 </a:solidFill>
@@ -13193,7 +13193,7 @@
         </p:nvSpPr>
         <p:spPr>
           <a:xfrm>
-            <a:off x="9921240" y="5868085"/>
+            <a:off x="9921240" y="5959678"/>
             <a:ext cx="6858000" cy="7315"/>
           </a:xfrm>
           <a:prstGeom prst="rect">
@@ -13237,7 +13237,7 @@
         </p:nvSpPr>
         <p:spPr>
           <a:xfrm>
-            <a:off x="9921240" y="6055537"/>
+            <a:off x="9921240" y="6147130"/>
             <a:ext cx="365760" cy="274320"/>
           </a:xfrm>
           <a:prstGeom prst="rect">
@@ -13257,7 +13257,7 @@
               </a:lnSpc>
             </a:pPr>
             <a:r>
-              <a:rPr sz="1433" i="0" b="0">
+              <a:rPr sz="1353" i="0" b="0">
                 <a:solidFill>
                   <a:srgbClr val="AE8C4E"/>
                 </a:solidFill>
@@ -13276,8 +13276,8 @@
         </p:nvSpPr>
         <p:spPr>
           <a:xfrm>
-            <a:off x="10424160" y="6014389"/>
-            <a:ext cx="6355080" cy="482331"/>
+            <a:off x="10424160" y="6105982"/>
+            <a:ext cx="6355080" cy="460416"/>
           </a:xfrm>
           <a:prstGeom prst="rect">
             <a:avLst/>
@@ -13296,7 +13296,7 @@
               </a:lnSpc>
             </a:pPr>
             <a:r>
-              <a:rPr sz="1748" i="0" b="0">
+              <a:rPr sz="1650" i="0" b="0">
                 <a:solidFill>
                   <a:srgbClr val="2C322E"/>
                 </a:solidFill>
@@ -13305,7 +13305,7 @@
               <a:t>Tamanho mínimo.</a:t>
             </a:r>
             <a:r>
-              <a:rPr sz="1748" i="0" b="0">
+              <a:rPr sz="1650" i="0" b="0">
                 <a:solidFill>
                   <a:srgbClr val="5F6661"/>
                 </a:solidFill>
@@ -13324,7 +13324,7 @@
         </p:nvSpPr>
         <p:spPr>
           <a:xfrm>
-            <a:off x="9921240" y="6734463"/>
+            <a:off x="9921240" y="6804142"/>
             <a:ext cx="6858000" cy="7315"/>
           </a:xfrm>
           <a:prstGeom prst="rect">
@@ -13368,7 +13368,7 @@
         </p:nvSpPr>
         <p:spPr>
           <a:xfrm>
-            <a:off x="9921240" y="6921915"/>
+            <a:off x="9921240" y="6991594"/>
             <a:ext cx="365760" cy="274320"/>
           </a:xfrm>
           <a:prstGeom prst="rect">
@@ -13388,7 +13388,7 @@
               </a:lnSpc>
             </a:pPr>
             <a:r>
-              <a:rPr sz="1433" i="0" b="0">
+              <a:rPr sz="1353" i="0" b="0">
                 <a:solidFill>
                   <a:srgbClr val="AE8C4E"/>
                 </a:solidFill>
@@ -13407,8 +13407,8 @@
         </p:nvSpPr>
         <p:spPr>
           <a:xfrm>
-            <a:off x="10424160" y="6880767"/>
-            <a:ext cx="6355080" cy="873221"/>
+            <a:off x="10424160" y="6950446"/>
+            <a:ext cx="6355080" cy="829391"/>
           </a:xfrm>
           <a:prstGeom prst="rect">
             <a:avLst/>
@@ -13427,7 +13427,7 @@
               </a:lnSpc>
             </a:pPr>
             <a:r>
-              <a:rPr sz="1748" i="0" b="0">
+              <a:rPr sz="1650" i="0" b="0">
                 <a:solidFill>
                   <a:srgbClr val="2C322E"/>
                 </a:solidFill>
@@ -13436,7 +13436,7 @@
               <a:t>Uma marca por peça.</a:t>
             </a:r>
             <a:r>
-              <a:rPr sz="1748" i="0" b="0">
+              <a:rPr sz="1650" i="0" b="0">
                 <a:solidFill>
                   <a:srgbClr val="5F6661"/>
                 </a:solidFill>
@@ -13455,7 +13455,7 @@
         </p:nvSpPr>
         <p:spPr>
           <a:xfrm>
-            <a:off x="9921240" y="7991732"/>
+            <a:off x="9921240" y="8017581"/>
             <a:ext cx="6858000" cy="7315"/>
           </a:xfrm>
           <a:prstGeom prst="rect">
@@ -13499,8 +13499,8 @@
         </p:nvSpPr>
         <p:spPr>
           <a:xfrm>
-            <a:off x="9921240" y="8375780"/>
-            <a:ext cx="6858000" cy="853162"/>
+            <a:off x="9921240" y="8401629"/>
+            <a:ext cx="6858000" cy="808406"/>
           </a:xfrm>
           <a:prstGeom prst="rect">
             <a:avLst/>
@@ -13519,7 +13519,7 @@
               </a:lnSpc>
             </a:pPr>
             <a:r>
-              <a:rPr sz="1748" i="0" b="0">
+              <a:rPr sz="1650" i="0" b="0">
                 <a:solidFill>
                   <a:srgbClr val="5F6661"/>
                 </a:solidFill>
@@ -13528,7 +13528,7 @@
               <a:t>Nenhuma sombra, nenhum contorno, nenhum efeito. </a:t>
             </a:r>
             <a:r>
-              <a:rPr sz="1748" i="0" b="0">
+              <a:rPr sz="1650" i="0" b="0">
                 <a:solidFill>
                   <a:srgbClr val="2C322E"/>
                 </a:solidFill>
@@ -13695,7 +13695,7 @@
         </p:nvSpPr>
         <p:spPr>
           <a:xfrm>
-            <a:off x="914400" y="1261872"/>
+            <a:off x="914400" y="1463040"/>
             <a:ext cx="6400800" cy="274320"/>
           </a:xfrm>
           <a:prstGeom prst="rect">
@@ -13734,7 +13734,7 @@
         </p:nvSpPr>
         <p:spPr>
           <a:xfrm>
-            <a:off x="914400" y="1737360"/>
+            <a:off x="914400" y="1938528"/>
             <a:ext cx="8412480" cy="913486"/>
           </a:xfrm>
           <a:prstGeom prst="rect">
@@ -13773,7 +13773,7 @@
         </p:nvSpPr>
         <p:spPr>
           <a:xfrm>
-            <a:off x="4043326" y="2214146"/>
+            <a:off x="4043326" y="2415314"/>
             <a:ext cx="13330274" cy="12802"/>
           </a:xfrm>
           <a:prstGeom prst="rect">
@@ -13817,7 +13817,7 @@
         </p:nvSpPr>
         <p:spPr>
           <a:xfrm>
-            <a:off x="914400" y="3931920"/>
+            <a:off x="914400" y="4133088"/>
             <a:ext cx="2889504" cy="2651760"/>
           </a:xfrm>
           <a:prstGeom prst="rect">
@@ -13861,7 +13861,7 @@
         </p:nvSpPr>
         <p:spPr>
           <a:xfrm>
-            <a:off x="914400" y="6858000"/>
+            <a:off x="914400" y="7059168"/>
             <a:ext cx="2889504" cy="310896"/>
           </a:xfrm>
           <a:prstGeom prst="rect">
@@ -13900,7 +13900,7 @@
         </p:nvSpPr>
         <p:spPr>
           <a:xfrm>
-            <a:off x="914400" y="7205472"/>
+            <a:off x="914400" y="7406640"/>
             <a:ext cx="2889504" cy="310896"/>
           </a:xfrm>
           <a:prstGeom prst="rect">
@@ -13939,8 +13939,8 @@
         </p:nvSpPr>
         <p:spPr>
           <a:xfrm>
-            <a:off x="914400" y="7571232"/>
-            <a:ext cx="2889504" cy="762737"/>
+            <a:off x="914400" y="7772400"/>
+            <a:ext cx="2889504" cy="1185177"/>
           </a:xfrm>
           <a:prstGeom prst="rect">
             <a:avLst/>
@@ -13959,7 +13959,7 @@
               </a:lnSpc>
             </a:pPr>
             <a:r>
-              <a:rPr sz="1550" i="0" b="0">
+              <a:rPr sz="1650" i="0" b="0">
                 <a:solidFill>
                   <a:srgbClr val="5F6661"/>
                 </a:solidFill>
@@ -13978,7 +13978,7 @@
         </p:nvSpPr>
         <p:spPr>
           <a:xfrm>
-            <a:off x="4306824" y="3931920"/>
+            <a:off x="4306824" y="4133088"/>
             <a:ext cx="2889504" cy="2651760"/>
           </a:xfrm>
           <a:prstGeom prst="rect">
@@ -14022,7 +14022,7 @@
         </p:nvSpPr>
         <p:spPr>
           <a:xfrm>
-            <a:off x="4306824" y="6858000"/>
+            <a:off x="4306824" y="7059168"/>
             <a:ext cx="2889504" cy="310896"/>
           </a:xfrm>
           <a:prstGeom prst="rect">
@@ -14061,7 +14061,7 @@
         </p:nvSpPr>
         <p:spPr>
           <a:xfrm>
-            <a:off x="4306824" y="7205472"/>
+            <a:off x="4306824" y="7406640"/>
             <a:ext cx="2889504" cy="310896"/>
           </a:xfrm>
           <a:prstGeom prst="rect">
@@ -14100,8 +14100,8 @@
         </p:nvSpPr>
         <p:spPr>
           <a:xfrm>
-            <a:off x="4306824" y="7571232"/>
-            <a:ext cx="2889504" cy="1116673"/>
+            <a:off x="4306824" y="7772400"/>
+            <a:ext cx="2889504" cy="1185177"/>
           </a:xfrm>
           <a:prstGeom prst="rect">
             <a:avLst/>
@@ -14120,7 +14120,7 @@
               </a:lnSpc>
             </a:pPr>
             <a:r>
-              <a:rPr sz="1550" i="0" b="0">
+              <a:rPr sz="1650" i="0" b="0">
                 <a:solidFill>
                   <a:srgbClr val="5F6661"/>
                 </a:solidFill>
@@ -14139,7 +14139,7 @@
         </p:nvSpPr>
         <p:spPr>
           <a:xfrm>
-            <a:off x="7699248" y="3931920"/>
+            <a:off x="7699248" y="4133088"/>
             <a:ext cx="2889504" cy="2651760"/>
           </a:xfrm>
           <a:prstGeom prst="rect">
@@ -14183,7 +14183,7 @@
         </p:nvSpPr>
         <p:spPr>
           <a:xfrm>
-            <a:off x="7699248" y="6858000"/>
+            <a:off x="7699248" y="7059168"/>
             <a:ext cx="2889504" cy="310896"/>
           </a:xfrm>
           <a:prstGeom prst="rect">
@@ -14222,7 +14222,7 @@
         </p:nvSpPr>
         <p:spPr>
           <a:xfrm>
-            <a:off x="7699248" y="7205472"/>
+            <a:off x="7699248" y="7406640"/>
             <a:ext cx="2889504" cy="310896"/>
           </a:xfrm>
           <a:prstGeom prst="rect">
@@ -14261,8 +14261,8 @@
         </p:nvSpPr>
         <p:spPr>
           <a:xfrm>
-            <a:off x="7699248" y="7571232"/>
-            <a:ext cx="2889504" cy="1116673"/>
+            <a:off x="7699248" y="7772400"/>
+            <a:ext cx="2889504" cy="1185177"/>
           </a:xfrm>
           <a:prstGeom prst="rect">
             <a:avLst/>
@@ -14281,7 +14281,7 @@
               </a:lnSpc>
             </a:pPr>
             <a:r>
-              <a:rPr sz="1550" i="0" b="0">
+              <a:rPr sz="1650" i="0" b="0">
                 <a:solidFill>
                   <a:srgbClr val="5F6661"/>
                 </a:solidFill>
@@ -14300,7 +14300,7 @@
         </p:nvSpPr>
         <p:spPr>
           <a:xfrm>
-            <a:off x="11091672" y="3931920"/>
+            <a:off x="11091672" y="4133088"/>
             <a:ext cx="2889504" cy="2651760"/>
           </a:xfrm>
           <a:prstGeom prst="rect">
@@ -14344,7 +14344,7 @@
         </p:nvSpPr>
         <p:spPr>
           <a:xfrm>
-            <a:off x="11091672" y="6858000"/>
+            <a:off x="11091672" y="7059168"/>
             <a:ext cx="2889504" cy="310896"/>
           </a:xfrm>
           <a:prstGeom prst="rect">
@@ -14383,7 +14383,7 @@
         </p:nvSpPr>
         <p:spPr>
           <a:xfrm>
-            <a:off x="11091672" y="7205472"/>
+            <a:off x="11091672" y="7406640"/>
             <a:ext cx="2889504" cy="310896"/>
           </a:xfrm>
           <a:prstGeom prst="rect">
@@ -14422,8 +14422,8 @@
         </p:nvSpPr>
         <p:spPr>
           <a:xfrm>
-            <a:off x="11091672" y="7571232"/>
-            <a:ext cx="2889504" cy="762737"/>
+            <a:off x="11091672" y="7772400"/>
+            <a:ext cx="2889504" cy="808406"/>
           </a:xfrm>
           <a:prstGeom prst="rect">
             <a:avLst/>
@@ -14442,7 +14442,7 @@
               </a:lnSpc>
             </a:pPr>
             <a:r>
-              <a:rPr sz="1550" i="0" b="0">
+              <a:rPr sz="1650" i="0" b="0">
                 <a:solidFill>
                   <a:srgbClr val="5F6661"/>
                 </a:solidFill>
@@ -14461,7 +14461,7 @@
         </p:nvSpPr>
         <p:spPr>
           <a:xfrm>
-            <a:off x="14484096" y="3931920"/>
+            <a:off x="14484096" y="4133088"/>
             <a:ext cx="2889504" cy="2651760"/>
           </a:xfrm>
           <a:prstGeom prst="rect">
@@ -14507,7 +14507,7 @@
         </p:nvSpPr>
         <p:spPr>
           <a:xfrm>
-            <a:off x="14484096" y="6858000"/>
+            <a:off x="14484096" y="7059168"/>
             <a:ext cx="2889504" cy="310896"/>
           </a:xfrm>
           <a:prstGeom prst="rect">
@@ -14546,7 +14546,7 @@
         </p:nvSpPr>
         <p:spPr>
           <a:xfrm>
-            <a:off x="14484096" y="7205472"/>
+            <a:off x="14484096" y="7406640"/>
             <a:ext cx="2889504" cy="310896"/>
           </a:xfrm>
           <a:prstGeom prst="rect">
@@ -14585,8 +14585,8 @@
         </p:nvSpPr>
         <p:spPr>
           <a:xfrm>
-            <a:off x="14484096" y="7571232"/>
-            <a:ext cx="2889504" cy="762737"/>
+            <a:off x="14484096" y="7772400"/>
+            <a:ext cx="2889504" cy="808406"/>
           </a:xfrm>
           <a:prstGeom prst="rect">
             <a:avLst/>
@@ -14605,7 +14605,7 @@
               </a:lnSpc>
             </a:pPr>
             <a:r>
-              <a:rPr sz="1550" i="0" b="0">
+              <a:rPr sz="1650" i="0" b="0">
                 <a:solidFill>
                   <a:srgbClr val="5F6661"/>
                 </a:solidFill>
@@ -14772,7 +14772,7 @@
         </p:nvSpPr>
         <p:spPr>
           <a:xfrm>
-            <a:off x="914400" y="1261872"/>
+            <a:off x="914400" y="1463040"/>
             <a:ext cx="6400800" cy="274320"/>
           </a:xfrm>
           <a:prstGeom prst="rect">
@@ -14811,7 +14811,7 @@
         </p:nvSpPr>
         <p:spPr>
           <a:xfrm>
-            <a:off x="914400" y="1737360"/>
+            <a:off x="914400" y="1938528"/>
             <a:ext cx="8412480" cy="913486"/>
           </a:xfrm>
           <a:prstGeom prst="rect">
@@ -14850,7 +14850,7 @@
         </p:nvSpPr>
         <p:spPr>
           <a:xfrm>
-            <a:off x="5383055" y="2214146"/>
+            <a:off x="5383055" y="2415314"/>
             <a:ext cx="11990545" cy="12802"/>
           </a:xfrm>
           <a:prstGeom prst="rect">
@@ -14894,7 +14894,7 @@
         </p:nvSpPr>
         <p:spPr>
           <a:xfrm>
-            <a:off x="914400" y="3886200"/>
+            <a:off x="914400" y="4087368"/>
             <a:ext cx="16459200" cy="274320"/>
           </a:xfrm>
           <a:prstGeom prst="rect">
@@ -14933,7 +14933,7 @@
         </p:nvSpPr>
         <p:spPr>
           <a:xfrm>
-            <a:off x="914400" y="4233672"/>
+            <a:off x="914400" y="4434840"/>
             <a:ext cx="11521440" cy="868680"/>
           </a:xfrm>
           <a:prstGeom prst="rect">
@@ -14972,8 +14972,8 @@
         </p:nvSpPr>
         <p:spPr>
           <a:xfrm>
-            <a:off x="12435840" y="4306824"/>
-            <a:ext cx="4937760" cy="762737"/>
+            <a:off x="12435840" y="4507992"/>
+            <a:ext cx="4937760" cy="808406"/>
           </a:xfrm>
           <a:prstGeom prst="rect">
             <a:avLst/>
@@ -14992,7 +14992,7 @@
               </a:lnSpc>
             </a:pPr>
             <a:r>
-              <a:rPr sz="1550" i="0" b="0">
+              <a:rPr sz="1650" i="0" b="0">
                 <a:solidFill>
                   <a:srgbClr val="5F6661"/>
                 </a:solidFill>
@@ -15011,7 +15011,7 @@
         </p:nvSpPr>
         <p:spPr>
           <a:xfrm>
-            <a:off x="914400" y="5440680"/>
+            <a:off x="914400" y="5568696"/>
             <a:ext cx="16459200" cy="7315"/>
           </a:xfrm>
           <a:prstGeom prst="rect">
@@ -15055,7 +15055,7 @@
         </p:nvSpPr>
         <p:spPr>
           <a:xfrm>
-            <a:off x="914400" y="5916168"/>
+            <a:off x="914400" y="5989320"/>
             <a:ext cx="16459200" cy="274320"/>
           </a:xfrm>
           <a:prstGeom prst="rect">
@@ -15094,7 +15094,7 @@
         </p:nvSpPr>
         <p:spPr>
           <a:xfrm>
-            <a:off x="914400" y="6263640"/>
+            <a:off x="914400" y="6336792"/>
             <a:ext cx="11521440" cy="868680"/>
           </a:xfrm>
           <a:prstGeom prst="rect">
@@ -15133,8 +15133,8 @@
         </p:nvSpPr>
         <p:spPr>
           <a:xfrm>
-            <a:off x="12435840" y="6336792"/>
-            <a:ext cx="4937760" cy="1116673"/>
+            <a:off x="12435840" y="6409944"/>
+            <a:ext cx="4937760" cy="1185177"/>
           </a:xfrm>
           <a:prstGeom prst="rect">
             <a:avLst/>
@@ -15153,7 +15153,7 @@
               </a:lnSpc>
             </a:pPr>
             <a:r>
-              <a:rPr sz="1550" i="0" b="0">
+              <a:rPr sz="1650" i="0" b="0">
                 <a:solidFill>
                   <a:srgbClr val="5F6661"/>
                 </a:solidFill>
@@ -15216,7 +15216,7 @@
         </p:nvSpPr>
         <p:spPr>
           <a:xfrm>
-            <a:off x="914400" y="7946136"/>
+            <a:off x="914400" y="7891272"/>
             <a:ext cx="16459200" cy="274320"/>
           </a:xfrm>
           <a:prstGeom prst="rect">
@@ -15255,7 +15255,7 @@
         </p:nvSpPr>
         <p:spPr>
           <a:xfrm>
-            <a:off x="914400" y="8293608"/>
+            <a:off x="914400" y="8238744"/>
             <a:ext cx="11521440" cy="868680"/>
           </a:xfrm>
           <a:prstGeom prst="rect">
@@ -15294,8 +15294,8 @@
         </p:nvSpPr>
         <p:spPr>
           <a:xfrm>
-            <a:off x="12435840" y="8366760"/>
-            <a:ext cx="4937760" cy="1116673"/>
+            <a:off x="12435840" y="8311896"/>
+            <a:ext cx="4937760" cy="1185177"/>
           </a:xfrm>
           <a:prstGeom prst="rect">
             <a:avLst/>
@@ -15314,7 +15314,7 @@
               </a:lnSpc>
             </a:pPr>
             <a:r>
-              <a:rPr sz="1550" i="0" b="0">
+              <a:rPr sz="1650" i="0" b="0">
                 <a:solidFill>
                   <a:srgbClr val="5F6661"/>
                 </a:solidFill>
@@ -15333,7 +15333,7 @@
         </p:nvSpPr>
         <p:spPr>
           <a:xfrm>
-            <a:off x="914400" y="9500616"/>
+            <a:off x="914400" y="9372600"/>
             <a:ext cx="16459200" cy="7315"/>
           </a:xfrm>
           <a:prstGeom prst="rect">
@@ -15377,8 +15377,8 @@
         </p:nvSpPr>
         <p:spPr>
           <a:xfrm>
-            <a:off x="914400" y="10158984"/>
-            <a:ext cx="11850624" cy="762737"/>
+            <a:off x="914400" y="9976104"/>
+            <a:ext cx="11850624" cy="808406"/>
           </a:xfrm>
           <a:prstGeom prst="rect">
             <a:avLst/>
@@ -15397,7 +15397,7 @@
               </a:lnSpc>
             </a:pPr>
             <a:r>
-              <a:rPr sz="1550" i="0" b="0">
+              <a:rPr sz="1650" i="0" b="0">
                 <a:solidFill>
                   <a:srgbClr val="9AA09A"/>
                 </a:solidFill>
@@ -16398,7 +16398,7 @@
         </p:nvSpPr>
         <p:spPr>
           <a:xfrm>
-            <a:off x="914400" y="1261872"/>
+            <a:off x="914400" y="1463040"/>
             <a:ext cx="6400800" cy="274320"/>
           </a:xfrm>
           <a:prstGeom prst="rect">
@@ -16437,7 +16437,7 @@
         </p:nvSpPr>
         <p:spPr>
           <a:xfrm>
-            <a:off x="914400" y="1737360"/>
+            <a:off x="914400" y="1938528"/>
             <a:ext cx="8412480" cy="1735531"/>
           </a:xfrm>
           <a:prstGeom prst="rect">
@@ -16492,7 +16492,7 @@
         </p:nvSpPr>
         <p:spPr>
           <a:xfrm>
-            <a:off x="4974065" y="3036192"/>
+            <a:off x="4974065" y="3237360"/>
             <a:ext cx="3164095" cy="12802"/>
           </a:xfrm>
           <a:prstGeom prst="rect">
@@ -16536,8 +16536,8 @@
         </p:nvSpPr>
         <p:spPr>
           <a:xfrm>
-            <a:off x="914400" y="3792931"/>
-            <a:ext cx="6400800" cy="922579"/>
+            <a:off x="914400" y="3994099"/>
+            <a:ext cx="6400800" cy="1013917"/>
           </a:xfrm>
           <a:prstGeom prst="rect">
             <a:avLst/>
@@ -16556,7 +16556,7 @@
               </a:lnSpc>
             </a:pPr>
             <a:r>
-              <a:rPr sz="1900" i="0" b="0">
+              <a:rPr sz="2100" i="0" b="0">
                 <a:solidFill>
                   <a:srgbClr val="5F6661"/>
                 </a:solidFill>
@@ -16575,7 +16575,7 @@
         </p:nvSpPr>
         <p:spPr>
           <a:xfrm>
-            <a:off x="9921240" y="1783080"/>
+            <a:off x="9921240" y="1984248"/>
             <a:ext cx="6400800" cy="274320"/>
           </a:xfrm>
           <a:prstGeom prst="rect">
@@ -16614,7 +16614,7 @@
         </p:nvSpPr>
         <p:spPr>
           <a:xfrm>
-            <a:off x="9921240" y="2167128"/>
+            <a:off x="9921240" y="2368296"/>
             <a:ext cx="6858000" cy="7315"/>
           </a:xfrm>
           <a:prstGeom prst="rect">
@@ -16658,7 +16658,7 @@
         </p:nvSpPr>
         <p:spPr>
           <a:xfrm>
-            <a:off x="9921240" y="2354580"/>
+            <a:off x="9921240" y="2555748"/>
             <a:ext cx="365760" cy="274320"/>
           </a:xfrm>
           <a:prstGeom prst="rect">
@@ -16678,7 +16678,7 @@
               </a:lnSpc>
             </a:pPr>
             <a:r>
-              <a:rPr sz="1271" i="0" b="0">
+              <a:rPr sz="1353" i="0" b="0">
                 <a:solidFill>
                   <a:srgbClr val="AE8C4E"/>
                 </a:solidFill>
@@ -16697,8 +16697,8 @@
         </p:nvSpPr>
         <p:spPr>
           <a:xfrm>
-            <a:off x="10424160" y="2313432"/>
-            <a:ext cx="6355080" cy="784667"/>
+            <a:off x="10424160" y="2514600"/>
+            <a:ext cx="6355080" cy="829391"/>
           </a:xfrm>
           <a:prstGeom prst="rect">
             <a:avLst/>
@@ -16717,7 +16717,7 @@
               </a:lnSpc>
             </a:pPr>
             <a:r>
-              <a:rPr sz="1550" i="0" b="0">
+              <a:rPr sz="1650" i="0" b="0">
                 <a:solidFill>
                   <a:srgbClr val="2C322E"/>
                 </a:solidFill>
@@ -16726,7 +16726,7 @@
               <a:t>Crença fundadora.</a:t>
             </a:r>
             <a:r>
-              <a:rPr sz="1550" i="0" b="0">
+              <a:rPr sz="1650" i="0" b="0">
                 <a:solidFill>
                   <a:srgbClr val="5F6661"/>
                 </a:solidFill>
@@ -16745,7 +16745,7 @@
         </p:nvSpPr>
         <p:spPr>
           <a:xfrm>
-            <a:off x="9921240" y="3335843"/>
+            <a:off x="9921240" y="3581735"/>
             <a:ext cx="6858000" cy="7315"/>
           </a:xfrm>
           <a:prstGeom prst="rect">
@@ -16789,7 +16789,7 @@
         </p:nvSpPr>
         <p:spPr>
           <a:xfrm>
-            <a:off x="9921240" y="3523295"/>
+            <a:off x="9921240" y="3769187"/>
             <a:ext cx="365760" cy="274320"/>
           </a:xfrm>
           <a:prstGeom prst="rect">
@@ -16809,7 +16809,7 @@
               </a:lnSpc>
             </a:pPr>
             <a:r>
-              <a:rPr sz="1271" i="0" b="0">
+              <a:rPr sz="1353" i="0" b="0">
                 <a:solidFill>
                   <a:srgbClr val="AE8C4E"/>
                 </a:solidFill>
@@ -16828,8 +16828,8 @@
         </p:nvSpPr>
         <p:spPr>
           <a:xfrm>
-            <a:off x="10424160" y="3482147"/>
-            <a:ext cx="6355080" cy="438053"/>
+            <a:off x="10424160" y="3728039"/>
+            <a:ext cx="6355080" cy="829391"/>
           </a:xfrm>
           <a:prstGeom prst="rect">
             <a:avLst/>
@@ -16848,7 +16848,7 @@
               </a:lnSpc>
             </a:pPr>
             <a:r>
-              <a:rPr sz="1550" i="0" b="0">
+              <a:rPr sz="1650" i="0" b="0">
                 <a:solidFill>
                   <a:srgbClr val="2C322E"/>
                 </a:solidFill>
@@ -16857,7 +16857,7 @@
               <a:t>Essência.</a:t>
             </a:r>
             <a:r>
-              <a:rPr sz="1550" i="0" b="0">
+              <a:rPr sz="1650" i="0" b="0">
                 <a:solidFill>
                   <a:srgbClr val="5F6661"/>
                 </a:solidFill>
@@ -16876,7 +16876,7 @@
         </p:nvSpPr>
         <p:spPr>
           <a:xfrm>
-            <a:off x="9921240" y="4157944"/>
+            <a:off x="9921240" y="4795175"/>
             <a:ext cx="6858000" cy="7315"/>
           </a:xfrm>
           <a:prstGeom prst="rect">
@@ -16920,7 +16920,7 @@
         </p:nvSpPr>
         <p:spPr>
           <a:xfrm>
-            <a:off x="9921240" y="4345396"/>
+            <a:off x="9921240" y="4982627"/>
             <a:ext cx="365760" cy="274320"/>
           </a:xfrm>
           <a:prstGeom prst="rect">
@@ -16940,7 +16940,7 @@
               </a:lnSpc>
             </a:pPr>
             <a:r>
-              <a:rPr sz="1271" i="0" b="0">
+              <a:rPr sz="1353" i="0" b="0">
                 <a:solidFill>
                   <a:srgbClr val="AE8C4E"/>
                 </a:solidFill>
@@ -16959,8 +16959,8 @@
         </p:nvSpPr>
         <p:spPr>
           <a:xfrm>
-            <a:off x="10424160" y="4304248"/>
-            <a:ext cx="6355080" cy="438053"/>
+            <a:off x="10424160" y="4941479"/>
+            <a:ext cx="6355080" cy="460416"/>
           </a:xfrm>
           <a:prstGeom prst="rect">
             <a:avLst/>
@@ -16979,7 +16979,7 @@
               </a:lnSpc>
             </a:pPr>
             <a:r>
-              <a:rPr sz="1550" i="0" b="0">
+              <a:rPr sz="1650" i="0" b="0">
                 <a:solidFill>
                   <a:srgbClr val="2C322E"/>
                 </a:solidFill>
@@ -16988,7 +16988,7 @@
               <a:t>Causa.</a:t>
             </a:r>
             <a:r>
-              <a:rPr sz="1550" i="0" b="0">
+              <a:rPr sz="1650" i="0" b="0">
                 <a:solidFill>
                   <a:srgbClr val="5F6661"/>
                 </a:solidFill>
@@ -17007,7 +17007,7 @@
         </p:nvSpPr>
         <p:spPr>
           <a:xfrm>
-            <a:off x="9921240" y="4980046"/>
+            <a:off x="9921240" y="5639638"/>
             <a:ext cx="6858000" cy="7315"/>
           </a:xfrm>
           <a:prstGeom prst="rect">
@@ -17051,7 +17051,7 @@
         </p:nvSpPr>
         <p:spPr>
           <a:xfrm>
-            <a:off x="9921240" y="5167498"/>
+            <a:off x="9921240" y="5827090"/>
             <a:ext cx="365760" cy="274320"/>
           </a:xfrm>
           <a:prstGeom prst="rect">
@@ -17071,7 +17071,7 @@
               </a:lnSpc>
             </a:pPr>
             <a:r>
-              <a:rPr sz="1271" i="0" b="0">
+              <a:rPr sz="1353" i="0" b="0">
                 <a:solidFill>
                   <a:srgbClr val="AE8C4E"/>
                 </a:solidFill>
@@ -17090,8 +17090,8 @@
         </p:nvSpPr>
         <p:spPr>
           <a:xfrm>
-            <a:off x="10424160" y="5126350"/>
-            <a:ext cx="6355080" cy="438053"/>
+            <a:off x="10424160" y="5785942"/>
+            <a:ext cx="6355080" cy="460416"/>
           </a:xfrm>
           <a:prstGeom prst="rect">
             <a:avLst/>
@@ -17110,7 +17110,7 @@
               </a:lnSpc>
             </a:pPr>
             <a:r>
-              <a:rPr sz="1550" i="0" b="0">
+              <a:rPr sz="1650" i="0" b="0">
                 <a:solidFill>
                   <a:srgbClr val="2C322E"/>
                 </a:solidFill>
@@ -17119,7 +17119,7 @@
               <a:t>Território.</a:t>
             </a:r>
             <a:r>
-              <a:rPr sz="1550" i="0" b="0">
+              <a:rPr sz="1650" i="0" b="0">
                 <a:solidFill>
                   <a:srgbClr val="5F6661"/>
                 </a:solidFill>
@@ -17138,7 +17138,7 @@
         </p:nvSpPr>
         <p:spPr>
           <a:xfrm>
-            <a:off x="9921240" y="5802147"/>
+            <a:off x="9921240" y="6484102"/>
             <a:ext cx="6858000" cy="7315"/>
           </a:xfrm>
           <a:prstGeom prst="rect">
@@ -17182,7 +17182,7 @@
         </p:nvSpPr>
         <p:spPr>
           <a:xfrm>
-            <a:off x="9921240" y="5989599"/>
+            <a:off x="9921240" y="6671554"/>
             <a:ext cx="365760" cy="274320"/>
           </a:xfrm>
           <a:prstGeom prst="rect">
@@ -17202,7 +17202,7 @@
               </a:lnSpc>
             </a:pPr>
             <a:r>
-              <a:rPr sz="1271" i="0" b="0">
+              <a:rPr sz="1353" i="0" b="0">
                 <a:solidFill>
                   <a:srgbClr val="AE8C4E"/>
                 </a:solidFill>
@@ -17221,8 +17221,8 @@
         </p:nvSpPr>
         <p:spPr>
           <a:xfrm>
-            <a:off x="10424160" y="5948451"/>
-            <a:ext cx="6355080" cy="784667"/>
+            <a:off x="10424160" y="6630406"/>
+            <a:ext cx="6355080" cy="829391"/>
           </a:xfrm>
           <a:prstGeom prst="rect">
             <a:avLst/>
@@ -17241,7 +17241,7 @@
               </a:lnSpc>
             </a:pPr>
             <a:r>
-              <a:rPr sz="1550" i="0" b="0">
+              <a:rPr sz="1650" i="0" b="0">
                 <a:solidFill>
                   <a:srgbClr val="2C322E"/>
                 </a:solidFill>
@@ -17250,7 +17250,7 @@
               <a:t>Posicionamento.</a:t>
             </a:r>
             <a:r>
-              <a:rPr sz="1550" i="0" b="0">
+              <a:rPr sz="1650" i="0" b="0">
                 <a:solidFill>
                   <a:srgbClr val="5F6661"/>
                 </a:solidFill>
@@ -17269,7 +17269,7 @@
         </p:nvSpPr>
         <p:spPr>
           <a:xfrm>
-            <a:off x="9921240" y="6970862"/>
+            <a:off x="9921240" y="7697541"/>
             <a:ext cx="6858000" cy="7315"/>
           </a:xfrm>
           <a:prstGeom prst="rect">
@@ -17313,7 +17313,7 @@
         </p:nvSpPr>
         <p:spPr>
           <a:xfrm>
-            <a:off x="9921240" y="7158314"/>
+            <a:off x="9921240" y="7884993"/>
             <a:ext cx="365760" cy="274320"/>
           </a:xfrm>
           <a:prstGeom prst="rect">
@@ -17333,7 +17333,7 @@
               </a:lnSpc>
             </a:pPr>
             <a:r>
-              <a:rPr sz="1271" i="0" b="0">
+              <a:rPr sz="1353" i="0" b="0">
                 <a:solidFill>
                   <a:srgbClr val="AE8C4E"/>
                 </a:solidFill>
@@ -17352,8 +17352,8 @@
         </p:nvSpPr>
         <p:spPr>
           <a:xfrm>
-            <a:off x="10424160" y="7117166"/>
-            <a:ext cx="6355080" cy="438053"/>
+            <a:off x="10424160" y="7843845"/>
+            <a:ext cx="6355080" cy="460416"/>
           </a:xfrm>
           <a:prstGeom prst="rect">
             <a:avLst/>
@@ -17372,7 +17372,7 @@
               </a:lnSpc>
             </a:pPr>
             <a:r>
-              <a:rPr sz="1550" i="0" b="0">
+              <a:rPr sz="1650" i="0" b="0">
                 <a:solidFill>
                   <a:srgbClr val="2C322E"/>
                 </a:solidFill>
@@ -17381,7 +17381,7 @@
               <a:t>Princípio de comunicação.</a:t>
             </a:r>
             <a:r>
-              <a:rPr sz="1550" i="0" b="0">
+              <a:rPr sz="1650" i="0" b="0">
                 <a:solidFill>
                   <a:srgbClr val="5F6661"/>
                 </a:solidFill>
@@ -17400,7 +17400,7 @@
         </p:nvSpPr>
         <p:spPr>
           <a:xfrm>
-            <a:off x="9921240" y="7792964"/>
+            <a:off x="9921240" y="8542005"/>
             <a:ext cx="6858000" cy="7315"/>
           </a:xfrm>
           <a:prstGeom prst="rect">
@@ -17444,7 +17444,7 @@
         </p:nvSpPr>
         <p:spPr>
           <a:xfrm>
-            <a:off x="9921240" y="7980416"/>
+            <a:off x="9921240" y="8729457"/>
             <a:ext cx="365760" cy="274320"/>
           </a:xfrm>
           <a:prstGeom prst="rect">
@@ -17464,7 +17464,7 @@
               </a:lnSpc>
             </a:pPr>
             <a:r>
-              <a:rPr sz="1271" i="0" b="0">
+              <a:rPr sz="1353" i="0" b="0">
                 <a:solidFill>
                   <a:srgbClr val="AE8C4E"/>
                 </a:solidFill>
@@ -17483,8 +17483,8 @@
         </p:nvSpPr>
         <p:spPr>
           <a:xfrm>
-            <a:off x="10424160" y="7939268"/>
-            <a:ext cx="6355080" cy="438053"/>
+            <a:off x="10424160" y="8688309"/>
+            <a:ext cx="6355080" cy="460416"/>
           </a:xfrm>
           <a:prstGeom prst="rect">
             <a:avLst/>
@@ -17503,7 +17503,7 @@
               </a:lnSpc>
             </a:pPr>
             <a:r>
-              <a:rPr sz="1550" i="0" b="0">
+              <a:rPr sz="1650" i="0" b="0">
                 <a:solidFill>
                   <a:srgbClr val="2C322E"/>
                 </a:solidFill>
@@ -17512,7 +17512,7 @@
               <a:t>Personalidade.</a:t>
             </a:r>
             <a:r>
-              <a:rPr sz="1550" i="0" b="0">
+              <a:rPr sz="1650" i="0" b="0">
                 <a:solidFill>
                   <a:srgbClr val="5F6661"/>
                 </a:solidFill>
@@ -17531,7 +17531,7 @@
         </p:nvSpPr>
         <p:spPr>
           <a:xfrm>
-            <a:off x="9921240" y="8615065"/>
+            <a:off x="9921240" y="9386468"/>
             <a:ext cx="6858000" cy="7315"/>
           </a:xfrm>
           <a:prstGeom prst="rect">
@@ -17581,7 +17581,7 @@
     <p:bg>
       <p:bgPr>
         <a:solidFill>
-          <a:srgbClr val="4A534E"/>
+          <a:srgbClr val="F6F4EF"/>
         </a:solidFill>
         <a:effectLst/>
       </p:bgPr>
@@ -17593,66 +17593,16 @@
         <p:nvPr/>
       </p:nvGrpSpPr>
       <p:grpSpPr/>
-      <p:pic>
-        <p:nvPicPr>
-          <p:cNvPr id="2" name="Picture 1" descr="trama-pe.png"/>
-          <p:cNvPicPr>
-            <a:picLocks noChangeAspect="1"/>
-          </p:cNvPicPr>
-          <p:nvPr/>
-        </p:nvPicPr>
-        <p:blipFill>
-          <a:blip r:embed="rId2">
-            <a:alphaModFix amt="55000"/>
-          </a:blip>
-          <a:stretch>
-            <a:fillRect/>
-          </a:stretch>
-        </p:blipFill>
-        <p:spPr>
-          <a:xfrm>
-            <a:off x="0" y="0"/>
-            <a:ext cx="18288000" cy="10287000"/>
-          </a:xfrm>
-          <a:prstGeom prst="rect">
-            <a:avLst/>
-          </a:prstGeom>
-        </p:spPr>
-      </p:pic>
-      <p:pic>
-        <p:nvPicPr>
-          <p:cNvPr id="3" name="Picture 2" descr="lm-vertical-dourado-escuro.png"/>
-          <p:cNvPicPr>
-            <a:picLocks noChangeAspect="1"/>
-          </p:cNvPicPr>
-          <p:nvPr/>
-        </p:nvPicPr>
-        <p:blipFill>
-          <a:blip r:embed="rId3"/>
-          <a:stretch>
-            <a:fillRect/>
-          </a:stretch>
-        </p:blipFill>
-        <p:spPr>
-          <a:xfrm>
-            <a:off x="6126480" y="3474720"/>
-            <a:ext cx="6035040" cy="2411058"/>
-          </a:xfrm>
-          <a:prstGeom prst="rect">
-            <a:avLst/>
-          </a:prstGeom>
-        </p:spPr>
-      </p:pic>
-      <p:sp>
-        <p:nvSpPr>
-          <p:cNvPr id="4" name="TextBox 3"/>
+      <p:sp>
+        <p:nvSpPr>
+          <p:cNvPr id="2" name="TextBox 1"/>
           <p:cNvSpPr txBox="1"/>
           <p:nvPr/>
         </p:nvSpPr>
         <p:spPr>
           <a:xfrm>
             <a:off x="0" y="6355080"/>
-            <a:ext cx="18288000" cy="384048"/>
+            <a:ext cx="18288000" cy="420624"/>
           </a:xfrm>
           <a:prstGeom prst="rect">
             <a:avLst/>
@@ -17671,9 +17621,9 @@
               </a:lnSpc>
             </a:pPr>
             <a:r>
-              <a:rPr sz="1562" i="0" b="0" spc="420">
-                <a:solidFill>
-                  <a:srgbClr val="E3C88B"/>
+              <a:rPr sz="1687" i="0" b="0" spc="420">
+                <a:solidFill>
+                  <a:srgbClr val="AE8C4E"/>
                 </a:solidFill>
                 <a:latin typeface="Outfit 1 Semi-Bold"/>
               </a:rPr>
@@ -17684,13 +17634,13 @@
       </p:sp>
       <p:sp>
         <p:nvSpPr>
-          <p:cNvPr id="5" name="TextBox 4"/>
-          <p:cNvSpPr txBox="1"/>
-          <p:nvPr/>
-        </p:nvSpPr>
-        <p:spPr>
-          <a:xfrm>
-            <a:off x="0" y="6995160"/>
+          <p:cNvPr id="3" name="TextBox 2"/>
+          <p:cNvSpPr txBox="1"/>
+          <p:nvPr/>
+        </p:nvSpPr>
+        <p:spPr>
+          <a:xfrm>
+            <a:off x="0" y="7013448"/>
             <a:ext cx="18288000" cy="365760"/>
           </a:xfrm>
           <a:prstGeom prst="rect">
@@ -17710,9 +17660,9 @@
               </a:lnSpc>
             </a:pPr>
             <a:r>
-              <a:rPr sz="1550" i="0" b="0">
-                <a:solidFill>
-                  <a:srgbClr val="C8CCC6"/>
+              <a:rPr sz="1650" i="0" b="0">
+                <a:solidFill>
+                  <a:srgbClr val="9AA09A"/>
                 </a:solidFill>
                 <a:latin typeface="Outfit 1 Light"/>
               </a:rPr>
@@ -17960,7 +17910,7 @@
         </p:nvSpPr>
         <p:spPr>
           <a:xfrm>
-            <a:off x="9921240" y="3374136"/>
+            <a:off x="914400" y="3392424"/>
             <a:ext cx="6858000" cy="7315"/>
           </a:xfrm>
           <a:prstGeom prst="rect">
@@ -18005,7 +17955,7 @@
         <p:spPr>
           <a:xfrm>
             <a:off x="914400" y="3611880"/>
-            <a:ext cx="1097280" cy="310896"/>
+            <a:ext cx="1005840" cy="310896"/>
           </a:xfrm>
           <a:prstGeom prst="rect">
             <a:avLst/>
@@ -18063,7 +18013,7 @@
               </a:lnSpc>
             </a:pPr>
             <a:r>
-              <a:rPr sz="2500" i="0" b="0" spc="60">
+              <a:rPr sz="2600" i="0" b="0" spc="60">
                 <a:solidFill>
                   <a:srgbClr val="2C322E"/>
                 </a:solidFill>
@@ -18083,7 +18033,7 @@
         <p:spPr>
           <a:xfrm>
             <a:off x="9921240" y="3538728"/>
-            <a:ext cx="6858000" cy="488721"/>
+            <a:ext cx="6858000" cy="534391"/>
           </a:xfrm>
           <a:prstGeom prst="rect">
             <a:avLst/>
@@ -18102,7 +18052,7 @@
               </a:lnSpc>
             </a:pPr>
             <a:r>
-              <a:rPr sz="1900" i="0" b="0">
+              <a:rPr sz="2100" i="0" b="0">
                 <a:solidFill>
                   <a:srgbClr val="5F6661"/>
                 </a:solidFill>
@@ -18121,7 +18071,7 @@
         </p:nvSpPr>
         <p:spPr>
           <a:xfrm>
-            <a:off x="9921240" y="4562856"/>
+            <a:off x="914400" y="4581144"/>
             <a:ext cx="6858000" cy="7315"/>
           </a:xfrm>
           <a:prstGeom prst="rect">
@@ -18166,7 +18116,7 @@
         <p:spPr>
           <a:xfrm>
             <a:off x="914400" y="4800600"/>
-            <a:ext cx="1097280" cy="310896"/>
+            <a:ext cx="1005840" cy="310896"/>
           </a:xfrm>
           <a:prstGeom prst="rect">
             <a:avLst/>
@@ -18224,7 +18174,7 @@
               </a:lnSpc>
             </a:pPr>
             <a:r>
-              <a:rPr sz="2500" i="0" b="0" spc="60">
+              <a:rPr sz="2600" i="0" b="0" spc="60">
                 <a:solidFill>
                   <a:srgbClr val="2C322E"/>
                 </a:solidFill>
@@ -18244,7 +18194,7 @@
         <p:spPr>
           <a:xfrm>
             <a:off x="9921240" y="4727448"/>
-            <a:ext cx="6858000" cy="488721"/>
+            <a:ext cx="6858000" cy="534391"/>
           </a:xfrm>
           <a:prstGeom prst="rect">
             <a:avLst/>
@@ -18263,7 +18213,7 @@
               </a:lnSpc>
             </a:pPr>
             <a:r>
-              <a:rPr sz="1900" i="0" b="0">
+              <a:rPr sz="2100" i="0" b="0">
                 <a:solidFill>
                   <a:srgbClr val="5F6661"/>
                 </a:solidFill>
@@ -18282,7 +18232,7 @@
         </p:nvSpPr>
         <p:spPr>
           <a:xfrm>
-            <a:off x="9921240" y="5751576"/>
+            <a:off x="914400" y="5769864"/>
             <a:ext cx="6858000" cy="7315"/>
           </a:xfrm>
           <a:prstGeom prst="rect">
@@ -18327,7 +18277,7 @@
         <p:spPr>
           <a:xfrm>
             <a:off x="914400" y="5989320"/>
-            <a:ext cx="1097280" cy="310896"/>
+            <a:ext cx="1005840" cy="310896"/>
           </a:xfrm>
           <a:prstGeom prst="rect">
             <a:avLst/>
@@ -18385,7 +18335,7 @@
               </a:lnSpc>
             </a:pPr>
             <a:r>
-              <a:rPr sz="2500" i="0" b="0" spc="60">
+              <a:rPr sz="2600" i="0" b="0" spc="60">
                 <a:solidFill>
                   <a:srgbClr val="2C322E"/>
                 </a:solidFill>
@@ -18405,7 +18355,7 @@
         <p:spPr>
           <a:xfrm>
             <a:off x="9921240" y="5916168"/>
-            <a:ext cx="6858000" cy="488721"/>
+            <a:ext cx="6858000" cy="534391"/>
           </a:xfrm>
           <a:prstGeom prst="rect">
             <a:avLst/>
@@ -18424,7 +18374,7 @@
               </a:lnSpc>
             </a:pPr>
             <a:r>
-              <a:rPr sz="1900" i="0" b="0">
+              <a:rPr sz="2100" i="0" b="0">
                 <a:solidFill>
                   <a:srgbClr val="5F6661"/>
                 </a:solidFill>
@@ -18443,7 +18393,7 @@
         </p:nvSpPr>
         <p:spPr>
           <a:xfrm>
-            <a:off x="9921240" y="6940296"/>
+            <a:off x="914400" y="6958584"/>
             <a:ext cx="6858000" cy="7315"/>
           </a:xfrm>
           <a:prstGeom prst="rect">
@@ -18488,7 +18438,7 @@
         <p:spPr>
           <a:xfrm>
             <a:off x="914400" y="7178040"/>
-            <a:ext cx="1097280" cy="310896"/>
+            <a:ext cx="1005840" cy="310896"/>
           </a:xfrm>
           <a:prstGeom prst="rect">
             <a:avLst/>
@@ -18546,7 +18496,7 @@
               </a:lnSpc>
             </a:pPr>
             <a:r>
-              <a:rPr sz="2500" i="0" b="0" spc="60">
+              <a:rPr sz="2600" i="0" b="0" spc="60">
                 <a:solidFill>
                   <a:srgbClr val="2C322E"/>
                 </a:solidFill>
@@ -18566,7 +18516,7 @@
         <p:spPr>
           <a:xfrm>
             <a:off x="9921240" y="7104888"/>
-            <a:ext cx="6858000" cy="488721"/>
+            <a:ext cx="6858000" cy="1013917"/>
           </a:xfrm>
           <a:prstGeom prst="rect">
             <a:avLst/>
@@ -18585,7 +18535,7 @@
               </a:lnSpc>
             </a:pPr>
             <a:r>
-              <a:rPr sz="1900" i="0" b="0">
+              <a:rPr sz="2100" i="0" b="0">
                 <a:solidFill>
                   <a:srgbClr val="5F6661"/>
                 </a:solidFill>
@@ -18604,7 +18554,7 @@
         </p:nvSpPr>
         <p:spPr>
           <a:xfrm>
-            <a:off x="9921240" y="8129016"/>
+            <a:off x="914400" y="8147304"/>
             <a:ext cx="6858000" cy="7315"/>
           </a:xfrm>
           <a:prstGeom prst="rect">
@@ -18649,7 +18599,7 @@
         <p:spPr>
           <a:xfrm>
             <a:off x="914400" y="8366760"/>
-            <a:ext cx="1097280" cy="310896"/>
+            <a:ext cx="1005840" cy="310896"/>
           </a:xfrm>
           <a:prstGeom prst="rect">
             <a:avLst/>
@@ -18707,7 +18657,7 @@
               </a:lnSpc>
             </a:pPr>
             <a:r>
-              <a:rPr sz="2500" i="0" b="0" spc="60">
+              <a:rPr sz="2600" i="0" b="0" spc="60">
                 <a:solidFill>
                   <a:srgbClr val="2C322E"/>
                 </a:solidFill>
@@ -18727,7 +18677,7 @@
         <p:spPr>
           <a:xfrm>
             <a:off x="9921240" y="8293608"/>
-            <a:ext cx="6858000" cy="488721"/>
+            <a:ext cx="6858000" cy="534391"/>
           </a:xfrm>
           <a:prstGeom prst="rect">
             <a:avLst/>
@@ -18746,7 +18696,7 @@
               </a:lnSpc>
             </a:pPr>
             <a:r>
-              <a:rPr sz="1900" i="0" b="0">
+              <a:rPr sz="2100" i="0" b="0">
                 <a:solidFill>
                   <a:srgbClr val="5F6661"/>
                 </a:solidFill>
@@ -19300,7 +19250,7 @@
         </p:nvSpPr>
         <p:spPr>
           <a:xfrm>
-            <a:off x="914400" y="1261872"/>
+            <a:off x="914400" y="1941195"/>
             <a:ext cx="6400800" cy="274320"/>
           </a:xfrm>
           <a:prstGeom prst="rect">
@@ -19339,7 +19289,7 @@
         </p:nvSpPr>
         <p:spPr>
           <a:xfrm>
-            <a:off x="914400" y="1737360"/>
+            <a:off x="914400" y="2416683"/>
             <a:ext cx="8412480" cy="1735531"/>
           </a:xfrm>
           <a:prstGeom prst="rect">
@@ -19394,7 +19344,7 @@
         </p:nvSpPr>
         <p:spPr>
           <a:xfrm>
-            <a:off x="4755673" y="3036192"/>
+            <a:off x="4755673" y="3715515"/>
             <a:ext cx="3382487" cy="12802"/>
           </a:xfrm>
           <a:prstGeom prst="rect">
@@ -19438,8 +19388,8 @@
         </p:nvSpPr>
         <p:spPr>
           <a:xfrm>
-            <a:off x="914400" y="3792931"/>
-            <a:ext cx="6400800" cy="922579"/>
+            <a:off x="914400" y="4472254"/>
+            <a:ext cx="6400800" cy="1013917"/>
           </a:xfrm>
           <a:prstGeom prst="rect">
             <a:avLst/>
@@ -19458,7 +19408,7 @@
               </a:lnSpc>
             </a:pPr>
             <a:r>
-              <a:rPr sz="1900" i="0" b="0">
+              <a:rPr sz="2100" i="0" b="0">
                 <a:solidFill>
                   <a:srgbClr val="5F6661"/>
                 </a:solidFill>
@@ -19477,8 +19427,8 @@
         </p:nvSpPr>
         <p:spPr>
           <a:xfrm>
-            <a:off x="914400" y="5245862"/>
-            <a:ext cx="6400800" cy="747065"/>
+            <a:off x="914400" y="6016523"/>
+            <a:ext cx="6400800" cy="825703"/>
           </a:xfrm>
           <a:prstGeom prst="rect">
             <a:avLst/>
@@ -19497,7 +19447,7 @@
               </a:lnSpc>
             </a:pPr>
             <a:r>
-              <a:rPr sz="1634" i="0" b="0" spc="160">
+              <a:rPr sz="1805" i="0" b="0" spc="160">
                 <a:solidFill>
                   <a:srgbClr val="2C322E"/>
                 </a:solidFill>
@@ -19513,7 +19463,7 @@
               </a:lnSpc>
             </a:pPr>
             <a:r>
-              <a:rPr sz="1634" i="0" b="0" spc="160">
+              <a:rPr sz="1805" i="0" b="0" spc="160">
                 <a:solidFill>
                   <a:srgbClr val="2C322E"/>
                 </a:solidFill>
@@ -19532,8 +19482,8 @@
         </p:nvSpPr>
         <p:spPr>
           <a:xfrm>
-            <a:off x="9921240" y="1874520"/>
-            <a:ext cx="6858000" cy="1356436"/>
+            <a:off x="9921240" y="2553843"/>
+            <a:ext cx="6858000" cy="1493444"/>
           </a:xfrm>
           <a:prstGeom prst="rect">
             <a:avLst/>
@@ -19552,7 +19502,7 @@
               </a:lnSpc>
             </a:pPr>
             <a:r>
-              <a:rPr sz="1900" i="0" b="0">
+              <a:rPr sz="2100" i="0" b="0">
                 <a:solidFill>
                   <a:srgbClr val="2C322E"/>
                 </a:solidFill>
@@ -19571,8 +19521,8 @@
         </p:nvSpPr>
         <p:spPr>
           <a:xfrm>
-            <a:off x="9921240" y="3486988"/>
-            <a:ext cx="6858000" cy="1356436"/>
+            <a:off x="9921240" y="4303319"/>
+            <a:ext cx="6858000" cy="1493444"/>
           </a:xfrm>
           <a:prstGeom prst="rect">
             <a:avLst/>
@@ -19591,7 +19541,7 @@
               </a:lnSpc>
             </a:pPr>
             <a:r>
-              <a:rPr sz="1900" i="0" b="0">
+              <a:rPr sz="2100" i="0" b="0">
                 <a:solidFill>
                   <a:srgbClr val="5F6661"/>
                 </a:solidFill>
@@ -19610,8 +19560,8 @@
         </p:nvSpPr>
         <p:spPr>
           <a:xfrm>
-            <a:off x="9921240" y="5099456"/>
-            <a:ext cx="6858000" cy="1790294"/>
+            <a:off x="9921240" y="6052795"/>
+            <a:ext cx="6858000" cy="1972970"/>
           </a:xfrm>
           <a:prstGeom prst="rect">
             <a:avLst/>
@@ -19630,7 +19580,7 @@
               </a:lnSpc>
             </a:pPr>
             <a:r>
-              <a:rPr sz="1900" i="0" b="0">
+              <a:rPr sz="2100" i="0" b="0">
                 <a:solidFill>
                   <a:srgbClr val="5F6661"/>
                 </a:solidFill>
@@ -19639,7 +19589,7 @@
               <a:t>A marca já existia antes da comunicação: experiência, resultado, recomendação, confiança e histórico de atendimento. Primeiro veio a reputação. </a:t>
             </a:r>
             <a:r>
-              <a:rPr sz="1900" i="0" b="0">
+              <a:rPr sz="2100" i="0" b="0">
                 <a:solidFill>
                   <a:srgbClr val="2C322E"/>
                 </a:solidFill>
@@ -19927,7 +19877,7 @@
         <p:spPr>
           <a:xfrm>
             <a:off x="914400" y="6458712"/>
-            <a:ext cx="10972800" cy="922579"/>
+            <a:ext cx="10972800" cy="1013917"/>
           </a:xfrm>
           <a:prstGeom prst="rect">
             <a:avLst/>
@@ -19946,7 +19896,7 @@
               </a:lnSpc>
             </a:pPr>
             <a:r>
-              <a:rPr sz="1900" i="0" b="0">
+              <a:rPr sz="2100" i="0" b="0">
                 <a:solidFill>
                   <a:srgbClr val="C8CCC6"/>
                 </a:solidFill>
@@ -19965,8 +19915,8 @@
         </p:nvSpPr>
         <p:spPr>
           <a:xfrm>
-            <a:off x="914400" y="7637323"/>
-            <a:ext cx="10972800" cy="488721"/>
+            <a:off x="914400" y="7728661"/>
+            <a:ext cx="10972800" cy="534391"/>
           </a:xfrm>
           <a:prstGeom prst="rect">
             <a:avLst/>
@@ -19985,7 +19935,7 @@
               </a:lnSpc>
             </a:pPr>
             <a:r>
-              <a:rPr sz="1900" i="0" b="0">
+              <a:rPr sz="2100" i="0" b="0">
                 <a:solidFill>
                   <a:srgbClr val="C8CCC6"/>
                 </a:solidFill>
@@ -20152,7 +20102,7 @@
         </p:nvSpPr>
         <p:spPr>
           <a:xfrm>
-            <a:off x="914400" y="1261872"/>
+            <a:off x="914400" y="1463040"/>
             <a:ext cx="6400800" cy="274320"/>
           </a:xfrm>
           <a:prstGeom prst="rect">
@@ -20191,7 +20141,7 @@
         </p:nvSpPr>
         <p:spPr>
           <a:xfrm>
-            <a:off x="914400" y="1737360"/>
+            <a:off x="914400" y="1938528"/>
             <a:ext cx="8412480" cy="913486"/>
           </a:xfrm>
           <a:prstGeom prst="rect">
@@ -20230,7 +20180,7 @@
         </p:nvSpPr>
         <p:spPr>
           <a:xfrm>
-            <a:off x="7249653" y="2214146"/>
+            <a:off x="7249653" y="2415314"/>
             <a:ext cx="10123947" cy="12802"/>
           </a:xfrm>
           <a:prstGeom prst="rect">
@@ -20274,7 +20224,7 @@
         </p:nvSpPr>
         <p:spPr>
           <a:xfrm>
-            <a:off x="914400" y="4069080"/>
+            <a:off x="914400" y="4270248"/>
             <a:ext cx="5059680" cy="274320"/>
           </a:xfrm>
           <a:prstGeom prst="rect">
@@ -20313,8 +20263,8 @@
         </p:nvSpPr>
         <p:spPr>
           <a:xfrm>
-            <a:off x="914400" y="4434840"/>
-            <a:ext cx="5059680" cy="551815"/>
+            <a:off x="914400" y="4636008"/>
+            <a:ext cx="5059680" cy="570230"/>
           </a:xfrm>
           <a:prstGeom prst="rect">
             <a:avLst/>
@@ -20333,7 +20283,7 @@
               </a:lnSpc>
             </a:pPr>
             <a:r>
-              <a:rPr sz="2500" i="0" b="0" spc="40">
+              <a:rPr sz="2600" i="0" b="0" spc="40">
                 <a:solidFill>
                   <a:srgbClr val="2C322E"/>
                 </a:solidFill>
@@ -20352,7 +20302,7 @@
         </p:nvSpPr>
         <p:spPr>
           <a:xfrm>
-            <a:off x="914400" y="4968367"/>
+            <a:off x="914400" y="5187950"/>
             <a:ext cx="5059680" cy="10973"/>
           </a:xfrm>
           <a:prstGeom prst="rect">
@@ -20396,8 +20346,8 @@
         </p:nvSpPr>
         <p:spPr>
           <a:xfrm>
-            <a:off x="914400" y="5224399"/>
-            <a:ext cx="5059680" cy="853162"/>
+            <a:off x="914400" y="5443982"/>
+            <a:ext cx="5059680" cy="937193"/>
           </a:xfrm>
           <a:prstGeom prst="rect">
             <a:avLst/>
@@ -20416,7 +20366,7 @@
               </a:lnSpc>
             </a:pPr>
             <a:r>
-              <a:rPr sz="1748" i="0" b="0">
+              <a:rPr sz="1932" i="0" b="0">
                 <a:solidFill>
                   <a:srgbClr val="5F6661"/>
                 </a:solidFill>
@@ -20435,7 +20385,7 @@
         </p:nvSpPr>
         <p:spPr>
           <a:xfrm>
-            <a:off x="6614160" y="4069080"/>
+            <a:off x="6614160" y="4270248"/>
             <a:ext cx="5059680" cy="274320"/>
           </a:xfrm>
           <a:prstGeom prst="rect">
@@ -20474,8 +20424,8 @@
         </p:nvSpPr>
         <p:spPr>
           <a:xfrm>
-            <a:off x="6614160" y="4434840"/>
-            <a:ext cx="5059680" cy="551815"/>
+            <a:off x="6614160" y="4636008"/>
+            <a:ext cx="5059680" cy="570230"/>
           </a:xfrm>
           <a:prstGeom prst="rect">
             <a:avLst/>
@@ -20494,7 +20444,7 @@
               </a:lnSpc>
             </a:pPr>
             <a:r>
-              <a:rPr sz="2500" i="0" b="0" spc="40">
+              <a:rPr sz="2600" i="0" b="0" spc="40">
                 <a:solidFill>
                   <a:srgbClr val="2C322E"/>
                 </a:solidFill>
@@ -20513,7 +20463,7 @@
         </p:nvSpPr>
         <p:spPr>
           <a:xfrm>
-            <a:off x="6614160" y="4968367"/>
+            <a:off x="6614160" y="5187950"/>
             <a:ext cx="5059680" cy="10973"/>
           </a:xfrm>
           <a:prstGeom prst="rect">
@@ -20557,8 +20507,8 @@
         </p:nvSpPr>
         <p:spPr>
           <a:xfrm>
-            <a:off x="6614160" y="5224399"/>
-            <a:ext cx="5059680" cy="853162"/>
+            <a:off x="6614160" y="5443982"/>
+            <a:ext cx="5059680" cy="937193"/>
           </a:xfrm>
           <a:prstGeom prst="rect">
             <a:avLst/>
@@ -20577,7 +20527,7 @@
               </a:lnSpc>
             </a:pPr>
             <a:r>
-              <a:rPr sz="1748" i="0" b="0">
+              <a:rPr sz="1932" i="0" b="0">
                 <a:solidFill>
                   <a:srgbClr val="5F6661"/>
                 </a:solidFill>
@@ -20596,7 +20546,7 @@
         </p:nvSpPr>
         <p:spPr>
           <a:xfrm>
-            <a:off x="12313920" y="4069080"/>
+            <a:off x="12313920" y="4270248"/>
             <a:ext cx="5059680" cy="274320"/>
           </a:xfrm>
           <a:prstGeom prst="rect">
@@ -20635,8 +20585,8 @@
         </p:nvSpPr>
         <p:spPr>
           <a:xfrm>
-            <a:off x="12313920" y="4434840"/>
-            <a:ext cx="5059680" cy="551815"/>
+            <a:off x="12313920" y="4636008"/>
+            <a:ext cx="5059680" cy="570230"/>
           </a:xfrm>
           <a:prstGeom prst="rect">
             <a:avLst/>
@@ -20655,7 +20605,7 @@
               </a:lnSpc>
             </a:pPr>
             <a:r>
-              <a:rPr sz="2500" i="0" b="0" spc="40">
+              <a:rPr sz="2600" i="0" b="0" spc="40">
                 <a:solidFill>
                   <a:srgbClr val="2C322E"/>
                 </a:solidFill>
@@ -20674,7 +20624,7 @@
         </p:nvSpPr>
         <p:spPr>
           <a:xfrm>
-            <a:off x="12313920" y="4968367"/>
+            <a:off x="12313920" y="5187950"/>
             <a:ext cx="5059680" cy="10973"/>
           </a:xfrm>
           <a:prstGeom prst="rect">
@@ -20718,8 +20668,8 @@
         </p:nvSpPr>
         <p:spPr>
           <a:xfrm>
-            <a:off x="12313920" y="5224399"/>
-            <a:ext cx="5059680" cy="853162"/>
+            <a:off x="12313920" y="5443982"/>
+            <a:ext cx="5059680" cy="1378357"/>
           </a:xfrm>
           <a:prstGeom prst="rect">
             <a:avLst/>
@@ -20738,7 +20688,7 @@
               </a:lnSpc>
             </a:pPr>
             <a:r>
-              <a:rPr sz="1748" i="0" b="0">
+              <a:rPr sz="1932" i="0" b="0">
                 <a:solidFill>
                   <a:srgbClr val="5F6661"/>
                 </a:solidFill>
@@ -20757,8 +20707,8 @@
         </p:nvSpPr>
         <p:spPr>
           <a:xfrm>
-            <a:off x="914400" y="6781649"/>
-            <a:ext cx="12179808" cy="922579"/>
+            <a:off x="914400" y="7526427"/>
+            <a:ext cx="12179808" cy="1013917"/>
           </a:xfrm>
           <a:prstGeom prst="rect">
             <a:avLst/>
@@ -20777,7 +20727,7 @@
               </a:lnSpc>
             </a:pPr>
             <a:r>
-              <a:rPr sz="1900" i="0" b="0">
+              <a:rPr sz="2100" i="0" b="0">
                 <a:solidFill>
                   <a:srgbClr val="5F6661"/>
                 </a:solidFill>
@@ -20944,7 +20894,7 @@
         </p:nvSpPr>
         <p:spPr>
           <a:xfrm>
-            <a:off x="914400" y="1261872"/>
+            <a:off x="914400" y="1463040"/>
             <a:ext cx="6400800" cy="274320"/>
           </a:xfrm>
           <a:prstGeom prst="rect">
@@ -20983,7 +20933,7 @@
         </p:nvSpPr>
         <p:spPr>
           <a:xfrm>
-            <a:off x="914400" y="1737360"/>
+            <a:off x="914400" y="1938528"/>
             <a:ext cx="8412480" cy="913486"/>
           </a:xfrm>
           <a:prstGeom prst="rect">
@@ -21022,7 +20972,7 @@
         </p:nvSpPr>
         <p:spPr>
           <a:xfrm>
-            <a:off x="8507575" y="2214146"/>
+            <a:off x="8507575" y="2415314"/>
             <a:ext cx="8866025" cy="12802"/>
           </a:xfrm>
           <a:prstGeom prst="rect">
@@ -21066,7 +21016,7 @@
         </p:nvSpPr>
         <p:spPr>
           <a:xfrm>
-            <a:off x="914400" y="4069080"/>
+            <a:off x="914400" y="4270248"/>
             <a:ext cx="5059680" cy="274320"/>
           </a:xfrm>
           <a:prstGeom prst="rect">
@@ -21105,8 +21055,8 @@
         </p:nvSpPr>
         <p:spPr>
           <a:xfrm>
-            <a:off x="914400" y="4434840"/>
-            <a:ext cx="5059680" cy="551815"/>
+            <a:off x="914400" y="4636008"/>
+            <a:ext cx="5059680" cy="570230"/>
           </a:xfrm>
           <a:prstGeom prst="rect">
             <a:avLst/>
@@ -21125,7 +21075,7 @@
               </a:lnSpc>
             </a:pPr>
             <a:r>
-              <a:rPr sz="2500" i="0" b="0" spc="40">
+              <a:rPr sz="2600" i="0" b="0" spc="40">
                 <a:solidFill>
                   <a:srgbClr val="2C322E"/>
                 </a:solidFill>
@@ -21144,7 +21094,7 @@
         </p:nvSpPr>
         <p:spPr>
           <a:xfrm>
-            <a:off x="914400" y="4968367"/>
+            <a:off x="914400" y="5187950"/>
             <a:ext cx="5059680" cy="10973"/>
           </a:xfrm>
           <a:prstGeom prst="rect">
@@ -21188,8 +21138,8 @@
         </p:nvSpPr>
         <p:spPr>
           <a:xfrm>
-            <a:off x="914400" y="5224399"/>
-            <a:ext cx="5059680" cy="1252310"/>
+            <a:off x="914400" y="5443982"/>
+            <a:ext cx="5059680" cy="1378357"/>
           </a:xfrm>
           <a:prstGeom prst="rect">
             <a:avLst/>
@@ -21208,7 +21158,7 @@
               </a:lnSpc>
             </a:pPr>
             <a:r>
-              <a:rPr sz="1748" i="0" b="0">
+              <a:rPr sz="1932" i="0" b="0">
                 <a:solidFill>
                   <a:srgbClr val="5F6661"/>
                 </a:solidFill>
@@ -21227,7 +21177,7 @@
         </p:nvSpPr>
         <p:spPr>
           <a:xfrm>
-            <a:off x="6614160" y="4069080"/>
+            <a:off x="6614160" y="4270248"/>
             <a:ext cx="5059680" cy="274320"/>
           </a:xfrm>
           <a:prstGeom prst="rect">
@@ -21266,8 +21216,8 @@
         </p:nvSpPr>
         <p:spPr>
           <a:xfrm>
-            <a:off x="6614160" y="4434840"/>
-            <a:ext cx="5059680" cy="551815"/>
+            <a:off x="6614160" y="4636008"/>
+            <a:ext cx="5059680" cy="570230"/>
           </a:xfrm>
           <a:prstGeom prst="rect">
             <a:avLst/>
@@ -21286,7 +21236,7 @@
               </a:lnSpc>
             </a:pPr>
             <a:r>
-              <a:rPr sz="2500" i="0" b="0" spc="40">
+              <a:rPr sz="2600" i="0" b="0" spc="40">
                 <a:solidFill>
                   <a:srgbClr val="2C322E"/>
                 </a:solidFill>
@@ -21305,7 +21255,7 @@
         </p:nvSpPr>
         <p:spPr>
           <a:xfrm>
-            <a:off x="6614160" y="4968367"/>
+            <a:off x="6614160" y="5187950"/>
             <a:ext cx="5059680" cy="10973"/>
           </a:xfrm>
           <a:prstGeom prst="rect">
@@ -21349,8 +21299,8 @@
         </p:nvSpPr>
         <p:spPr>
           <a:xfrm>
-            <a:off x="6614160" y="5224399"/>
-            <a:ext cx="5059680" cy="1651459"/>
+            <a:off x="6614160" y="5443982"/>
+            <a:ext cx="5059680" cy="2260686"/>
           </a:xfrm>
           <a:prstGeom prst="rect">
             <a:avLst/>
@@ -21369,7 +21319,7 @@
               </a:lnSpc>
             </a:pPr>
             <a:r>
-              <a:rPr sz="1748" i="0" b="0">
+              <a:rPr sz="1932" i="0" b="0">
                 <a:solidFill>
                   <a:srgbClr val="5F6661"/>
                 </a:solidFill>
@@ -21388,7 +21338,7 @@
         </p:nvSpPr>
         <p:spPr>
           <a:xfrm>
-            <a:off x="12313920" y="4069080"/>
+            <a:off x="12313920" y="4270248"/>
             <a:ext cx="5059680" cy="274320"/>
           </a:xfrm>
           <a:prstGeom prst="rect">
@@ -21427,8 +21377,8 @@
         </p:nvSpPr>
         <p:spPr>
           <a:xfrm>
-            <a:off x="12313920" y="4434840"/>
-            <a:ext cx="5059680" cy="551815"/>
+            <a:off x="12313920" y="4636008"/>
+            <a:ext cx="5059680" cy="570230"/>
           </a:xfrm>
           <a:prstGeom prst="rect">
             <a:avLst/>
@@ -21447,7 +21397,7 @@
               </a:lnSpc>
             </a:pPr>
             <a:r>
-              <a:rPr sz="2500" i="0" b="0" spc="40">
+              <a:rPr sz="2600" i="0" b="0" spc="40">
                 <a:solidFill>
                   <a:srgbClr val="2C322E"/>
                 </a:solidFill>
@@ -21466,7 +21416,7 @@
         </p:nvSpPr>
         <p:spPr>
           <a:xfrm>
-            <a:off x="12313920" y="4968367"/>
+            <a:off x="12313920" y="5187950"/>
             <a:ext cx="5059680" cy="10973"/>
           </a:xfrm>
           <a:prstGeom prst="rect">
@@ -21510,8 +21460,8 @@
         </p:nvSpPr>
         <p:spPr>
           <a:xfrm>
-            <a:off x="12313920" y="5224399"/>
-            <a:ext cx="5059680" cy="1252310"/>
+            <a:off x="12313920" y="5443982"/>
+            <a:ext cx="5059680" cy="1378357"/>
           </a:xfrm>
           <a:prstGeom prst="rect">
             <a:avLst/>
@@ -21530,7 +21480,7 @@
               </a:lnSpc>
             </a:pPr>
             <a:r>
-              <a:rPr sz="1748" i="0" b="0">
+              <a:rPr sz="1932" i="0" b="0">
                 <a:solidFill>
                   <a:srgbClr val="5F6661"/>
                 </a:solidFill>
@@ -21549,8 +21499,8 @@
         </p:nvSpPr>
         <p:spPr>
           <a:xfrm>
-            <a:off x="914400" y="7579946"/>
-            <a:ext cx="12179808" cy="488721"/>
+            <a:off x="914400" y="8408756"/>
+            <a:ext cx="12179808" cy="534391"/>
           </a:xfrm>
           <a:prstGeom prst="rect">
             <a:avLst/>
@@ -21569,7 +21519,7 @@
               </a:lnSpc>
             </a:pPr>
             <a:r>
-              <a:rPr sz="1900" i="0" b="0">
+              <a:rPr sz="2100" i="0" b="0">
                 <a:solidFill>
                   <a:srgbClr val="5F6661"/>
                 </a:solidFill>
@@ -21578,7 +21528,7 @@
               <a:t>Não começar pelo produto. </a:t>
             </a:r>
             <a:r>
-              <a:rPr sz="1900" i="0" b="0">
+              <a:rPr sz="2100" i="0" b="0">
                 <a:solidFill>
                   <a:srgbClr val="2C322E"/>
                 </a:solidFill>
@@ -21745,7 +21695,7 @@
         </p:nvSpPr>
         <p:spPr>
           <a:xfrm>
-            <a:off x="914400" y="1261872"/>
+            <a:off x="914400" y="1941195"/>
             <a:ext cx="6400800" cy="274320"/>
           </a:xfrm>
           <a:prstGeom prst="rect">
@@ -21784,7 +21734,7 @@
         </p:nvSpPr>
         <p:spPr>
           <a:xfrm>
-            <a:off x="914400" y="1737360"/>
+            <a:off x="914400" y="2416683"/>
             <a:ext cx="8412480" cy="913486"/>
           </a:xfrm>
           <a:prstGeom prst="rect">
@@ -21823,7 +21773,7 @@
         </p:nvSpPr>
         <p:spPr>
           <a:xfrm>
-            <a:off x="6618034" y="2214146"/>
+            <a:off x="6618034" y="2893469"/>
             <a:ext cx="1520126" cy="12802"/>
           </a:xfrm>
           <a:prstGeom prst="rect">
@@ -21867,8 +21817,8 @@
         </p:nvSpPr>
         <p:spPr>
           <a:xfrm>
-            <a:off x="914400" y="2970886"/>
-            <a:ext cx="6400800" cy="1790294"/>
+            <a:off x="914400" y="3650209"/>
+            <a:ext cx="6400800" cy="1972970"/>
           </a:xfrm>
           <a:prstGeom prst="rect">
             <a:avLst/>
@@ -21887,7 +21837,7 @@
               </a:lnSpc>
             </a:pPr>
             <a:r>
-              <a:rPr sz="1900" i="0" b="0">
+              <a:rPr sz="2100" i="0" b="0">
                 <a:solidFill>
                   <a:srgbClr val="5F6661"/>
                 </a:solidFill>
@@ -21906,8 +21856,8 @@
         </p:nvSpPr>
         <p:spPr>
           <a:xfrm>
-            <a:off x="914400" y="5291531"/>
-            <a:ext cx="6400800" cy="747065"/>
+            <a:off x="914400" y="6153531"/>
+            <a:ext cx="6400800" cy="825703"/>
           </a:xfrm>
           <a:prstGeom prst="rect">
             <a:avLst/>
@@ -21926,7 +21876,7 @@
               </a:lnSpc>
             </a:pPr>
             <a:r>
-              <a:rPr sz="1634" i="0" b="0" spc="160">
+              <a:rPr sz="1805" i="0" b="0" spc="160">
                 <a:solidFill>
                   <a:srgbClr val="2C322E"/>
                 </a:solidFill>
@@ -21942,7 +21892,7 @@
               </a:lnSpc>
             </a:pPr>
             <a:r>
-              <a:rPr sz="1634" i="0" b="0" spc="160">
+              <a:rPr sz="1805" i="0" b="0" spc="160">
                 <a:solidFill>
                   <a:srgbClr val="2C322E"/>
                 </a:solidFill>
@@ -21961,8 +21911,8 @@
         </p:nvSpPr>
         <p:spPr>
           <a:xfrm>
-            <a:off x="9921240" y="1874520"/>
-            <a:ext cx="6858000" cy="1356436"/>
+            <a:off x="9921240" y="2553843"/>
+            <a:ext cx="6858000" cy="1972970"/>
           </a:xfrm>
           <a:prstGeom prst="rect">
             <a:avLst/>
@@ -21981,7 +21931,7 @@
               </a:lnSpc>
             </a:pPr>
             <a:r>
-              <a:rPr sz="1900" i="0" b="0">
+              <a:rPr sz="2100" i="0" b="0">
                 <a:solidFill>
                   <a:srgbClr val="2C322E"/>
                 </a:solidFill>
@@ -22000,8 +21950,8 @@
         </p:nvSpPr>
         <p:spPr>
           <a:xfrm>
-            <a:off x="9921240" y="3486988"/>
-            <a:ext cx="6858000" cy="1790294"/>
+            <a:off x="9921240" y="4782845"/>
+            <a:ext cx="6858000" cy="1972970"/>
           </a:xfrm>
           <a:prstGeom prst="rect">
             <a:avLst/>
@@ -22020,7 +21970,7 @@
               </a:lnSpc>
             </a:pPr>
             <a:r>
-              <a:rPr sz="1900" i="0" b="0">
+              <a:rPr sz="2100" i="0" b="0">
                 <a:solidFill>
                   <a:srgbClr val="5F6661"/>
                 </a:solidFill>
@@ -22039,8 +21989,8 @@
         </p:nvSpPr>
         <p:spPr>
           <a:xfrm>
-            <a:off x="9921240" y="5533314"/>
-            <a:ext cx="6858000" cy="922579"/>
+            <a:off x="9921240" y="7011848"/>
+            <a:ext cx="6858000" cy="1013917"/>
           </a:xfrm>
           <a:prstGeom prst="rect">
             <a:avLst/>
@@ -22059,7 +22009,7 @@
               </a:lnSpc>
             </a:pPr>
             <a:r>
-              <a:rPr sz="1900" i="0" b="0">
+              <a:rPr sz="2100" i="0" b="0">
                 <a:solidFill>
                   <a:srgbClr val="5F6661"/>
                 </a:solidFill>
@@ -22068,7 +22018,7 @@
               <a:t>A melhor proteção não é a maior. </a:t>
             </a:r>
             <a:r>
-              <a:rPr sz="1900" i="0" b="0">
+              <a:rPr sz="2100" i="0" b="0">
                 <a:solidFill>
                   <a:srgbClr val="2C322E"/>
                 </a:solidFill>

--- a/clientes/lucas-martini/Brand-Book-Lucas-Martini.pptx
+++ b/clientes/lucas-martini/Brand-Book-Lucas-Martini.pptx
@@ -3194,7 +3194,7 @@
       </p:pic>
       <p:pic>
         <p:nvPicPr>
-          <p:cNvPr id="4" name="Picture 3" descr="lm-vertical-dourado-escuro.png"/>
+          <p:cNvPr id="4" name="Picture 3" descr="lm-vertical-ouro-claro.png"/>
           <p:cNvPicPr>
             <a:picLocks noChangeAspect="1"/>
           </p:cNvPicPr>
@@ -3209,7 +3209,7 @@
         <p:spPr>
           <a:xfrm>
             <a:off x="5669280" y="2788920"/>
-            <a:ext cx="6949440" cy="2776369"/>
+            <a:ext cx="6949440" cy="2526752"/>
           </a:xfrm>
           <a:prstGeom prst="rect">
             <a:avLst/>
@@ -4284,7 +4284,7 @@
       <p:grpSpPr/>
       <p:pic>
         <p:nvPicPr>
-          <p:cNvPr id="7" name="Picture 6" descr="lm-escudo-dourado.png"/>
+          <p:cNvPr id="7" name="Picture 6" descr="lm-escudo-ouro-claro.png"/>
           <p:cNvPicPr>
             <a:picLocks noChangeAspect="1"/>
           </p:cNvPicPr>
@@ -4301,7 +4301,7 @@
         <p:spPr>
           <a:xfrm>
             <a:off x="11338560" y="548640"/>
-            <a:ext cx="7773603" cy="8321040"/>
+            <a:ext cx="7981406" cy="8321040"/>
           </a:xfrm>
           <a:prstGeom prst="rect">
             <a:avLst/>
@@ -7805,7 +7805,7 @@
       <p:grpSpPr/>
       <p:pic>
         <p:nvPicPr>
-          <p:cNvPr id="7" name="Picture 6" descr="lm-escudo-dourado.png"/>
+          <p:cNvPr id="7" name="Picture 6" descr="lm-escudo-ouro-claro.png"/>
           <p:cNvPicPr>
             <a:picLocks noChangeAspect="1"/>
           </p:cNvPicPr>
@@ -7822,7 +7822,7 @@
         <p:spPr>
           <a:xfrm>
             <a:off x="11338560" y="548640"/>
-            <a:ext cx="7773603" cy="8321040"/>
+            <a:ext cx="7981406" cy="8321040"/>
           </a:xfrm>
           <a:prstGeom prst="rect">
             <a:avLst/>
@@ -10767,7 +10767,7 @@
       <p:grpSpPr/>
       <p:pic>
         <p:nvPicPr>
-          <p:cNvPr id="7" name="Picture 6" descr="lm-escudo-dourado.png"/>
+          <p:cNvPr id="7" name="Picture 6" descr="lm-escudo-ouro-claro.png"/>
           <p:cNvPicPr>
             <a:picLocks noChangeAspect="1"/>
           </p:cNvPicPr>
@@ -10784,7 +10784,7 @@
         <p:spPr>
           <a:xfrm>
             <a:off x="11338560" y="548640"/>
-            <a:ext cx="7773603" cy="8321040"/>
+            <a:ext cx="7981406" cy="8321040"/>
           </a:xfrm>
           <a:prstGeom prst="rect">
             <a:avLst/>
@@ -11906,7 +11906,7 @@
       </p:sp>
       <p:pic>
         <p:nvPicPr>
-          <p:cNvPr id="9" name="Picture 8" descr="lm-horizontal-dourado.png"/>
+          <p:cNvPr id="9" name="Picture 8" descr="lm-horizontal-ouro-claro.png"/>
           <p:cNvPicPr>
             <a:picLocks noChangeAspect="1"/>
           </p:cNvPicPr>
@@ -11920,8 +11920,8 @@
         </p:blipFill>
         <p:spPr>
           <a:xfrm>
-            <a:off x="1618031" y="4938601"/>
-            <a:ext cx="2296058" cy="775558"/>
+            <a:off x="1618031" y="4931223"/>
+            <a:ext cx="2296058" cy="790314"/>
           </a:xfrm>
           <a:prstGeom prst="rect">
             <a:avLst/>
@@ -12066,8 +12066,8 @@
         </p:blipFill>
         <p:spPr>
           <a:xfrm>
-            <a:off x="5869991" y="4929398"/>
-            <a:ext cx="2296058" cy="793964"/>
+            <a:off x="5869991" y="4931223"/>
+            <a:ext cx="2296058" cy="790314"/>
           </a:xfrm>
           <a:prstGeom prst="rect">
             <a:avLst/>
@@ -12212,8 +12212,8 @@
         </p:blipFill>
         <p:spPr>
           <a:xfrm>
-            <a:off x="10121951" y="4910176"/>
-            <a:ext cx="2296058" cy="832408"/>
+            <a:off x="10121951" y="4908967"/>
+            <a:ext cx="2296058" cy="834826"/>
           </a:xfrm>
           <a:prstGeom prst="rect">
             <a:avLst/>
@@ -12344,7 +12344,7 @@
       </p:sp>
       <p:pic>
         <p:nvPicPr>
-          <p:cNvPr id="21" name="Picture 20" descr="lm-vertical-claro.png"/>
+          <p:cNvPr id="21" name="Picture 20" descr="lm-vertical-branco.png"/>
           <p:cNvPicPr>
             <a:picLocks noChangeAspect="1"/>
           </p:cNvPicPr>
@@ -12358,8 +12358,8 @@
         </p:blipFill>
         <p:spPr>
           <a:xfrm>
-            <a:off x="14373911" y="4903422"/>
-            <a:ext cx="2296058" cy="845916"/>
+            <a:off x="14373911" y="4908967"/>
+            <a:ext cx="2296058" cy="834826"/>
           </a:xfrm>
           <a:prstGeom prst="rect">
             <a:avLst/>
@@ -15436,7 +15436,7 @@
       <p:grpSpPr/>
       <p:pic>
         <p:nvPicPr>
-          <p:cNvPr id="7" name="Picture 6" descr="lm-escudo-dourado.png"/>
+          <p:cNvPr id="7" name="Picture 6" descr="lm-escudo-ouro-claro.png"/>
           <p:cNvPicPr>
             <a:picLocks noChangeAspect="1"/>
           </p:cNvPicPr>
@@ -15453,7 +15453,7 @@
         <p:spPr>
           <a:xfrm>
             <a:off x="11338560" y="548640"/>
-            <a:ext cx="7773603" cy="8321040"/>
+            <a:ext cx="7981406" cy="8321040"/>
           </a:xfrm>
           <a:prstGeom prst="rect">
             <a:avLst/>
@@ -15823,7 +15823,7 @@
       <p:grpSpPr/>
       <p:pic>
         <p:nvPicPr>
-          <p:cNvPr id="6" name="Picture 5" descr="lm-escudo-dourado.png"/>
+          <p:cNvPr id="6" name="Picture 5" descr="lm-escudo-ouro-claro.png"/>
           <p:cNvPicPr>
             <a:picLocks noChangeAspect="1"/>
           </p:cNvPicPr>
@@ -15840,7 +15840,7 @@
         <p:spPr>
           <a:xfrm>
             <a:off x="12435840" y="1463040"/>
-            <a:ext cx="6833937" cy="7315200"/>
+            <a:ext cx="7016620" cy="7315200"/>
           </a:xfrm>
           <a:prstGeom prst="rect">
             <a:avLst/>
@@ -18735,7 +18735,7 @@
       <p:grpSpPr/>
       <p:pic>
         <p:nvPicPr>
-          <p:cNvPr id="7" name="Picture 6" descr="lm-escudo-dourado.png"/>
+          <p:cNvPr id="7" name="Picture 6" descr="lm-escudo-ouro-claro.png"/>
           <p:cNvPicPr>
             <a:picLocks noChangeAspect="1"/>
           </p:cNvPicPr>
@@ -18752,7 +18752,7 @@
         <p:spPr>
           <a:xfrm>
             <a:off x="11338560" y="548640"/>
-            <a:ext cx="7773603" cy="8321040"/>
+            <a:ext cx="7981406" cy="8321040"/>
           </a:xfrm>
           <a:prstGeom prst="rect">
             <a:avLst/>

--- a/clientes/lucas-martini/Brand-Book-Lucas-Martini.pptx
+++ b/clientes/lucas-martini/Brand-Book-Lucas-Martini.pptx
@@ -10555,7 +10555,7 @@
                 </a:solidFill>
                 <a:latin typeface="Outfit 1 Semi-Bold"/>
               </a:rPr>
-              <a:t>NUNCA USAMOS</a:t>
+              <a:t>NUNCA USAR</a:t>
             </a:r>
           </a:p>
         </p:txBody>

--- a/clientes/lucas-martini/Brand-Book-Lucas-Martini.pptx
+++ b/clientes/lucas-martini/Brand-Book-Lucas-Martini.pptx
@@ -3240,7 +3240,7 @@
           <a:p>
             <a:pPr algn="ctr">
               <a:lnSpc>
-                <a:spcPct val="140000"/>
+                <a:spcPts val="2940"/>
               </a:lnSpc>
             </a:pPr>
             <a:r>
@@ -3279,7 +3279,7 @@
           <a:p>
             <a:pPr algn="ctr">
               <a:lnSpc>
-                <a:spcPct val="140000"/>
+                <a:spcPts val="1750"/>
               </a:lnSpc>
             </a:pPr>
             <a:r>
@@ -3388,7 +3388,7 @@
           <a:p>
             <a:pPr algn="l">
               <a:lnSpc>
-                <a:spcPct val="140000"/>
+                <a:spcPts val="1609"/>
               </a:lnSpc>
             </a:pPr>
             <a:r>
@@ -3427,7 +3427,7 @@
           <a:p>
             <a:pPr algn="r">
               <a:lnSpc>
-                <a:spcPct val="140000"/>
+                <a:spcPts val="1609"/>
               </a:lnSpc>
             </a:pPr>
             <a:r>
@@ -3450,7 +3450,7 @@
         </p:nvSpPr>
         <p:spPr>
           <a:xfrm>
-            <a:off x="914400" y="1463040"/>
+            <a:off x="914400" y="1535633"/>
             <a:ext cx="6400800" cy="274320"/>
           </a:xfrm>
           <a:prstGeom prst="rect">
@@ -3466,7 +3466,7 @@
           <a:p>
             <a:pPr algn="l">
               <a:lnSpc>
-                <a:spcPct val="140000"/>
+                <a:spcPts val="1750"/>
               </a:lnSpc>
             </a:pPr>
             <a:r>
@@ -3489,7 +3489,7 @@
         </p:nvSpPr>
         <p:spPr>
           <a:xfrm>
-            <a:off x="914400" y="1938528"/>
+            <a:off x="914400" y="2011121"/>
             <a:ext cx="8412480" cy="913486"/>
           </a:xfrm>
           <a:prstGeom prst="rect">
@@ -3505,7 +3505,7 @@
           <a:p>
             <a:pPr algn="l">
               <a:lnSpc>
-                <a:spcPct val="116000"/>
+                <a:spcPts val="5220"/>
               </a:lnSpc>
             </a:pPr>
             <a:r>
@@ -3528,7 +3528,7 @@
         </p:nvSpPr>
         <p:spPr>
           <a:xfrm>
-            <a:off x="7248580" y="2415314"/>
+            <a:off x="7248580" y="2487907"/>
             <a:ext cx="10125020" cy="12802"/>
           </a:xfrm>
           <a:prstGeom prst="rect">
@@ -3572,7 +3572,7 @@
         </p:nvSpPr>
         <p:spPr>
           <a:xfrm>
-            <a:off x="914400" y="4407408"/>
+            <a:off x="914400" y="4480001"/>
             <a:ext cx="3634740" cy="274320"/>
           </a:xfrm>
           <a:prstGeom prst="rect">
@@ -3588,7 +3588,7 @@
           <a:p>
             <a:pPr algn="l">
               <a:lnSpc>
-                <a:spcPct val="140000"/>
+                <a:spcPts val="1750"/>
               </a:lnSpc>
             </a:pPr>
             <a:r>
@@ -3611,7 +3611,7 @@
         </p:nvSpPr>
         <p:spPr>
           <a:xfrm>
-            <a:off x="914400" y="4773168"/>
+            <a:off x="914400" y="4845761"/>
             <a:ext cx="3634740" cy="1049020"/>
           </a:xfrm>
           <a:prstGeom prst="rect">
@@ -3650,7 +3650,7 @@
         </p:nvSpPr>
         <p:spPr>
           <a:xfrm>
-            <a:off x="914400" y="5803900"/>
+            <a:off x="914400" y="5876493"/>
             <a:ext cx="3634740" cy="10973"/>
           </a:xfrm>
           <a:prstGeom prst="rect">
@@ -3694,8 +3694,8 @@
         </p:nvSpPr>
         <p:spPr>
           <a:xfrm>
-            <a:off x="914400" y="6059932"/>
-            <a:ext cx="3634740" cy="937193"/>
+            <a:off x="914400" y="6132525"/>
+            <a:ext cx="3634740" cy="766420"/>
           </a:xfrm>
           <a:prstGeom prst="rect">
             <a:avLst/>
@@ -3733,7 +3733,7 @@
         </p:nvSpPr>
         <p:spPr>
           <a:xfrm>
-            <a:off x="5189220" y="4407408"/>
+            <a:off x="5189220" y="4480001"/>
             <a:ext cx="3634740" cy="274320"/>
           </a:xfrm>
           <a:prstGeom prst="rect">
@@ -3749,7 +3749,7 @@
           <a:p>
             <a:pPr algn="l">
               <a:lnSpc>
-                <a:spcPct val="140000"/>
+                <a:spcPts val="1750"/>
               </a:lnSpc>
             </a:pPr>
             <a:r>
@@ -3772,7 +3772,7 @@
         </p:nvSpPr>
         <p:spPr>
           <a:xfrm>
-            <a:off x="5189220" y="4773168"/>
+            <a:off x="5189220" y="4845761"/>
             <a:ext cx="3634740" cy="1049020"/>
           </a:xfrm>
           <a:prstGeom prst="rect">
@@ -3811,7 +3811,7 @@
         </p:nvSpPr>
         <p:spPr>
           <a:xfrm>
-            <a:off x="5189220" y="5803900"/>
+            <a:off x="5189220" y="5876493"/>
             <a:ext cx="3634740" cy="10973"/>
           </a:xfrm>
           <a:prstGeom prst="rect">
@@ -3855,8 +3855,8 @@
         </p:nvSpPr>
         <p:spPr>
           <a:xfrm>
-            <a:off x="5189220" y="6059932"/>
-            <a:ext cx="3634740" cy="937193"/>
+            <a:off x="5189220" y="6132525"/>
+            <a:ext cx="3634740" cy="766420"/>
           </a:xfrm>
           <a:prstGeom prst="rect">
             <a:avLst/>
@@ -3894,7 +3894,7 @@
         </p:nvSpPr>
         <p:spPr>
           <a:xfrm>
-            <a:off x="9464040" y="4407408"/>
+            <a:off x="9464040" y="4480001"/>
             <a:ext cx="3634740" cy="274320"/>
           </a:xfrm>
           <a:prstGeom prst="rect">
@@ -3910,7 +3910,7 @@
           <a:p>
             <a:pPr algn="l">
               <a:lnSpc>
-                <a:spcPct val="140000"/>
+                <a:spcPts val="1750"/>
               </a:lnSpc>
             </a:pPr>
             <a:r>
@@ -3933,7 +3933,7 @@
         </p:nvSpPr>
         <p:spPr>
           <a:xfrm>
-            <a:off x="9464040" y="4773168"/>
+            <a:off x="9464040" y="4845761"/>
             <a:ext cx="3634740" cy="570230"/>
           </a:xfrm>
           <a:prstGeom prst="rect">
@@ -3972,7 +3972,7 @@
         </p:nvSpPr>
         <p:spPr>
           <a:xfrm>
-            <a:off x="9464040" y="5803900"/>
+            <a:off x="9464040" y="5876493"/>
             <a:ext cx="3634740" cy="10973"/>
           </a:xfrm>
           <a:prstGeom prst="rect">
@@ -4016,8 +4016,8 @@
         </p:nvSpPr>
         <p:spPr>
           <a:xfrm>
-            <a:off x="9464040" y="6059932"/>
-            <a:ext cx="3634740" cy="937193"/>
+            <a:off x="9464040" y="6132525"/>
+            <a:ext cx="3634740" cy="766420"/>
           </a:xfrm>
           <a:prstGeom prst="rect">
             <a:avLst/>
@@ -4055,7 +4055,7 @@
         </p:nvSpPr>
         <p:spPr>
           <a:xfrm>
-            <a:off x="13738860" y="4407408"/>
+            <a:off x="13738860" y="4480001"/>
             <a:ext cx="3634740" cy="274320"/>
           </a:xfrm>
           <a:prstGeom prst="rect">
@@ -4071,7 +4071,7 @@
           <a:p>
             <a:pPr algn="l">
               <a:lnSpc>
-                <a:spcPct val="140000"/>
+                <a:spcPts val="1750"/>
               </a:lnSpc>
             </a:pPr>
             <a:r>
@@ -4094,7 +4094,7 @@
         </p:nvSpPr>
         <p:spPr>
           <a:xfrm>
-            <a:off x="13738860" y="4773168"/>
+            <a:off x="13738860" y="4845761"/>
             <a:ext cx="3634740" cy="1049020"/>
           </a:xfrm>
           <a:prstGeom prst="rect">
@@ -4133,7 +4133,7 @@
         </p:nvSpPr>
         <p:spPr>
           <a:xfrm>
-            <a:off x="13738860" y="5803900"/>
+            <a:off x="13738860" y="5876493"/>
             <a:ext cx="3634740" cy="10973"/>
           </a:xfrm>
           <a:prstGeom prst="rect">
@@ -4177,8 +4177,8 @@
         </p:nvSpPr>
         <p:spPr>
           <a:xfrm>
-            <a:off x="13738860" y="6059932"/>
-            <a:ext cx="3634740" cy="937193"/>
+            <a:off x="13738860" y="6132525"/>
+            <a:ext cx="3634740" cy="766420"/>
           </a:xfrm>
           <a:prstGeom prst="rect">
             <a:avLst/>
@@ -4216,8 +4216,8 @@
         </p:nvSpPr>
         <p:spPr>
           <a:xfrm>
-            <a:off x="914400" y="7701213"/>
-            <a:ext cx="12179808" cy="1013917"/>
+            <a:off x="914400" y="7603033"/>
+            <a:ext cx="12179808" cy="828294"/>
           </a:xfrm>
           <a:prstGeom prst="rect">
             <a:avLst/>
@@ -4428,7 +4428,7 @@
           <a:p>
             <a:pPr algn="l">
               <a:lnSpc>
-                <a:spcPct val="140000"/>
+                <a:spcPts val="1609"/>
               </a:lnSpc>
             </a:pPr>
             <a:r>
@@ -4467,7 +4467,7 @@
           <a:p>
             <a:pPr algn="r">
               <a:lnSpc>
-                <a:spcPct val="140000"/>
+                <a:spcPts val="1609"/>
               </a:lnSpc>
             </a:pPr>
             <a:r>
@@ -4506,7 +4506,7 @@
           <a:p>
             <a:pPr algn="l">
               <a:lnSpc>
-                <a:spcPct val="140000"/>
+                <a:spcPts val="8119"/>
               </a:lnSpc>
             </a:pPr>
             <a:r>
@@ -4545,7 +4545,7 @@
           <a:p>
             <a:pPr algn="l">
               <a:lnSpc>
-                <a:spcPct val="105000"/>
+                <a:spcPts val="7350"/>
               </a:lnSpc>
             </a:pPr>
             <a:r>
@@ -4561,7 +4561,7 @@
           <a:p>
             <a:pPr algn="l">
               <a:lnSpc>
-                <a:spcPct val="105000"/>
+                <a:spcPts val="7350"/>
               </a:lnSpc>
             </a:pPr>
             <a:r>
@@ -4644,7 +4644,7 @@
           <a:p>
             <a:pPr algn="l">
               <a:lnSpc>
-                <a:spcPct val="140000"/>
+                <a:spcPts val="1750"/>
               </a:lnSpc>
             </a:pPr>
             <a:r>
@@ -4753,7 +4753,7 @@
           <a:p>
             <a:pPr algn="l">
               <a:lnSpc>
-                <a:spcPct val="140000"/>
+                <a:spcPts val="1609"/>
               </a:lnSpc>
             </a:pPr>
             <a:r>
@@ -4792,7 +4792,7 @@
           <a:p>
             <a:pPr algn="r">
               <a:lnSpc>
-                <a:spcPct val="140000"/>
+                <a:spcPts val="1609"/>
               </a:lnSpc>
             </a:pPr>
             <a:r>
@@ -4815,7 +4815,7 @@
         </p:nvSpPr>
         <p:spPr>
           <a:xfrm>
-            <a:off x="914400" y="1463040"/>
+            <a:off x="914400" y="1706308"/>
             <a:ext cx="6400800" cy="274320"/>
           </a:xfrm>
           <a:prstGeom prst="rect">
@@ -4831,7 +4831,7 @@
           <a:p>
             <a:pPr algn="l">
               <a:lnSpc>
-                <a:spcPct val="140000"/>
+                <a:spcPts val="1750"/>
               </a:lnSpc>
             </a:pPr>
             <a:r>
@@ -4854,7 +4854,7 @@
         </p:nvSpPr>
         <p:spPr>
           <a:xfrm>
-            <a:off x="914400" y="1938528"/>
+            <a:off x="914400" y="2181796"/>
             <a:ext cx="8412480" cy="1735531"/>
           </a:xfrm>
           <a:prstGeom prst="rect">
@@ -4870,7 +4870,7 @@
           <a:p>
             <a:pPr algn="l">
               <a:lnSpc>
-                <a:spcPct val="116000"/>
+                <a:spcPts val="5220"/>
               </a:lnSpc>
             </a:pPr>
             <a:r>
@@ -4886,7 +4886,7 @@
           <a:p>
             <a:pPr algn="l">
               <a:lnSpc>
-                <a:spcPct val="116000"/>
+                <a:spcPts val="5220"/>
               </a:lnSpc>
             </a:pPr>
             <a:r>
@@ -4909,7 +4909,7 @@
         </p:nvSpPr>
         <p:spPr>
           <a:xfrm>
-            <a:off x="7030694" y="3237360"/>
+            <a:off x="7030694" y="3480628"/>
             <a:ext cx="1107466" cy="12802"/>
           </a:xfrm>
           <a:prstGeom prst="rect">
@@ -4953,8 +4953,8 @@
         </p:nvSpPr>
         <p:spPr>
           <a:xfrm>
-            <a:off x="914400" y="3994099"/>
-            <a:ext cx="6400800" cy="1493444"/>
+            <a:off x="914400" y="4237367"/>
+            <a:ext cx="6400800" cy="1215009"/>
           </a:xfrm>
           <a:prstGeom prst="rect">
             <a:avLst/>
@@ -4992,7 +4992,7 @@
         </p:nvSpPr>
         <p:spPr>
           <a:xfrm>
-            <a:off x="9921240" y="2304288"/>
+            <a:off x="9921240" y="2547556"/>
             <a:ext cx="6400800" cy="274320"/>
           </a:xfrm>
           <a:prstGeom prst="rect">
@@ -5008,7 +5008,7 @@
           <a:p>
             <a:pPr algn="l">
               <a:lnSpc>
-                <a:spcPct val="140000"/>
+                <a:spcPts val="1750"/>
               </a:lnSpc>
             </a:pPr>
             <a:r>
@@ -5031,7 +5031,7 @@
         </p:nvSpPr>
         <p:spPr>
           <a:xfrm>
-            <a:off x="9921240" y="2688336"/>
+            <a:off x="9921240" y="2931604"/>
             <a:ext cx="6858000" cy="7315"/>
           </a:xfrm>
           <a:prstGeom prst="rect">
@@ -5075,7 +5075,7 @@
         </p:nvSpPr>
         <p:spPr>
           <a:xfrm>
-            <a:off x="9921240" y="2875788"/>
+            <a:off x="9921240" y="3119056"/>
             <a:ext cx="365760" cy="274320"/>
           </a:xfrm>
           <a:prstGeom prst="rect">
@@ -5091,7 +5091,7 @@
           <a:p>
             <a:pPr algn="l">
               <a:lnSpc>
-                <a:spcPct val="140000"/>
+                <a:spcPts val="1894"/>
               </a:lnSpc>
             </a:pPr>
             <a:r>
@@ -5114,8 +5114,8 @@
         </p:nvSpPr>
         <p:spPr>
           <a:xfrm>
-            <a:off x="10424160" y="2834640"/>
-            <a:ext cx="6355080" cy="829391"/>
+            <a:off x="10424160" y="3077908"/>
+            <a:ext cx="6355080" cy="686562"/>
           </a:xfrm>
           <a:prstGeom prst="rect">
             <a:avLst/>
@@ -5162,7 +5162,7 @@
         </p:nvSpPr>
         <p:spPr>
           <a:xfrm>
-            <a:off x="9921240" y="3901775"/>
+            <a:off x="9921240" y="4002214"/>
             <a:ext cx="6858000" cy="7315"/>
           </a:xfrm>
           <a:prstGeom prst="rect">
@@ -5206,7 +5206,7 @@
         </p:nvSpPr>
         <p:spPr>
           <a:xfrm>
-            <a:off x="9921240" y="4089227"/>
+            <a:off x="9921240" y="4189666"/>
             <a:ext cx="365760" cy="274320"/>
           </a:xfrm>
           <a:prstGeom prst="rect">
@@ -5222,7 +5222,7 @@
           <a:p>
             <a:pPr algn="l">
               <a:lnSpc>
-                <a:spcPct val="140000"/>
+                <a:spcPts val="1894"/>
               </a:lnSpc>
             </a:pPr>
             <a:r>
@@ -5245,8 +5245,8 @@
         </p:nvSpPr>
         <p:spPr>
           <a:xfrm>
-            <a:off x="10424160" y="4048079"/>
-            <a:ext cx="6355080" cy="829391"/>
+            <a:off x="10424160" y="4148518"/>
+            <a:ext cx="6355080" cy="686562"/>
           </a:xfrm>
           <a:prstGeom prst="rect">
             <a:avLst/>
@@ -5293,7 +5293,7 @@
         </p:nvSpPr>
         <p:spPr>
           <a:xfrm>
-            <a:off x="9921240" y="5115215"/>
+            <a:off x="9921240" y="5072824"/>
             <a:ext cx="6858000" cy="7315"/>
           </a:xfrm>
           <a:prstGeom prst="rect">
@@ -5337,7 +5337,7 @@
         </p:nvSpPr>
         <p:spPr>
           <a:xfrm>
-            <a:off x="9921240" y="5302667"/>
+            <a:off x="9921240" y="5260276"/>
             <a:ext cx="365760" cy="274320"/>
           </a:xfrm>
           <a:prstGeom prst="rect">
@@ -5353,7 +5353,7 @@
           <a:p>
             <a:pPr algn="l">
               <a:lnSpc>
-                <a:spcPct val="140000"/>
+                <a:spcPts val="1894"/>
               </a:lnSpc>
             </a:pPr>
             <a:r>
@@ -5376,8 +5376,8 @@
         </p:nvSpPr>
         <p:spPr>
           <a:xfrm>
-            <a:off x="10424160" y="5261519"/>
-            <a:ext cx="6355080" cy="829391"/>
+            <a:off x="10424160" y="5219128"/>
+            <a:ext cx="6355080" cy="686562"/>
           </a:xfrm>
           <a:prstGeom prst="rect">
             <a:avLst/>
@@ -5424,7 +5424,7 @@
         </p:nvSpPr>
         <p:spPr>
           <a:xfrm>
-            <a:off x="9921240" y="6328654"/>
+            <a:off x="9921240" y="6143434"/>
             <a:ext cx="6858000" cy="7315"/>
           </a:xfrm>
           <a:prstGeom prst="rect">
@@ -5468,7 +5468,7 @@
         </p:nvSpPr>
         <p:spPr>
           <a:xfrm>
-            <a:off x="9921240" y="6516106"/>
+            <a:off x="9921240" y="6330886"/>
             <a:ext cx="365760" cy="274320"/>
           </a:xfrm>
           <a:prstGeom prst="rect">
@@ -5484,7 +5484,7 @@
           <a:p>
             <a:pPr algn="l">
               <a:lnSpc>
-                <a:spcPct val="140000"/>
+                <a:spcPts val="1894"/>
               </a:lnSpc>
             </a:pPr>
             <a:r>
@@ -5507,8 +5507,8 @@
         </p:nvSpPr>
         <p:spPr>
           <a:xfrm>
-            <a:off x="10424160" y="6474958"/>
-            <a:ext cx="6355080" cy="829391"/>
+            <a:off x="10424160" y="6289738"/>
+            <a:ext cx="6355080" cy="686562"/>
           </a:xfrm>
           <a:prstGeom prst="rect">
             <a:avLst/>
@@ -5555,7 +5555,7 @@
         </p:nvSpPr>
         <p:spPr>
           <a:xfrm>
-            <a:off x="9921240" y="7542093"/>
+            <a:off x="9921240" y="7214044"/>
             <a:ext cx="6858000" cy="7315"/>
           </a:xfrm>
           <a:prstGeom prst="rect">
@@ -5599,8 +5599,8 @@
         </p:nvSpPr>
         <p:spPr>
           <a:xfrm>
-            <a:off x="9921240" y="7926141"/>
-            <a:ext cx="6858000" cy="808406"/>
+            <a:off x="9921240" y="7598092"/>
+            <a:ext cx="6858000" cy="662559"/>
           </a:xfrm>
           <a:prstGeom prst="rect">
             <a:avLst/>
@@ -5733,7 +5733,7 @@
           <a:p>
             <a:pPr algn="l">
               <a:lnSpc>
-                <a:spcPct val="140000"/>
+                <a:spcPts val="1609"/>
               </a:lnSpc>
             </a:pPr>
             <a:r>
@@ -5772,7 +5772,7 @@
           <a:p>
             <a:pPr algn="r">
               <a:lnSpc>
-                <a:spcPct val="140000"/>
+                <a:spcPts val="1609"/>
               </a:lnSpc>
             </a:pPr>
             <a:r>
@@ -5811,7 +5811,7 @@
           <a:p>
             <a:pPr algn="l">
               <a:lnSpc>
-                <a:spcPct val="140000"/>
+                <a:spcPts val="1750"/>
               </a:lnSpc>
             </a:pPr>
             <a:r>
@@ -5850,7 +5850,7 @@
           <a:p>
             <a:pPr algn="l">
               <a:lnSpc>
-                <a:spcPct val="116000"/>
+                <a:spcPts val="5220"/>
               </a:lnSpc>
             </a:pPr>
             <a:r>
@@ -5866,7 +5866,7 @@
           <a:p>
             <a:pPr algn="l">
               <a:lnSpc>
-                <a:spcPct val="116000"/>
+                <a:spcPts val="5220"/>
               </a:lnSpc>
             </a:pPr>
             <a:r>
@@ -5934,7 +5934,7 @@
         <p:spPr>
           <a:xfrm>
             <a:off x="914400" y="3994099"/>
-            <a:ext cx="6400800" cy="1493444"/>
+            <a:ext cx="6400800" cy="1215009"/>
           </a:xfrm>
           <a:prstGeom prst="rect">
             <a:avLst/>
@@ -5988,7 +5988,7 @@
           <a:p>
             <a:pPr algn="l">
               <a:lnSpc>
-                <a:spcPct val="140000"/>
+                <a:spcPts val="1750"/>
               </a:lnSpc>
             </a:pPr>
             <a:r>
@@ -6071,11 +6071,11 @@
           <a:p>
             <a:pPr algn="l">
               <a:lnSpc>
-                <a:spcPct val="140000"/>
-              </a:lnSpc>
-            </a:pPr>
-            <a:r>
-              <a:rPr sz="1584" i="0" b="0">
+                <a:spcPts val="2410"/>
+              </a:lnSpc>
+            </a:pPr>
+            <a:r>
+              <a:rPr sz="1722" i="0" b="0">
                 <a:solidFill>
                   <a:srgbClr val="AE8C4E"/>
                 </a:solidFill>
@@ -6095,7 +6095,7 @@
         <p:spPr>
           <a:xfrm>
             <a:off x="10424160" y="2834640"/>
-            <a:ext cx="6355080" cy="955514"/>
+            <a:ext cx="6355080" cy="1227582"/>
           </a:xfrm>
           <a:prstGeom prst="rect">
             <a:avLst/>
@@ -6114,7 +6114,7 @@
               </a:lnSpc>
             </a:pPr>
             <a:r>
-              <a:rPr sz="1932" i="0" b="0">
+              <a:rPr sz="2100" i="0" b="0">
                 <a:solidFill>
                   <a:srgbClr val="2C322E"/>
                 </a:solidFill>
@@ -6123,7 +6123,7 @@
               <a:t>Continuidade</a:t>
             </a:r>
             <a:r>
-              <a:rPr sz="1932" i="0" b="0">
+              <a:rPr sz="2100" i="0" b="0">
                 <a:solidFill>
                   <a:srgbClr val="5F6661"/>
                 </a:solidFill>
@@ -6142,7 +6142,7 @@
         </p:nvSpPr>
         <p:spPr>
           <a:xfrm>
-            <a:off x="9921240" y="4027898"/>
+            <a:off x="9921240" y="4299966"/>
             <a:ext cx="6858000" cy="7315"/>
           </a:xfrm>
           <a:prstGeom prst="rect">
@@ -6186,7 +6186,7 @@
         </p:nvSpPr>
         <p:spPr>
           <a:xfrm>
-            <a:off x="9921240" y="4215350"/>
+            <a:off x="9921240" y="4487418"/>
             <a:ext cx="365760" cy="274320"/>
           </a:xfrm>
           <a:prstGeom prst="rect">
@@ -6202,11 +6202,11 @@
           <a:p>
             <a:pPr algn="l">
               <a:lnSpc>
-                <a:spcPct val="140000"/>
-              </a:lnSpc>
-            </a:pPr>
-            <a:r>
-              <a:rPr sz="1584" i="0" b="0">
+                <a:spcPts val="2410"/>
+              </a:lnSpc>
+            </a:pPr>
+            <a:r>
+              <a:rPr sz="1722" i="0" b="0">
                 <a:solidFill>
                   <a:srgbClr val="AE8C4E"/>
                 </a:solidFill>
@@ -6225,8 +6225,8 @@
         </p:nvSpPr>
         <p:spPr>
           <a:xfrm>
-            <a:off x="10424160" y="4174202"/>
-            <a:ext cx="6355080" cy="955514"/>
+            <a:off x="10424160" y="4446270"/>
+            <a:ext cx="6355080" cy="848868"/>
           </a:xfrm>
           <a:prstGeom prst="rect">
             <a:avLst/>
@@ -6245,7 +6245,7 @@
               </a:lnSpc>
             </a:pPr>
             <a:r>
-              <a:rPr sz="1932" i="0" b="0">
+              <a:rPr sz="2100" i="0" b="0">
                 <a:solidFill>
                   <a:srgbClr val="2C322E"/>
                 </a:solidFill>
@@ -6254,7 +6254,7 @@
               <a:t>Proteção</a:t>
             </a:r>
             <a:r>
-              <a:rPr sz="1932" i="0" b="0">
+              <a:rPr sz="2100" i="0" b="0">
                 <a:solidFill>
                   <a:srgbClr val="5F6661"/>
                 </a:solidFill>
@@ -6273,7 +6273,7 @@
         </p:nvSpPr>
         <p:spPr>
           <a:xfrm>
-            <a:off x="9921240" y="5367460"/>
+            <a:off x="9921240" y="5532882"/>
             <a:ext cx="6858000" cy="7315"/>
           </a:xfrm>
           <a:prstGeom prst="rect">
@@ -6317,7 +6317,7 @@
         </p:nvSpPr>
         <p:spPr>
           <a:xfrm>
-            <a:off x="9921240" y="5554912"/>
+            <a:off x="9921240" y="5720334"/>
             <a:ext cx="365760" cy="274320"/>
           </a:xfrm>
           <a:prstGeom prst="rect">
@@ -6333,11 +6333,11 @@
           <a:p>
             <a:pPr algn="l">
               <a:lnSpc>
-                <a:spcPct val="140000"/>
-              </a:lnSpc>
-            </a:pPr>
-            <a:r>
-              <a:rPr sz="1584" i="0" b="0">
+                <a:spcPts val="2410"/>
+              </a:lnSpc>
+            </a:pPr>
+            <a:r>
+              <a:rPr sz="1722" i="0" b="0">
                 <a:solidFill>
                   <a:srgbClr val="AE8C4E"/>
                 </a:solidFill>
@@ -6356,8 +6356,8 @@
         </p:nvSpPr>
         <p:spPr>
           <a:xfrm>
-            <a:off x="10424160" y="5513764"/>
-            <a:ext cx="6355080" cy="955514"/>
+            <a:off x="10424160" y="5679186"/>
+            <a:ext cx="6355080" cy="848868"/>
           </a:xfrm>
           <a:prstGeom prst="rect">
             <a:avLst/>
@@ -6376,7 +6376,7 @@
               </a:lnSpc>
             </a:pPr>
             <a:r>
-              <a:rPr sz="1932" i="0" b="0">
+              <a:rPr sz="2100" i="0" b="0">
                 <a:solidFill>
                   <a:srgbClr val="2C322E"/>
                 </a:solidFill>
@@ -6385,7 +6385,7 @@
               <a:t>Sucessão</a:t>
             </a:r>
             <a:r>
-              <a:rPr sz="1932" i="0" b="0">
+              <a:rPr sz="2100" i="0" b="0">
                 <a:solidFill>
                   <a:srgbClr val="5F6661"/>
                 </a:solidFill>
@@ -6404,7 +6404,7 @@
         </p:nvSpPr>
         <p:spPr>
           <a:xfrm>
-            <a:off x="9921240" y="6707022"/>
+            <a:off x="9921240" y="6765798"/>
             <a:ext cx="6858000" cy="7315"/>
           </a:xfrm>
           <a:prstGeom prst="rect">
@@ -6448,7 +6448,7 @@
         </p:nvSpPr>
         <p:spPr>
           <a:xfrm>
-            <a:off x="9921240" y="6894474"/>
+            <a:off x="9921240" y="6953250"/>
             <a:ext cx="365760" cy="274320"/>
           </a:xfrm>
           <a:prstGeom prst="rect">
@@ -6464,11 +6464,11 @@
           <a:p>
             <a:pPr algn="l">
               <a:lnSpc>
-                <a:spcPct val="140000"/>
-              </a:lnSpc>
-            </a:pPr>
-            <a:r>
-              <a:rPr sz="1584" i="0" b="0">
+                <a:spcPts val="2410"/>
+              </a:lnSpc>
+            </a:pPr>
+            <a:r>
+              <a:rPr sz="1722" i="0" b="0">
                 <a:solidFill>
                   <a:srgbClr val="AE8C4E"/>
                 </a:solidFill>
@@ -6487,8 +6487,8 @@
         </p:nvSpPr>
         <p:spPr>
           <a:xfrm>
-            <a:off x="10424160" y="6853326"/>
-            <a:ext cx="6355080" cy="955514"/>
+            <a:off x="10424160" y="6912102"/>
+            <a:ext cx="6355080" cy="848868"/>
           </a:xfrm>
           <a:prstGeom prst="rect">
             <a:avLst/>
@@ -6507,7 +6507,7 @@
               </a:lnSpc>
             </a:pPr>
             <a:r>
-              <a:rPr sz="1932" i="0" b="0">
+              <a:rPr sz="2100" i="0" b="0">
                 <a:solidFill>
                   <a:srgbClr val="2C322E"/>
                 </a:solidFill>
@@ -6516,7 +6516,7 @@
               <a:t>Dignidade financeira</a:t>
             </a:r>
             <a:r>
-              <a:rPr sz="1932" i="0" b="0">
+              <a:rPr sz="2100" i="0" b="0">
                 <a:solidFill>
                   <a:srgbClr val="5F6661"/>
                 </a:solidFill>
@@ -6535,7 +6535,7 @@
         </p:nvSpPr>
         <p:spPr>
           <a:xfrm>
-            <a:off x="9921240" y="8046583"/>
+            <a:off x="9921240" y="7998714"/>
             <a:ext cx="6858000" cy="7315"/>
           </a:xfrm>
           <a:prstGeom prst="rect">
@@ -6579,7 +6579,7 @@
         </p:nvSpPr>
         <p:spPr>
           <a:xfrm>
-            <a:off x="9921240" y="8234035"/>
+            <a:off x="9921240" y="8186166"/>
             <a:ext cx="365760" cy="274320"/>
           </a:xfrm>
           <a:prstGeom prst="rect">
@@ -6595,11 +6595,11 @@
           <a:p>
             <a:pPr algn="l">
               <a:lnSpc>
-                <a:spcPct val="140000"/>
-              </a:lnSpc>
-            </a:pPr>
-            <a:r>
-              <a:rPr sz="1584" i="0" b="0">
+                <a:spcPts val="2410"/>
+              </a:lnSpc>
+            </a:pPr>
+            <a:r>
+              <a:rPr sz="1722" i="0" b="0">
                 <a:solidFill>
                   <a:srgbClr val="AE8C4E"/>
                 </a:solidFill>
@@ -6618,8 +6618,8 @@
         </p:nvSpPr>
         <p:spPr>
           <a:xfrm>
-            <a:off x="10424160" y="8192887"/>
-            <a:ext cx="6355080" cy="955514"/>
+            <a:off x="10424160" y="8145018"/>
+            <a:ext cx="6355080" cy="848868"/>
           </a:xfrm>
           <a:prstGeom prst="rect">
             <a:avLst/>
@@ -6638,7 +6638,7 @@
               </a:lnSpc>
             </a:pPr>
             <a:r>
-              <a:rPr sz="1932" i="0" b="0">
+              <a:rPr sz="2100" i="0" b="0">
                 <a:solidFill>
                   <a:srgbClr val="2C322E"/>
                 </a:solidFill>
@@ -6647,7 +6647,7 @@
               <a:t>Escolha e responsabilidade</a:t>
             </a:r>
             <a:r>
-              <a:rPr sz="1932" i="0" b="0">
+              <a:rPr sz="2100" i="0" b="0">
                 <a:solidFill>
                   <a:srgbClr val="5F6661"/>
                 </a:solidFill>
@@ -6666,7 +6666,7 @@
         </p:nvSpPr>
         <p:spPr>
           <a:xfrm>
-            <a:off x="9921240" y="9386145"/>
+            <a:off x="9921240" y="9231630"/>
             <a:ext cx="6858000" cy="7315"/>
           </a:xfrm>
           <a:prstGeom prst="rect">
@@ -6796,7 +6796,7 @@
           <a:p>
             <a:pPr algn="l">
               <a:lnSpc>
-                <a:spcPct val="140000"/>
+                <a:spcPts val="1609"/>
               </a:lnSpc>
             </a:pPr>
             <a:r>
@@ -6835,7 +6835,7 @@
           <a:p>
             <a:pPr algn="r">
               <a:lnSpc>
-                <a:spcPct val="140000"/>
+                <a:spcPts val="1609"/>
               </a:lnSpc>
             </a:pPr>
             <a:r>
@@ -6858,7 +6858,7 @@
         </p:nvSpPr>
         <p:spPr>
           <a:xfrm>
-            <a:off x="914400" y="2011096"/>
+            <a:off x="914400" y="2139175"/>
             <a:ext cx="6400800" cy="274320"/>
           </a:xfrm>
           <a:prstGeom prst="rect">
@@ -6874,7 +6874,7 @@
           <a:p>
             <a:pPr algn="l">
               <a:lnSpc>
-                <a:spcPct val="140000"/>
+                <a:spcPts val="1750"/>
               </a:lnSpc>
             </a:pPr>
             <a:r>
@@ -6897,7 +6897,7 @@
         </p:nvSpPr>
         <p:spPr>
           <a:xfrm>
-            <a:off x="914400" y="2486584"/>
+            <a:off x="914400" y="2614663"/>
             <a:ext cx="8412480" cy="913486"/>
           </a:xfrm>
           <a:prstGeom prst="rect">
@@ -6913,7 +6913,7 @@
           <a:p>
             <a:pPr algn="l">
               <a:lnSpc>
-                <a:spcPct val="116000"/>
+                <a:spcPts val="5220"/>
               </a:lnSpc>
             </a:pPr>
             <a:r>
@@ -6936,7 +6936,7 @@
         </p:nvSpPr>
         <p:spPr>
           <a:xfrm>
-            <a:off x="6534388" y="2963370"/>
+            <a:off x="6534388" y="3091449"/>
             <a:ext cx="10839212" cy="12802"/>
           </a:xfrm>
           <a:prstGeom prst="rect">
@@ -6980,7 +6980,7 @@
         </p:nvSpPr>
         <p:spPr>
           <a:xfrm>
-            <a:off x="914400" y="5092624"/>
+            <a:off x="914400" y="5220703"/>
             <a:ext cx="2838298" cy="726440"/>
           </a:xfrm>
           <a:prstGeom prst="rect">
@@ -6996,7 +6996,7 @@
           <a:p>
             <a:pPr algn="l">
               <a:lnSpc>
-                <a:spcPct val="140000"/>
+                <a:spcPts val="6159"/>
               </a:lnSpc>
             </a:pPr>
             <a:r>
@@ -7019,7 +7019,7 @@
         </p:nvSpPr>
         <p:spPr>
           <a:xfrm>
-            <a:off x="914400" y="5873928"/>
+            <a:off x="914400" y="6002007"/>
             <a:ext cx="2838298" cy="337820"/>
           </a:xfrm>
           <a:prstGeom prst="rect">
@@ -7035,7 +7035,7 @@
           <a:p>
             <a:pPr algn="l">
               <a:lnSpc>
-                <a:spcPct val="145000"/>
+                <a:spcPts val="2030"/>
               </a:lnSpc>
             </a:pPr>
             <a:r>
@@ -7058,7 +7058,7 @@
         </p:nvSpPr>
         <p:spPr>
           <a:xfrm>
-            <a:off x="914400" y="6303188"/>
+            <a:off x="914400" y="6431267"/>
             <a:ext cx="2838298" cy="10973"/>
           </a:xfrm>
           <a:prstGeom prst="rect">
@@ -7102,8 +7102,8 @@
         </p:nvSpPr>
         <p:spPr>
           <a:xfrm>
-            <a:off x="914400" y="6577508"/>
-            <a:ext cx="2838298" cy="937193"/>
+            <a:off x="914400" y="6705587"/>
+            <a:ext cx="2838298" cy="766420"/>
           </a:xfrm>
           <a:prstGeom prst="rect">
             <a:avLst/>
@@ -7141,7 +7141,7 @@
         </p:nvSpPr>
         <p:spPr>
           <a:xfrm>
-            <a:off x="4319626" y="5092624"/>
+            <a:off x="4319626" y="5220703"/>
             <a:ext cx="2838298" cy="726440"/>
           </a:xfrm>
           <a:prstGeom prst="rect">
@@ -7157,7 +7157,7 @@
           <a:p>
             <a:pPr algn="l">
               <a:lnSpc>
-                <a:spcPct val="140000"/>
+                <a:spcPts val="6159"/>
               </a:lnSpc>
             </a:pPr>
             <a:r>
@@ -7180,7 +7180,7 @@
         </p:nvSpPr>
         <p:spPr>
           <a:xfrm>
-            <a:off x="4319626" y="5873928"/>
+            <a:off x="4319626" y="6002007"/>
             <a:ext cx="2838298" cy="337820"/>
           </a:xfrm>
           <a:prstGeom prst="rect">
@@ -7196,7 +7196,7 @@
           <a:p>
             <a:pPr algn="l">
               <a:lnSpc>
-                <a:spcPct val="145000"/>
+                <a:spcPts val="2030"/>
               </a:lnSpc>
             </a:pPr>
             <a:r>
@@ -7219,7 +7219,7 @@
         </p:nvSpPr>
         <p:spPr>
           <a:xfrm>
-            <a:off x="4319626" y="6303188"/>
+            <a:off x="4319626" y="6431267"/>
             <a:ext cx="2838298" cy="10973"/>
           </a:xfrm>
           <a:prstGeom prst="rect">
@@ -7263,8 +7263,8 @@
         </p:nvSpPr>
         <p:spPr>
           <a:xfrm>
-            <a:off x="4319626" y="6577508"/>
-            <a:ext cx="2838298" cy="937193"/>
+            <a:off x="4319626" y="6705587"/>
+            <a:ext cx="2838298" cy="766420"/>
           </a:xfrm>
           <a:prstGeom prst="rect">
             <a:avLst/>
@@ -7302,7 +7302,7 @@
         </p:nvSpPr>
         <p:spPr>
           <a:xfrm>
-            <a:off x="7724851" y="5092624"/>
+            <a:off x="7724851" y="5220703"/>
             <a:ext cx="2838298" cy="726440"/>
           </a:xfrm>
           <a:prstGeom prst="rect">
@@ -7318,7 +7318,7 @@
           <a:p>
             <a:pPr algn="l">
               <a:lnSpc>
-                <a:spcPct val="140000"/>
+                <a:spcPts val="6159"/>
               </a:lnSpc>
             </a:pPr>
             <a:r>
@@ -7341,7 +7341,7 @@
         </p:nvSpPr>
         <p:spPr>
           <a:xfrm>
-            <a:off x="7724851" y="5873928"/>
+            <a:off x="7724851" y="6002007"/>
             <a:ext cx="2838298" cy="337820"/>
           </a:xfrm>
           <a:prstGeom prst="rect">
@@ -7357,7 +7357,7 @@
           <a:p>
             <a:pPr algn="l">
               <a:lnSpc>
-                <a:spcPct val="145000"/>
+                <a:spcPts val="2030"/>
               </a:lnSpc>
             </a:pPr>
             <a:r>
@@ -7380,7 +7380,7 @@
         </p:nvSpPr>
         <p:spPr>
           <a:xfrm>
-            <a:off x="7724851" y="6303188"/>
+            <a:off x="7724851" y="6431267"/>
             <a:ext cx="2838298" cy="10973"/>
           </a:xfrm>
           <a:prstGeom prst="rect">
@@ -7424,8 +7424,8 @@
         </p:nvSpPr>
         <p:spPr>
           <a:xfrm>
-            <a:off x="7724851" y="6577508"/>
-            <a:ext cx="2838298" cy="1378357"/>
+            <a:off x="7724851" y="6705587"/>
+            <a:ext cx="2838298" cy="1122197"/>
           </a:xfrm>
           <a:prstGeom prst="rect">
             <a:avLst/>
@@ -7463,7 +7463,7 @@
         </p:nvSpPr>
         <p:spPr>
           <a:xfrm>
-            <a:off x="11130077" y="5092624"/>
+            <a:off x="11130077" y="5220703"/>
             <a:ext cx="2838298" cy="726440"/>
           </a:xfrm>
           <a:prstGeom prst="rect">
@@ -7479,7 +7479,7 @@
           <a:p>
             <a:pPr algn="l">
               <a:lnSpc>
-                <a:spcPct val="140000"/>
+                <a:spcPts val="6159"/>
               </a:lnSpc>
             </a:pPr>
             <a:r>
@@ -7502,7 +7502,7 @@
         </p:nvSpPr>
         <p:spPr>
           <a:xfrm>
-            <a:off x="11130077" y="5873928"/>
+            <a:off x="11130077" y="6002007"/>
             <a:ext cx="2838298" cy="337820"/>
           </a:xfrm>
           <a:prstGeom prst="rect">
@@ -7518,7 +7518,7 @@
           <a:p>
             <a:pPr algn="l">
               <a:lnSpc>
-                <a:spcPct val="145000"/>
+                <a:spcPts val="2030"/>
               </a:lnSpc>
             </a:pPr>
             <a:r>
@@ -7541,7 +7541,7 @@
         </p:nvSpPr>
         <p:spPr>
           <a:xfrm>
-            <a:off x="11130077" y="6303188"/>
+            <a:off x="11130077" y="6431267"/>
             <a:ext cx="2838298" cy="10973"/>
           </a:xfrm>
           <a:prstGeom prst="rect">
@@ -7585,8 +7585,8 @@
         </p:nvSpPr>
         <p:spPr>
           <a:xfrm>
-            <a:off x="11130077" y="6577508"/>
-            <a:ext cx="2838298" cy="937193"/>
+            <a:off x="11130077" y="6705587"/>
+            <a:ext cx="2838298" cy="766420"/>
           </a:xfrm>
           <a:prstGeom prst="rect">
             <a:avLst/>
@@ -7624,7 +7624,7 @@
         </p:nvSpPr>
         <p:spPr>
           <a:xfrm>
-            <a:off x="14535302" y="5092624"/>
+            <a:off x="14535302" y="5220703"/>
             <a:ext cx="2838298" cy="726440"/>
           </a:xfrm>
           <a:prstGeom prst="rect">
@@ -7640,7 +7640,7 @@
           <a:p>
             <a:pPr algn="l">
               <a:lnSpc>
-                <a:spcPct val="140000"/>
+                <a:spcPts val="6159"/>
               </a:lnSpc>
             </a:pPr>
             <a:r>
@@ -7663,7 +7663,7 @@
         </p:nvSpPr>
         <p:spPr>
           <a:xfrm>
-            <a:off x="14535302" y="5873928"/>
+            <a:off x="14535302" y="6002007"/>
             <a:ext cx="2838298" cy="337820"/>
           </a:xfrm>
           <a:prstGeom prst="rect">
@@ -7679,7 +7679,7 @@
           <a:p>
             <a:pPr algn="l">
               <a:lnSpc>
-                <a:spcPct val="145000"/>
+                <a:spcPts val="2030"/>
               </a:lnSpc>
             </a:pPr>
             <a:r>
@@ -7702,7 +7702,7 @@
         </p:nvSpPr>
         <p:spPr>
           <a:xfrm>
-            <a:off x="14535302" y="6303188"/>
+            <a:off x="14535302" y="6431267"/>
             <a:ext cx="2838298" cy="10973"/>
           </a:xfrm>
           <a:prstGeom prst="rect">
@@ -7746,8 +7746,8 @@
         </p:nvSpPr>
         <p:spPr>
           <a:xfrm>
-            <a:off x="14535302" y="6577508"/>
-            <a:ext cx="2838298" cy="937193"/>
+            <a:off x="14535302" y="6705587"/>
+            <a:ext cx="2838298" cy="766420"/>
           </a:xfrm>
           <a:prstGeom prst="rect">
             <a:avLst/>
@@ -7949,7 +7949,7 @@
           <a:p>
             <a:pPr algn="l">
               <a:lnSpc>
-                <a:spcPct val="140000"/>
+                <a:spcPts val="1609"/>
               </a:lnSpc>
             </a:pPr>
             <a:r>
@@ -7988,7 +7988,7 @@
           <a:p>
             <a:pPr algn="r">
               <a:lnSpc>
-                <a:spcPct val="140000"/>
+                <a:spcPts val="1609"/>
               </a:lnSpc>
             </a:pPr>
             <a:r>
@@ -8027,7 +8027,7 @@
           <a:p>
             <a:pPr algn="l">
               <a:lnSpc>
-                <a:spcPct val="140000"/>
+                <a:spcPts val="8119"/>
               </a:lnSpc>
             </a:pPr>
             <a:r>
@@ -8066,7 +8066,7 @@
           <a:p>
             <a:pPr algn="l">
               <a:lnSpc>
-                <a:spcPct val="105000"/>
+                <a:spcPts val="7350"/>
               </a:lnSpc>
             </a:pPr>
             <a:r>
@@ -8149,7 +8149,7 @@
           <a:p>
             <a:pPr algn="l">
               <a:lnSpc>
-                <a:spcPct val="140000"/>
+                <a:spcPts val="1750"/>
               </a:lnSpc>
             </a:pPr>
             <a:r>
@@ -8258,7 +8258,7 @@
           <a:p>
             <a:pPr algn="l">
               <a:lnSpc>
-                <a:spcPct val="140000"/>
+                <a:spcPts val="1609"/>
               </a:lnSpc>
             </a:pPr>
             <a:r>
@@ -8297,7 +8297,7 @@
           <a:p>
             <a:pPr algn="r">
               <a:lnSpc>
-                <a:spcPct val="140000"/>
+                <a:spcPts val="1609"/>
               </a:lnSpc>
             </a:pPr>
             <a:r>
@@ -8320,7 +8320,7 @@
         </p:nvSpPr>
         <p:spPr>
           <a:xfrm>
-            <a:off x="914400" y="1905173"/>
+            <a:off x="914400" y="2036965"/>
             <a:ext cx="6400800" cy="274320"/>
           </a:xfrm>
           <a:prstGeom prst="rect">
@@ -8336,7 +8336,7 @@
           <a:p>
             <a:pPr algn="l">
               <a:lnSpc>
-                <a:spcPct val="140000"/>
+                <a:spcPts val="1750"/>
               </a:lnSpc>
             </a:pPr>
             <a:r>
@@ -8359,7 +8359,7 @@
         </p:nvSpPr>
         <p:spPr>
           <a:xfrm>
-            <a:off x="914400" y="2380661"/>
+            <a:off x="914400" y="2512453"/>
             <a:ext cx="8412480" cy="913486"/>
           </a:xfrm>
           <a:prstGeom prst="rect">
@@ -8375,7 +8375,7 @@
           <a:p>
             <a:pPr algn="l">
               <a:lnSpc>
-                <a:spcPct val="116000"/>
+                <a:spcPts val="5220"/>
               </a:lnSpc>
             </a:pPr>
             <a:r>
@@ -8398,7 +8398,7 @@
         </p:nvSpPr>
         <p:spPr>
           <a:xfrm>
-            <a:off x="8004263" y="2857447"/>
+            <a:off x="8004263" y="2989239"/>
             <a:ext cx="9369337" cy="12802"/>
           </a:xfrm>
           <a:prstGeom prst="rect">
@@ -8442,7 +8442,7 @@
         </p:nvSpPr>
         <p:spPr>
           <a:xfrm>
-            <a:off x="914400" y="4712381"/>
+            <a:off x="914400" y="4844173"/>
             <a:ext cx="5059680" cy="274320"/>
           </a:xfrm>
           <a:prstGeom prst="rect">
@@ -8458,7 +8458,7 @@
           <a:p>
             <a:pPr algn="l">
               <a:lnSpc>
-                <a:spcPct val="140000"/>
+                <a:spcPts val="1750"/>
               </a:lnSpc>
             </a:pPr>
             <a:r>
@@ -8481,7 +8481,7 @@
         </p:nvSpPr>
         <p:spPr>
           <a:xfrm>
-            <a:off x="914400" y="5078141"/>
+            <a:off x="914400" y="5209933"/>
             <a:ext cx="5059680" cy="570230"/>
           </a:xfrm>
           <a:prstGeom prst="rect">
@@ -8520,7 +8520,7 @@
         </p:nvSpPr>
         <p:spPr>
           <a:xfrm>
-            <a:off x="914400" y="5630083"/>
+            <a:off x="914400" y="5761875"/>
             <a:ext cx="5059680" cy="10973"/>
           </a:xfrm>
           <a:prstGeom prst="rect">
@@ -8564,8 +8564,8 @@
         </p:nvSpPr>
         <p:spPr>
           <a:xfrm>
-            <a:off x="914400" y="5886115"/>
-            <a:ext cx="5059680" cy="937193"/>
+            <a:off x="914400" y="6017907"/>
+            <a:ext cx="5059680" cy="766420"/>
           </a:xfrm>
           <a:prstGeom prst="rect">
             <a:avLst/>
@@ -8603,7 +8603,7 @@
         </p:nvSpPr>
         <p:spPr>
           <a:xfrm>
-            <a:off x="6614160" y="4712381"/>
+            <a:off x="6614160" y="4844173"/>
             <a:ext cx="5059680" cy="274320"/>
           </a:xfrm>
           <a:prstGeom prst="rect">
@@ -8619,7 +8619,7 @@
           <a:p>
             <a:pPr algn="l">
               <a:lnSpc>
-                <a:spcPct val="140000"/>
+                <a:spcPts val="1750"/>
               </a:lnSpc>
             </a:pPr>
             <a:r>
@@ -8642,7 +8642,7 @@
         </p:nvSpPr>
         <p:spPr>
           <a:xfrm>
-            <a:off x="6614160" y="5078141"/>
+            <a:off x="6614160" y="5209933"/>
             <a:ext cx="5059680" cy="570230"/>
           </a:xfrm>
           <a:prstGeom prst="rect">
@@ -8681,7 +8681,7 @@
         </p:nvSpPr>
         <p:spPr>
           <a:xfrm>
-            <a:off x="6614160" y="5630083"/>
+            <a:off x="6614160" y="5761875"/>
             <a:ext cx="5059680" cy="10973"/>
           </a:xfrm>
           <a:prstGeom prst="rect">
@@ -8725,8 +8725,8 @@
         </p:nvSpPr>
         <p:spPr>
           <a:xfrm>
-            <a:off x="6614160" y="5886115"/>
-            <a:ext cx="5059680" cy="937193"/>
+            <a:off x="6614160" y="6017907"/>
+            <a:ext cx="5059680" cy="766420"/>
           </a:xfrm>
           <a:prstGeom prst="rect">
             <a:avLst/>
@@ -8764,7 +8764,7 @@
         </p:nvSpPr>
         <p:spPr>
           <a:xfrm>
-            <a:off x="12313920" y="4712381"/>
+            <a:off x="12313920" y="4844173"/>
             <a:ext cx="5059680" cy="274320"/>
           </a:xfrm>
           <a:prstGeom prst="rect">
@@ -8780,7 +8780,7 @@
           <a:p>
             <a:pPr algn="l">
               <a:lnSpc>
-                <a:spcPct val="140000"/>
+                <a:spcPts val="1750"/>
               </a:lnSpc>
             </a:pPr>
             <a:r>
@@ -8803,7 +8803,7 @@
         </p:nvSpPr>
         <p:spPr>
           <a:xfrm>
-            <a:off x="12313920" y="5078141"/>
+            <a:off x="12313920" y="5209933"/>
             <a:ext cx="5059680" cy="570230"/>
           </a:xfrm>
           <a:prstGeom prst="rect">
@@ -8842,7 +8842,7 @@
         </p:nvSpPr>
         <p:spPr>
           <a:xfrm>
-            <a:off x="12313920" y="5630083"/>
+            <a:off x="12313920" y="5761875"/>
             <a:ext cx="5059680" cy="10973"/>
           </a:xfrm>
           <a:prstGeom prst="rect">
@@ -8886,8 +8886,8 @@
         </p:nvSpPr>
         <p:spPr>
           <a:xfrm>
-            <a:off x="12313920" y="5886115"/>
-            <a:ext cx="5059680" cy="937193"/>
+            <a:off x="12313920" y="6017907"/>
+            <a:ext cx="5059680" cy="766420"/>
           </a:xfrm>
           <a:prstGeom prst="rect">
             <a:avLst/>
@@ -8925,8 +8925,8 @@
         </p:nvSpPr>
         <p:spPr>
           <a:xfrm>
-            <a:off x="914400" y="7527396"/>
-            <a:ext cx="12179808" cy="534391"/>
+            <a:off x="914400" y="7488415"/>
+            <a:ext cx="12179808" cy="441579"/>
           </a:xfrm>
           <a:prstGeom prst="rect">
             <a:avLst/>
@@ -9059,7 +9059,7 @@
           <a:p>
             <a:pPr algn="l">
               <a:lnSpc>
-                <a:spcPct val="140000"/>
+                <a:spcPts val="1609"/>
               </a:lnSpc>
             </a:pPr>
             <a:r>
@@ -9098,7 +9098,7 @@
           <a:p>
             <a:pPr algn="r">
               <a:lnSpc>
-                <a:spcPct val="140000"/>
+                <a:spcPts val="1609"/>
               </a:lnSpc>
             </a:pPr>
             <a:r>
@@ -9137,7 +9137,7 @@
           <a:p>
             <a:pPr algn="l">
               <a:lnSpc>
-                <a:spcPct val="140000"/>
+                <a:spcPts val="1750"/>
               </a:lnSpc>
             </a:pPr>
             <a:r>
@@ -9176,7 +9176,7 @@
           <a:p>
             <a:pPr algn="l">
               <a:lnSpc>
-                <a:spcPct val="116000"/>
+                <a:spcPts val="5220"/>
               </a:lnSpc>
             </a:pPr>
             <a:r>
@@ -9192,7 +9192,7 @@
           <a:p>
             <a:pPr algn="l">
               <a:lnSpc>
-                <a:spcPct val="116000"/>
+                <a:spcPts val="5220"/>
               </a:lnSpc>
             </a:pPr>
             <a:r>
@@ -9260,7 +9260,7 @@
         <p:spPr>
           <a:xfrm>
             <a:off x="914400" y="3994099"/>
-            <a:ext cx="6400800" cy="1013917"/>
+            <a:ext cx="6400800" cy="828294"/>
           </a:xfrm>
           <a:prstGeom prst="rect">
             <a:avLst/>
@@ -9298,8 +9298,8 @@
         </p:nvSpPr>
         <p:spPr>
           <a:xfrm>
-            <a:off x="914400" y="5264048"/>
-            <a:ext cx="6400800" cy="534391"/>
+            <a:off x="914400" y="5078425"/>
+            <a:ext cx="6400800" cy="441579"/>
           </a:xfrm>
           <a:prstGeom prst="rect">
             <a:avLst/>
@@ -9397,7 +9397,7 @@
           <a:p>
             <a:pPr algn="l">
               <a:lnSpc>
-                <a:spcPct val="140000"/>
+                <a:spcPts val="1750"/>
               </a:lnSpc>
             </a:pPr>
             <a:r>
@@ -9421,7 +9421,7 @@
         <p:spPr>
           <a:xfrm>
             <a:off x="9921240" y="2340864"/>
-            <a:ext cx="6858000" cy="537565"/>
+            <a:ext cx="6858000" cy="451218"/>
           </a:xfrm>
           <a:prstGeom prst="rect">
             <a:avLst/>
@@ -9459,7 +9459,7 @@
         </p:nvSpPr>
         <p:spPr>
           <a:xfrm>
-            <a:off x="9921240" y="3061309"/>
+            <a:off x="9921240" y="2974962"/>
             <a:ext cx="6858000" cy="274320"/>
           </a:xfrm>
           <a:prstGeom prst="rect">
@@ -9475,7 +9475,7 @@
           <a:p>
             <a:pPr algn="l">
               <a:lnSpc>
-                <a:spcPct val="140000"/>
+                <a:spcPts val="1750"/>
               </a:lnSpc>
             </a:pPr>
             <a:r>
@@ -9498,8 +9498,8 @@
         </p:nvSpPr>
         <p:spPr>
           <a:xfrm>
-            <a:off x="9921240" y="3372205"/>
-            <a:ext cx="6858000" cy="537565"/>
+            <a:off x="9921240" y="3285858"/>
+            <a:ext cx="6858000" cy="451218"/>
           </a:xfrm>
           <a:prstGeom prst="rect">
             <a:avLst/>
@@ -9537,7 +9537,7 @@
         </p:nvSpPr>
         <p:spPr>
           <a:xfrm>
-            <a:off x="9921240" y="4184090"/>
+            <a:off x="9921240" y="4011397"/>
             <a:ext cx="6858000" cy="7315"/>
           </a:xfrm>
           <a:prstGeom prst="rect">
@@ -9581,7 +9581,7 @@
         </p:nvSpPr>
         <p:spPr>
           <a:xfrm>
-            <a:off x="9921240" y="4366970"/>
+            <a:off x="9921240" y="4194277"/>
             <a:ext cx="6858000" cy="274320"/>
           </a:xfrm>
           <a:prstGeom prst="rect">
@@ -9597,7 +9597,7 @@
           <a:p>
             <a:pPr algn="l">
               <a:lnSpc>
-                <a:spcPct val="140000"/>
+                <a:spcPts val="1750"/>
               </a:lnSpc>
             </a:pPr>
             <a:r>
@@ -9620,8 +9620,8 @@
         </p:nvSpPr>
         <p:spPr>
           <a:xfrm>
-            <a:off x="9921240" y="4677866"/>
-            <a:ext cx="6858000" cy="537565"/>
+            <a:off x="9921240" y="4505173"/>
+            <a:ext cx="6858000" cy="451218"/>
           </a:xfrm>
           <a:prstGeom prst="rect">
             <a:avLst/>
@@ -9659,7 +9659,7 @@
         </p:nvSpPr>
         <p:spPr>
           <a:xfrm>
-            <a:off x="9921240" y="5398311"/>
+            <a:off x="9921240" y="5139271"/>
             <a:ext cx="6858000" cy="274320"/>
           </a:xfrm>
           <a:prstGeom prst="rect">
@@ -9675,7 +9675,7 @@
           <a:p>
             <a:pPr algn="l">
               <a:lnSpc>
-                <a:spcPct val="140000"/>
+                <a:spcPts val="1750"/>
               </a:lnSpc>
             </a:pPr>
             <a:r>
@@ -9698,8 +9698,8 @@
         </p:nvSpPr>
         <p:spPr>
           <a:xfrm>
-            <a:off x="9921240" y="5709207"/>
-            <a:ext cx="6858000" cy="983690"/>
+            <a:off x="9921240" y="5450167"/>
+            <a:ext cx="6858000" cy="810997"/>
           </a:xfrm>
           <a:prstGeom prst="rect">
             <a:avLst/>
@@ -9737,7 +9737,7 @@
         </p:nvSpPr>
         <p:spPr>
           <a:xfrm>
-            <a:off x="9921240" y="6967217"/>
+            <a:off x="9921240" y="6535484"/>
             <a:ext cx="6858000" cy="7315"/>
           </a:xfrm>
           <a:prstGeom prst="rect">
@@ -9781,7 +9781,7 @@
         </p:nvSpPr>
         <p:spPr>
           <a:xfrm>
-            <a:off x="9921240" y="7150097"/>
+            <a:off x="9921240" y="6718364"/>
             <a:ext cx="6858000" cy="274320"/>
           </a:xfrm>
           <a:prstGeom prst="rect">
@@ -9797,7 +9797,7 @@
           <a:p>
             <a:pPr algn="l">
               <a:lnSpc>
-                <a:spcPct val="140000"/>
+                <a:spcPts val="1750"/>
               </a:lnSpc>
             </a:pPr>
             <a:r>
@@ -9820,8 +9820,8 @@
         </p:nvSpPr>
         <p:spPr>
           <a:xfrm>
-            <a:off x="9921240" y="7460993"/>
-            <a:ext cx="6858000" cy="537565"/>
+            <a:off x="9921240" y="7029260"/>
+            <a:ext cx="6858000" cy="451218"/>
           </a:xfrm>
           <a:prstGeom prst="rect">
             <a:avLst/>
@@ -9859,7 +9859,7 @@
         </p:nvSpPr>
         <p:spPr>
           <a:xfrm>
-            <a:off x="9921240" y="8181439"/>
+            <a:off x="9921240" y="7663358"/>
             <a:ext cx="6858000" cy="274320"/>
           </a:xfrm>
           <a:prstGeom prst="rect">
@@ -9875,7 +9875,7 @@
           <a:p>
             <a:pPr algn="l">
               <a:lnSpc>
-                <a:spcPct val="140000"/>
+                <a:spcPts val="1750"/>
               </a:lnSpc>
             </a:pPr>
             <a:r>
@@ -9898,8 +9898,8 @@
         </p:nvSpPr>
         <p:spPr>
           <a:xfrm>
-            <a:off x="9921240" y="8492335"/>
-            <a:ext cx="6858000" cy="983690"/>
+            <a:off x="9921240" y="7974254"/>
+            <a:ext cx="6858000" cy="810997"/>
           </a:xfrm>
           <a:prstGeom prst="rect">
             <a:avLst/>
@@ -10023,7 +10023,7 @@
           <a:p>
             <a:pPr algn="l">
               <a:lnSpc>
-                <a:spcPct val="140000"/>
+                <a:spcPts val="1609"/>
               </a:lnSpc>
             </a:pPr>
             <a:r>
@@ -10062,7 +10062,7 @@
           <a:p>
             <a:pPr algn="r">
               <a:lnSpc>
-                <a:spcPct val="140000"/>
+                <a:spcPts val="1609"/>
               </a:lnSpc>
             </a:pPr>
             <a:r>
@@ -10085,7 +10085,7 @@
         </p:nvSpPr>
         <p:spPr>
           <a:xfrm>
-            <a:off x="914400" y="1463040"/>
+            <a:off x="914400" y="1665720"/>
             <a:ext cx="6400800" cy="274320"/>
           </a:xfrm>
           <a:prstGeom prst="rect">
@@ -10101,7 +10101,7 @@
           <a:p>
             <a:pPr algn="l">
               <a:lnSpc>
-                <a:spcPct val="140000"/>
+                <a:spcPts val="1750"/>
               </a:lnSpc>
             </a:pPr>
             <a:r>
@@ -10124,7 +10124,7 @@
         </p:nvSpPr>
         <p:spPr>
           <a:xfrm>
-            <a:off x="914400" y="1938528"/>
+            <a:off x="914400" y="2141208"/>
             <a:ext cx="8412480" cy="913486"/>
           </a:xfrm>
           <a:prstGeom prst="rect">
@@ -10140,7 +10140,7 @@
           <a:p>
             <a:pPr algn="l">
               <a:lnSpc>
-                <a:spcPct val="116000"/>
+                <a:spcPts val="5220"/>
               </a:lnSpc>
             </a:pPr>
             <a:r>
@@ -10163,7 +10163,7 @@
         </p:nvSpPr>
         <p:spPr>
           <a:xfrm>
-            <a:off x="8253313" y="2415314"/>
+            <a:off x="8253313" y="2617994"/>
             <a:ext cx="9120287" cy="12802"/>
           </a:xfrm>
           <a:prstGeom prst="rect">
@@ -10207,7 +10207,7 @@
         </p:nvSpPr>
         <p:spPr>
           <a:xfrm>
-            <a:off x="914400" y="4270248"/>
+            <a:off x="914400" y="4472928"/>
             <a:ext cx="5059680" cy="274320"/>
           </a:xfrm>
           <a:prstGeom prst="rect">
@@ -10223,7 +10223,7 @@
           <a:p>
             <a:pPr algn="l">
               <a:lnSpc>
-                <a:spcPct val="140000"/>
+                <a:spcPts val="1750"/>
               </a:lnSpc>
             </a:pPr>
             <a:r>
@@ -10246,7 +10246,7 @@
         </p:nvSpPr>
         <p:spPr>
           <a:xfrm>
-            <a:off x="914400" y="4636008"/>
+            <a:off x="914400" y="4838688"/>
             <a:ext cx="5059680" cy="570230"/>
           </a:xfrm>
           <a:prstGeom prst="rect">
@@ -10285,7 +10285,7 @@
         </p:nvSpPr>
         <p:spPr>
           <a:xfrm>
-            <a:off x="914400" y="5187950"/>
+            <a:off x="914400" y="5390630"/>
             <a:ext cx="5059680" cy="10973"/>
           </a:xfrm>
           <a:prstGeom prst="rect">
@@ -10329,8 +10329,8 @@
         </p:nvSpPr>
         <p:spPr>
           <a:xfrm>
-            <a:off x="914400" y="5443982"/>
-            <a:ext cx="5059680" cy="1378357"/>
+            <a:off x="914400" y="5646662"/>
+            <a:ext cx="5059680" cy="1122197"/>
           </a:xfrm>
           <a:prstGeom prst="rect">
             <a:avLst/>
@@ -10368,7 +10368,7 @@
         </p:nvSpPr>
         <p:spPr>
           <a:xfrm>
-            <a:off x="6614160" y="4270248"/>
+            <a:off x="6614160" y="4472928"/>
             <a:ext cx="5059680" cy="274320"/>
           </a:xfrm>
           <a:prstGeom prst="rect">
@@ -10384,7 +10384,7 @@
           <a:p>
             <a:pPr algn="l">
               <a:lnSpc>
-                <a:spcPct val="140000"/>
+                <a:spcPts val="1750"/>
               </a:lnSpc>
             </a:pPr>
             <a:r>
@@ -10407,7 +10407,7 @@
         </p:nvSpPr>
         <p:spPr>
           <a:xfrm>
-            <a:off x="6614160" y="4636008"/>
+            <a:off x="6614160" y="4838688"/>
             <a:ext cx="5059680" cy="570230"/>
           </a:xfrm>
           <a:prstGeom prst="rect">
@@ -10446,7 +10446,7 @@
         </p:nvSpPr>
         <p:spPr>
           <a:xfrm>
-            <a:off x="6614160" y="5187950"/>
+            <a:off x="6614160" y="5390630"/>
             <a:ext cx="5059680" cy="10973"/>
           </a:xfrm>
           <a:prstGeom prst="rect">
@@ -10490,8 +10490,8 @@
         </p:nvSpPr>
         <p:spPr>
           <a:xfrm>
-            <a:off x="6614160" y="5443982"/>
-            <a:ext cx="5059680" cy="1378357"/>
+            <a:off x="6614160" y="5646662"/>
+            <a:ext cx="5059680" cy="1122197"/>
           </a:xfrm>
           <a:prstGeom prst="rect">
             <a:avLst/>
@@ -10529,7 +10529,7 @@
         </p:nvSpPr>
         <p:spPr>
           <a:xfrm>
-            <a:off x="12313920" y="4270248"/>
+            <a:off x="12313920" y="4472928"/>
             <a:ext cx="5059680" cy="274320"/>
           </a:xfrm>
           <a:prstGeom prst="rect">
@@ -10545,7 +10545,7 @@
           <a:p>
             <a:pPr algn="l">
               <a:lnSpc>
-                <a:spcPct val="140000"/>
+                <a:spcPts val="1750"/>
               </a:lnSpc>
             </a:pPr>
             <a:r>
@@ -10568,7 +10568,7 @@
         </p:nvSpPr>
         <p:spPr>
           <a:xfrm>
-            <a:off x="12313920" y="4636008"/>
+            <a:off x="12313920" y="4838688"/>
             <a:ext cx="5059680" cy="570230"/>
           </a:xfrm>
           <a:prstGeom prst="rect">
@@ -10607,7 +10607,7 @@
         </p:nvSpPr>
         <p:spPr>
           <a:xfrm>
-            <a:off x="12313920" y="5187950"/>
+            <a:off x="12313920" y="5390630"/>
             <a:ext cx="5059680" cy="10973"/>
           </a:xfrm>
           <a:prstGeom prst="rect">
@@ -10651,8 +10651,8 @@
         </p:nvSpPr>
         <p:spPr>
           <a:xfrm>
-            <a:off x="12313920" y="5443982"/>
-            <a:ext cx="5059680" cy="1378357"/>
+            <a:off x="12313920" y="5646662"/>
+            <a:ext cx="5059680" cy="1122197"/>
           </a:xfrm>
           <a:prstGeom prst="rect">
             <a:avLst/>
@@ -10699,8 +10699,8 @@
         </p:nvSpPr>
         <p:spPr>
           <a:xfrm>
-            <a:off x="914400" y="7526427"/>
-            <a:ext cx="12179808" cy="1013917"/>
+            <a:off x="914400" y="7472947"/>
+            <a:ext cx="12179808" cy="828294"/>
           </a:xfrm>
           <a:prstGeom prst="rect">
             <a:avLst/>
@@ -10911,7 +10911,7 @@
           <a:p>
             <a:pPr algn="l">
               <a:lnSpc>
-                <a:spcPct val="140000"/>
+                <a:spcPts val="1609"/>
               </a:lnSpc>
             </a:pPr>
             <a:r>
@@ -10950,7 +10950,7 @@
           <a:p>
             <a:pPr algn="r">
               <a:lnSpc>
-                <a:spcPct val="140000"/>
+                <a:spcPts val="1609"/>
               </a:lnSpc>
             </a:pPr>
             <a:r>
@@ -10989,7 +10989,7 @@
           <a:p>
             <a:pPr algn="l">
               <a:lnSpc>
-                <a:spcPct val="140000"/>
+                <a:spcPts val="8119"/>
               </a:lnSpc>
             </a:pPr>
             <a:r>
@@ -11028,7 +11028,7 @@
           <a:p>
             <a:pPr algn="l">
               <a:lnSpc>
-                <a:spcPct val="105000"/>
+                <a:spcPts val="7350"/>
               </a:lnSpc>
             </a:pPr>
             <a:r>
@@ -11044,7 +11044,7 @@
           <a:p>
             <a:pPr algn="l">
               <a:lnSpc>
-                <a:spcPct val="105000"/>
+                <a:spcPts val="7350"/>
               </a:lnSpc>
             </a:pPr>
             <a:r>
@@ -11127,7 +11127,7 @@
           <a:p>
             <a:pPr algn="l">
               <a:lnSpc>
-                <a:spcPct val="140000"/>
+                <a:spcPts val="1750"/>
               </a:lnSpc>
             </a:pPr>
             <a:r>
@@ -11236,7 +11236,7 @@
           <a:p>
             <a:pPr algn="l">
               <a:lnSpc>
-                <a:spcPct val="140000"/>
+                <a:spcPts val="1609"/>
               </a:lnSpc>
             </a:pPr>
             <a:r>
@@ -11275,7 +11275,7 @@
           <a:p>
             <a:pPr algn="r">
               <a:lnSpc>
-                <a:spcPct val="140000"/>
+                <a:spcPts val="1609"/>
               </a:lnSpc>
             </a:pPr>
             <a:r>
@@ -11298,7 +11298,7 @@
         </p:nvSpPr>
         <p:spPr>
           <a:xfrm>
-            <a:off x="914400" y="2180958"/>
+            <a:off x="914400" y="2598610"/>
             <a:ext cx="6400800" cy="274320"/>
           </a:xfrm>
           <a:prstGeom prst="rect">
@@ -11314,7 +11314,7 @@
           <a:p>
             <a:pPr algn="l">
               <a:lnSpc>
-                <a:spcPct val="140000"/>
+                <a:spcPts val="1750"/>
               </a:lnSpc>
             </a:pPr>
             <a:r>
@@ -11337,7 +11337,7 @@
         </p:nvSpPr>
         <p:spPr>
           <a:xfrm>
-            <a:off x="914400" y="2656446"/>
+            <a:off x="914400" y="3074098"/>
             <a:ext cx="8412480" cy="1735531"/>
           </a:xfrm>
           <a:prstGeom prst="rect">
@@ -11353,7 +11353,7 @@
           <a:p>
             <a:pPr algn="l">
               <a:lnSpc>
-                <a:spcPct val="116000"/>
+                <a:spcPts val="5220"/>
               </a:lnSpc>
             </a:pPr>
             <a:r>
@@ -11369,7 +11369,7 @@
           <a:p>
             <a:pPr algn="l">
               <a:lnSpc>
-                <a:spcPct val="116000"/>
+                <a:spcPts val="5220"/>
               </a:lnSpc>
             </a:pPr>
             <a:r>
@@ -11392,7 +11392,7 @@
         </p:nvSpPr>
         <p:spPr>
           <a:xfrm>
-            <a:off x="6729984" y="3955278"/>
+            <a:off x="6729984" y="4372930"/>
             <a:ext cx="1408176" cy="12802"/>
           </a:xfrm>
           <a:prstGeom prst="rect">
@@ -11436,8 +11436,8 @@
         </p:nvSpPr>
         <p:spPr>
           <a:xfrm>
-            <a:off x="9921240" y="2793606"/>
-            <a:ext cx="6858000" cy="1493444"/>
+            <a:off x="9921240" y="3211258"/>
+            <a:ext cx="6858000" cy="1215009"/>
           </a:xfrm>
           <a:prstGeom prst="rect">
             <a:avLst/>
@@ -11493,8 +11493,8 @@
         </p:nvSpPr>
         <p:spPr>
           <a:xfrm>
-            <a:off x="9921240" y="4543082"/>
-            <a:ext cx="6858000" cy="1493444"/>
+            <a:off x="9921240" y="4682299"/>
+            <a:ext cx="6858000" cy="1215009"/>
           </a:xfrm>
           <a:prstGeom prst="rect">
             <a:avLst/>
@@ -11550,8 +11550,8 @@
         </p:nvSpPr>
         <p:spPr>
           <a:xfrm>
-            <a:off x="9921240" y="6292558"/>
-            <a:ext cx="6858000" cy="1493444"/>
+            <a:off x="9921240" y="6153340"/>
+            <a:ext cx="6858000" cy="1215009"/>
           </a:xfrm>
           <a:prstGeom prst="rect">
             <a:avLst/>
@@ -11684,7 +11684,7 @@
           <a:p>
             <a:pPr algn="l">
               <a:lnSpc>
-                <a:spcPct val="140000"/>
+                <a:spcPts val="1609"/>
               </a:lnSpc>
             </a:pPr>
             <a:r>
@@ -11723,7 +11723,7 @@
           <a:p>
             <a:pPr algn="r">
               <a:lnSpc>
-                <a:spcPct val="140000"/>
+                <a:spcPts val="1609"/>
               </a:lnSpc>
             </a:pPr>
             <a:r>
@@ -11746,7 +11746,7 @@
         </p:nvSpPr>
         <p:spPr>
           <a:xfrm>
-            <a:off x="914400" y="1570901"/>
+            <a:off x="914400" y="1643824"/>
             <a:ext cx="6400800" cy="274320"/>
           </a:xfrm>
           <a:prstGeom prst="rect">
@@ -11762,7 +11762,7 @@
           <a:p>
             <a:pPr algn="l">
               <a:lnSpc>
-                <a:spcPct val="140000"/>
+                <a:spcPts val="1750"/>
               </a:lnSpc>
             </a:pPr>
             <a:r>
@@ -11785,7 +11785,7 @@
         </p:nvSpPr>
         <p:spPr>
           <a:xfrm>
-            <a:off x="914400" y="2046389"/>
+            <a:off x="914400" y="2119312"/>
             <a:ext cx="8412480" cy="913486"/>
           </a:xfrm>
           <a:prstGeom prst="rect">
@@ -11801,7 +11801,7 @@
           <a:p>
             <a:pPr algn="l">
               <a:lnSpc>
-                <a:spcPct val="116000"/>
+                <a:spcPts val="5220"/>
               </a:lnSpc>
             </a:pPr>
             <a:r>
@@ -11824,7 +11824,7 @@
         </p:nvSpPr>
         <p:spPr>
           <a:xfrm>
-            <a:off x="7961290" y="2523175"/>
+            <a:off x="7961290" y="2596098"/>
             <a:ext cx="9412310" cy="12802"/>
           </a:xfrm>
           <a:prstGeom prst="rect">
@@ -11868,7 +11868,7 @@
         </p:nvSpPr>
         <p:spPr>
           <a:xfrm>
-            <a:off x="914400" y="4286669"/>
+            <a:off x="914400" y="4359592"/>
             <a:ext cx="3703320" cy="2697480"/>
           </a:xfrm>
           <a:prstGeom prst="rect">
@@ -11936,7 +11936,7 @@
         </p:nvSpPr>
         <p:spPr>
           <a:xfrm>
-            <a:off x="914400" y="7240181"/>
+            <a:off x="914400" y="7313104"/>
             <a:ext cx="3703320" cy="310896"/>
           </a:xfrm>
           <a:prstGeom prst="rect">
@@ -11952,7 +11952,7 @@
           <a:p>
             <a:pPr algn="l">
               <a:lnSpc>
-                <a:spcPct val="140000"/>
+                <a:spcPts val="1925"/>
               </a:lnSpc>
             </a:pPr>
             <a:r>
@@ -11975,8 +11975,8 @@
         </p:nvSpPr>
         <p:spPr>
           <a:xfrm>
-            <a:off x="914400" y="7587653"/>
-            <a:ext cx="3703320" cy="808406"/>
+            <a:off x="914400" y="7660576"/>
+            <a:ext cx="3703320" cy="662559"/>
           </a:xfrm>
           <a:prstGeom prst="rect">
             <a:avLst/>
@@ -12014,7 +12014,7 @@
         </p:nvSpPr>
         <p:spPr>
           <a:xfrm>
-            <a:off x="5166360" y="4286669"/>
+            <a:off x="5166360" y="4359592"/>
             <a:ext cx="3703320" cy="2697480"/>
           </a:xfrm>
           <a:prstGeom prst="rect">
@@ -12082,7 +12082,7 @@
         </p:nvSpPr>
         <p:spPr>
           <a:xfrm>
-            <a:off x="5166360" y="7240181"/>
+            <a:off x="5166360" y="7313104"/>
             <a:ext cx="3703320" cy="310896"/>
           </a:xfrm>
           <a:prstGeom prst="rect">
@@ -12098,7 +12098,7 @@
           <a:p>
             <a:pPr algn="l">
               <a:lnSpc>
-                <a:spcPct val="140000"/>
+                <a:spcPts val="1925"/>
               </a:lnSpc>
             </a:pPr>
             <a:r>
@@ -12121,8 +12121,8 @@
         </p:nvSpPr>
         <p:spPr>
           <a:xfrm>
-            <a:off x="5166360" y="7587653"/>
-            <a:ext cx="3703320" cy="808406"/>
+            <a:off x="5166360" y="7660576"/>
+            <a:ext cx="3703320" cy="662559"/>
           </a:xfrm>
           <a:prstGeom prst="rect">
             <a:avLst/>
@@ -12160,7 +12160,7 @@
         </p:nvSpPr>
         <p:spPr>
           <a:xfrm>
-            <a:off x="9418320" y="4286669"/>
+            <a:off x="9418320" y="4359592"/>
             <a:ext cx="3703320" cy="2697480"/>
           </a:xfrm>
           <a:prstGeom prst="rect">
@@ -12228,7 +12228,7 @@
         </p:nvSpPr>
         <p:spPr>
           <a:xfrm>
-            <a:off x="9418320" y="7240181"/>
+            <a:off x="9418320" y="7313104"/>
             <a:ext cx="3703320" cy="310896"/>
           </a:xfrm>
           <a:prstGeom prst="rect">
@@ -12244,7 +12244,7 @@
           <a:p>
             <a:pPr algn="l">
               <a:lnSpc>
-                <a:spcPct val="140000"/>
+                <a:spcPts val="1925"/>
               </a:lnSpc>
             </a:pPr>
             <a:r>
@@ -12267,8 +12267,8 @@
         </p:nvSpPr>
         <p:spPr>
           <a:xfrm>
-            <a:off x="9418320" y="7587653"/>
-            <a:ext cx="3703320" cy="808406"/>
+            <a:off x="9418320" y="7660576"/>
+            <a:ext cx="3703320" cy="662559"/>
           </a:xfrm>
           <a:prstGeom prst="rect">
             <a:avLst/>
@@ -12306,7 +12306,7 @@
         </p:nvSpPr>
         <p:spPr>
           <a:xfrm>
-            <a:off x="13670280" y="4286669"/>
+            <a:off x="13670280" y="4359592"/>
             <a:ext cx="3703320" cy="2697480"/>
           </a:xfrm>
           <a:prstGeom prst="rect">
@@ -12374,7 +12374,7 @@
         </p:nvSpPr>
         <p:spPr>
           <a:xfrm>
-            <a:off x="13670280" y="7240181"/>
+            <a:off x="13670280" y="7313104"/>
             <a:ext cx="3703320" cy="310896"/>
           </a:xfrm>
           <a:prstGeom prst="rect">
@@ -12390,7 +12390,7 @@
           <a:p>
             <a:pPr algn="l">
               <a:lnSpc>
-                <a:spcPct val="140000"/>
+                <a:spcPts val="1925"/>
               </a:lnSpc>
             </a:pPr>
             <a:r>
@@ -12413,8 +12413,8 @@
         </p:nvSpPr>
         <p:spPr>
           <a:xfrm>
-            <a:off x="13670280" y="7587653"/>
-            <a:ext cx="3703320" cy="808406"/>
+            <a:off x="13670280" y="7660576"/>
+            <a:ext cx="3703320" cy="662559"/>
           </a:xfrm>
           <a:prstGeom prst="rect">
             <a:avLst/>
@@ -12538,7 +12538,7 @@
           <a:p>
             <a:pPr algn="l">
               <a:lnSpc>
-                <a:spcPct val="140000"/>
+                <a:spcPts val="1609"/>
               </a:lnSpc>
             </a:pPr>
             <a:r>
@@ -12577,7 +12577,7 @@
           <a:p>
             <a:pPr algn="r">
               <a:lnSpc>
-                <a:spcPct val="140000"/>
+                <a:spcPts val="1609"/>
               </a:lnSpc>
             </a:pPr>
             <a:r>
@@ -12600,7 +12600,7 @@
         </p:nvSpPr>
         <p:spPr>
           <a:xfrm>
-            <a:off x="914400" y="1463040"/>
+            <a:off x="914400" y="1468564"/>
             <a:ext cx="6400800" cy="274320"/>
           </a:xfrm>
           <a:prstGeom prst="rect">
@@ -12616,7 +12616,7 @@
           <a:p>
             <a:pPr algn="l">
               <a:lnSpc>
-                <a:spcPct val="140000"/>
+                <a:spcPts val="1750"/>
               </a:lnSpc>
             </a:pPr>
             <a:r>
@@ -12639,7 +12639,7 @@
         </p:nvSpPr>
         <p:spPr>
           <a:xfrm>
-            <a:off x="914400" y="1938528"/>
+            <a:off x="914400" y="1944052"/>
             <a:ext cx="8412480" cy="913486"/>
           </a:xfrm>
           <a:prstGeom prst="rect">
@@ -12655,7 +12655,7 @@
           <a:p>
             <a:pPr algn="l">
               <a:lnSpc>
-                <a:spcPct val="116000"/>
+                <a:spcPts val="5220"/>
               </a:lnSpc>
             </a:pPr>
             <a:r>
@@ -12678,7 +12678,7 @@
         </p:nvSpPr>
         <p:spPr>
           <a:xfrm>
-            <a:off x="8866638" y="2415314"/>
+            <a:off x="8866638" y="2420838"/>
             <a:ext cx="-728478" cy="12802"/>
           </a:xfrm>
           <a:prstGeom prst="rect">
@@ -12722,8 +12722,8 @@
         </p:nvSpPr>
         <p:spPr>
           <a:xfrm>
-            <a:off x="914400" y="3172054"/>
-            <a:ext cx="6400800" cy="1013917"/>
+            <a:off x="914400" y="3177578"/>
+            <a:ext cx="6400800" cy="828294"/>
           </a:xfrm>
           <a:prstGeom prst="rect">
             <a:avLst/>
@@ -12761,7 +12761,7 @@
         </p:nvSpPr>
         <p:spPr>
           <a:xfrm>
-            <a:off x="9921240" y="2304288"/>
+            <a:off x="9921240" y="2309812"/>
             <a:ext cx="6400800" cy="274320"/>
           </a:xfrm>
           <a:prstGeom prst="rect">
@@ -12777,7 +12777,7 @@
           <a:p>
             <a:pPr algn="l">
               <a:lnSpc>
-                <a:spcPct val="140000"/>
+                <a:spcPts val="1750"/>
               </a:lnSpc>
             </a:pPr>
             <a:r>
@@ -12800,7 +12800,7 @@
         </p:nvSpPr>
         <p:spPr>
           <a:xfrm>
-            <a:off x="9921240" y="2688336"/>
+            <a:off x="9921240" y="2693860"/>
             <a:ext cx="6858000" cy="7315"/>
           </a:xfrm>
           <a:prstGeom prst="rect">
@@ -12844,7 +12844,7 @@
         </p:nvSpPr>
         <p:spPr>
           <a:xfrm>
-            <a:off x="9921240" y="2875788"/>
+            <a:off x="9921240" y="2881312"/>
             <a:ext cx="365760" cy="274320"/>
           </a:xfrm>
           <a:prstGeom prst="rect">
@@ -12860,7 +12860,7 @@
           <a:p>
             <a:pPr algn="l">
               <a:lnSpc>
-                <a:spcPct val="140000"/>
+                <a:spcPts val="1894"/>
               </a:lnSpc>
             </a:pPr>
             <a:r>
@@ -12883,8 +12883,8 @@
         </p:nvSpPr>
         <p:spPr>
           <a:xfrm>
-            <a:off x="10424160" y="2834640"/>
-            <a:ext cx="6355080" cy="829391"/>
+            <a:off x="10424160" y="2840164"/>
+            <a:ext cx="6355080" cy="686562"/>
           </a:xfrm>
           <a:prstGeom prst="rect">
             <a:avLst/>
@@ -12931,7 +12931,7 @@
         </p:nvSpPr>
         <p:spPr>
           <a:xfrm>
-            <a:off x="9921240" y="3901775"/>
+            <a:off x="9921240" y="3764470"/>
             <a:ext cx="6858000" cy="7315"/>
           </a:xfrm>
           <a:prstGeom prst="rect">
@@ -12975,7 +12975,7 @@
         </p:nvSpPr>
         <p:spPr>
           <a:xfrm>
-            <a:off x="9921240" y="4089227"/>
+            <a:off x="9921240" y="3951922"/>
             <a:ext cx="365760" cy="274320"/>
           </a:xfrm>
           <a:prstGeom prst="rect">
@@ -12991,7 +12991,7 @@
           <a:p>
             <a:pPr algn="l">
               <a:lnSpc>
-                <a:spcPct val="140000"/>
+                <a:spcPts val="1894"/>
               </a:lnSpc>
             </a:pPr>
             <a:r>
@@ -13014,8 +13014,8 @@
         </p:nvSpPr>
         <p:spPr>
           <a:xfrm>
-            <a:off x="10424160" y="4048079"/>
-            <a:ext cx="6355080" cy="829391"/>
+            <a:off x="10424160" y="3910774"/>
+            <a:ext cx="6355080" cy="686562"/>
           </a:xfrm>
           <a:prstGeom prst="rect">
             <a:avLst/>
@@ -13062,7 +13062,7 @@
         </p:nvSpPr>
         <p:spPr>
           <a:xfrm>
-            <a:off x="9921240" y="5115215"/>
+            <a:off x="9921240" y="4835080"/>
             <a:ext cx="6858000" cy="7315"/>
           </a:xfrm>
           <a:prstGeom prst="rect">
@@ -13106,7 +13106,7 @@
         </p:nvSpPr>
         <p:spPr>
           <a:xfrm>
-            <a:off x="9921240" y="5302667"/>
+            <a:off x="9921240" y="5022532"/>
             <a:ext cx="365760" cy="274320"/>
           </a:xfrm>
           <a:prstGeom prst="rect">
@@ -13122,7 +13122,7 @@
           <a:p>
             <a:pPr algn="l">
               <a:lnSpc>
-                <a:spcPct val="140000"/>
+                <a:spcPts val="1894"/>
               </a:lnSpc>
             </a:pPr>
             <a:r>
@@ -13145,8 +13145,8 @@
         </p:nvSpPr>
         <p:spPr>
           <a:xfrm>
-            <a:off x="10424160" y="5261519"/>
-            <a:ext cx="6355080" cy="460416"/>
+            <a:off x="10424160" y="4981384"/>
+            <a:ext cx="6355080" cy="389001"/>
           </a:xfrm>
           <a:prstGeom prst="rect">
             <a:avLst/>
@@ -13193,7 +13193,7 @@
         </p:nvSpPr>
         <p:spPr>
           <a:xfrm>
-            <a:off x="9921240" y="5959678"/>
+            <a:off x="9921240" y="5608129"/>
             <a:ext cx="6858000" cy="7315"/>
           </a:xfrm>
           <a:prstGeom prst="rect">
@@ -13237,7 +13237,7 @@
         </p:nvSpPr>
         <p:spPr>
           <a:xfrm>
-            <a:off x="9921240" y="6147130"/>
+            <a:off x="9921240" y="5795581"/>
             <a:ext cx="365760" cy="274320"/>
           </a:xfrm>
           <a:prstGeom prst="rect">
@@ -13253,7 +13253,7 @@
           <a:p>
             <a:pPr algn="l">
               <a:lnSpc>
-                <a:spcPct val="140000"/>
+                <a:spcPts val="1894"/>
               </a:lnSpc>
             </a:pPr>
             <a:r>
@@ -13276,8 +13276,8 @@
         </p:nvSpPr>
         <p:spPr>
           <a:xfrm>
-            <a:off x="10424160" y="6105982"/>
-            <a:ext cx="6355080" cy="460416"/>
+            <a:off x="10424160" y="5754433"/>
+            <a:ext cx="6355080" cy="389001"/>
           </a:xfrm>
           <a:prstGeom prst="rect">
             <a:avLst/>
@@ -13324,7 +13324,7 @@
         </p:nvSpPr>
         <p:spPr>
           <a:xfrm>
-            <a:off x="9921240" y="6804142"/>
+            <a:off x="9921240" y="6381178"/>
             <a:ext cx="6858000" cy="7315"/>
           </a:xfrm>
           <a:prstGeom prst="rect">
@@ -13368,7 +13368,7 @@
         </p:nvSpPr>
         <p:spPr>
           <a:xfrm>
-            <a:off x="9921240" y="6991594"/>
+            <a:off x="9921240" y="6568630"/>
             <a:ext cx="365760" cy="274320"/>
           </a:xfrm>
           <a:prstGeom prst="rect">
@@ -13384,7 +13384,7 @@
           <a:p>
             <a:pPr algn="l">
               <a:lnSpc>
-                <a:spcPct val="140000"/>
+                <a:spcPts val="1894"/>
               </a:lnSpc>
             </a:pPr>
             <a:r>
@@ -13407,8 +13407,8 @@
         </p:nvSpPr>
         <p:spPr>
           <a:xfrm>
-            <a:off x="10424160" y="6950446"/>
-            <a:ext cx="6355080" cy="829391"/>
+            <a:off x="10424160" y="6527482"/>
+            <a:ext cx="6355080" cy="686562"/>
           </a:xfrm>
           <a:prstGeom prst="rect">
             <a:avLst/>
@@ -13455,7 +13455,7 @@
         </p:nvSpPr>
         <p:spPr>
           <a:xfrm>
-            <a:off x="9921240" y="8017581"/>
+            <a:off x="9921240" y="7451788"/>
             <a:ext cx="6858000" cy="7315"/>
           </a:xfrm>
           <a:prstGeom prst="rect">
@@ -13499,8 +13499,8 @@
         </p:nvSpPr>
         <p:spPr>
           <a:xfrm>
-            <a:off x="9921240" y="8401629"/>
-            <a:ext cx="6858000" cy="808406"/>
+            <a:off x="9921240" y="7835836"/>
+            <a:ext cx="6858000" cy="662559"/>
           </a:xfrm>
           <a:prstGeom prst="rect">
             <a:avLst/>
@@ -13633,7 +13633,7 @@
           <a:p>
             <a:pPr algn="l">
               <a:lnSpc>
-                <a:spcPct val="140000"/>
+                <a:spcPts val="1609"/>
               </a:lnSpc>
             </a:pPr>
             <a:r>
@@ -13672,7 +13672,7 @@
           <a:p>
             <a:pPr algn="r">
               <a:lnSpc>
-                <a:spcPct val="140000"/>
+                <a:spcPts val="1609"/>
               </a:lnSpc>
             </a:pPr>
             <a:r>
@@ -13711,7 +13711,7 @@
           <a:p>
             <a:pPr algn="l">
               <a:lnSpc>
-                <a:spcPct val="140000"/>
+                <a:spcPts val="1750"/>
               </a:lnSpc>
             </a:pPr>
             <a:r>
@@ -13750,7 +13750,7 @@
           <a:p>
             <a:pPr algn="l">
               <a:lnSpc>
-                <a:spcPct val="116000"/>
+                <a:spcPts val="5220"/>
               </a:lnSpc>
             </a:pPr>
             <a:r>
@@ -13877,7 +13877,7 @@
           <a:p>
             <a:pPr algn="l">
               <a:lnSpc>
-                <a:spcPct val="140000"/>
+                <a:spcPts val="1925"/>
               </a:lnSpc>
             </a:pPr>
             <a:r>
@@ -13916,7 +13916,7 @@
           <a:p>
             <a:pPr algn="l">
               <a:lnSpc>
-                <a:spcPct val="140000"/>
+                <a:spcPts val="1925"/>
               </a:lnSpc>
             </a:pPr>
             <a:r>
@@ -13940,7 +13940,7 @@
         <p:spPr>
           <a:xfrm>
             <a:off x="914400" y="7772400"/>
-            <a:ext cx="2889504" cy="1185177"/>
+            <a:ext cx="2889504" cy="966406"/>
           </a:xfrm>
           <a:prstGeom prst="rect">
             <a:avLst/>
@@ -14038,7 +14038,7 @@
           <a:p>
             <a:pPr algn="l">
               <a:lnSpc>
-                <a:spcPct val="140000"/>
+                <a:spcPts val="1925"/>
               </a:lnSpc>
             </a:pPr>
             <a:r>
@@ -14077,7 +14077,7 @@
           <a:p>
             <a:pPr algn="l">
               <a:lnSpc>
-                <a:spcPct val="140000"/>
+                <a:spcPts val="1925"/>
               </a:lnSpc>
             </a:pPr>
             <a:r>
@@ -14101,7 +14101,7 @@
         <p:spPr>
           <a:xfrm>
             <a:off x="4306824" y="7772400"/>
-            <a:ext cx="2889504" cy="1185177"/>
+            <a:ext cx="2889504" cy="966406"/>
           </a:xfrm>
           <a:prstGeom prst="rect">
             <a:avLst/>
@@ -14199,7 +14199,7 @@
           <a:p>
             <a:pPr algn="l">
               <a:lnSpc>
-                <a:spcPct val="140000"/>
+                <a:spcPts val="1925"/>
               </a:lnSpc>
             </a:pPr>
             <a:r>
@@ -14238,7 +14238,7 @@
           <a:p>
             <a:pPr algn="l">
               <a:lnSpc>
-                <a:spcPct val="140000"/>
+                <a:spcPts val="1925"/>
               </a:lnSpc>
             </a:pPr>
             <a:r>
@@ -14262,7 +14262,7 @@
         <p:spPr>
           <a:xfrm>
             <a:off x="7699248" y="7772400"/>
-            <a:ext cx="2889504" cy="1185177"/>
+            <a:ext cx="2889504" cy="966406"/>
           </a:xfrm>
           <a:prstGeom prst="rect">
             <a:avLst/>
@@ -14360,7 +14360,7 @@
           <a:p>
             <a:pPr algn="l">
               <a:lnSpc>
-                <a:spcPct val="140000"/>
+                <a:spcPts val="1925"/>
               </a:lnSpc>
             </a:pPr>
             <a:r>
@@ -14399,7 +14399,7 @@
           <a:p>
             <a:pPr algn="l">
               <a:lnSpc>
-                <a:spcPct val="140000"/>
+                <a:spcPts val="1925"/>
               </a:lnSpc>
             </a:pPr>
             <a:r>
@@ -14423,7 +14423,7 @@
         <p:spPr>
           <a:xfrm>
             <a:off x="11091672" y="7772400"/>
-            <a:ext cx="2889504" cy="808406"/>
+            <a:ext cx="2889504" cy="662559"/>
           </a:xfrm>
           <a:prstGeom prst="rect">
             <a:avLst/>
@@ -14523,7 +14523,7 @@
           <a:p>
             <a:pPr algn="l">
               <a:lnSpc>
-                <a:spcPct val="140000"/>
+                <a:spcPts val="1925"/>
               </a:lnSpc>
             </a:pPr>
             <a:r>
@@ -14562,7 +14562,7 @@
           <a:p>
             <a:pPr algn="l">
               <a:lnSpc>
-                <a:spcPct val="140000"/>
+                <a:spcPts val="1925"/>
               </a:lnSpc>
             </a:pPr>
             <a:r>
@@ -14586,7 +14586,7 @@
         <p:spPr>
           <a:xfrm>
             <a:off x="14484096" y="7772400"/>
-            <a:ext cx="2889504" cy="808406"/>
+            <a:ext cx="2889504" cy="662559"/>
           </a:xfrm>
           <a:prstGeom prst="rect">
             <a:avLst/>
@@ -14710,7 +14710,7 @@
           <a:p>
             <a:pPr algn="l">
               <a:lnSpc>
-                <a:spcPct val="140000"/>
+                <a:spcPts val="1609"/>
               </a:lnSpc>
             </a:pPr>
             <a:r>
@@ -14749,7 +14749,7 @@
           <a:p>
             <a:pPr algn="r">
               <a:lnSpc>
-                <a:spcPct val="140000"/>
+                <a:spcPts val="1609"/>
               </a:lnSpc>
             </a:pPr>
             <a:r>
@@ -14788,7 +14788,7 @@
           <a:p>
             <a:pPr algn="l">
               <a:lnSpc>
-                <a:spcPct val="140000"/>
+                <a:spcPts val="1750"/>
               </a:lnSpc>
             </a:pPr>
             <a:r>
@@ -14827,7 +14827,7 @@
           <a:p>
             <a:pPr algn="l">
               <a:lnSpc>
-                <a:spcPct val="116000"/>
+                <a:spcPts val="5220"/>
               </a:lnSpc>
             </a:pPr>
             <a:r>
@@ -14910,7 +14910,7 @@
           <a:p>
             <a:pPr algn="l">
               <a:lnSpc>
-                <a:spcPct val="140000"/>
+                <a:spcPts val="1750"/>
               </a:lnSpc>
             </a:pPr>
             <a:r>
@@ -14949,7 +14949,7 @@
           <a:p>
             <a:pPr algn="l">
               <a:lnSpc>
-                <a:spcPct val="110000"/>
+                <a:spcPts val="4840"/>
               </a:lnSpc>
             </a:pPr>
             <a:r>
@@ -14973,7 +14973,7 @@
         <p:spPr>
           <a:xfrm>
             <a:off x="12435840" y="4507992"/>
-            <a:ext cx="4937760" cy="808406"/>
+            <a:ext cx="4937760" cy="662559"/>
           </a:xfrm>
           <a:prstGeom prst="rect">
             <a:avLst/>
@@ -15071,7 +15071,7 @@
           <a:p>
             <a:pPr algn="l">
               <a:lnSpc>
-                <a:spcPct val="140000"/>
+                <a:spcPts val="1750"/>
               </a:lnSpc>
             </a:pPr>
             <a:r>
@@ -15110,7 +15110,7 @@
           <a:p>
             <a:pPr algn="l">
               <a:lnSpc>
-                <a:spcPct val="110000"/>
+                <a:spcPts val="4840"/>
               </a:lnSpc>
             </a:pPr>
             <a:r>
@@ -15134,7 +15134,7 @@
         <p:spPr>
           <a:xfrm>
             <a:off x="12435840" y="6409944"/>
-            <a:ext cx="4937760" cy="1185177"/>
+            <a:ext cx="4937760" cy="966406"/>
           </a:xfrm>
           <a:prstGeom prst="rect">
             <a:avLst/>
@@ -15232,7 +15232,7 @@
           <a:p>
             <a:pPr algn="l">
               <a:lnSpc>
-                <a:spcPct val="140000"/>
+                <a:spcPts val="1750"/>
               </a:lnSpc>
             </a:pPr>
             <a:r>
@@ -15271,7 +15271,7 @@
           <a:p>
             <a:pPr algn="l">
               <a:lnSpc>
-                <a:spcPct val="110000"/>
+                <a:spcPts val="4840"/>
               </a:lnSpc>
             </a:pPr>
             <a:r>
@@ -15295,7 +15295,7 @@
         <p:spPr>
           <a:xfrm>
             <a:off x="12435840" y="8311896"/>
-            <a:ext cx="4937760" cy="1185177"/>
+            <a:ext cx="4937760" cy="966406"/>
           </a:xfrm>
           <a:prstGeom prst="rect">
             <a:avLst/>
@@ -15378,7 +15378,7 @@
         <p:spPr>
           <a:xfrm>
             <a:off x="914400" y="9976104"/>
-            <a:ext cx="11850624" cy="808406"/>
+            <a:ext cx="11850624" cy="662559"/>
           </a:xfrm>
           <a:prstGeom prst="rect">
             <a:avLst/>
@@ -15580,7 +15580,7 @@
           <a:p>
             <a:pPr algn="l">
               <a:lnSpc>
-                <a:spcPct val="140000"/>
+                <a:spcPts val="1609"/>
               </a:lnSpc>
             </a:pPr>
             <a:r>
@@ -15619,7 +15619,7 @@
           <a:p>
             <a:pPr algn="r">
               <a:lnSpc>
-                <a:spcPct val="140000"/>
+                <a:spcPts val="1609"/>
               </a:lnSpc>
             </a:pPr>
             <a:r>
@@ -15658,7 +15658,7 @@
           <a:p>
             <a:pPr algn="l">
               <a:lnSpc>
-                <a:spcPct val="140000"/>
+                <a:spcPts val="8119"/>
               </a:lnSpc>
             </a:pPr>
             <a:r>
@@ -15697,7 +15697,7 @@
           <a:p>
             <a:pPr algn="l">
               <a:lnSpc>
-                <a:spcPct val="105000"/>
+                <a:spcPts val="7350"/>
               </a:lnSpc>
             </a:pPr>
             <a:r>
@@ -15780,7 +15780,7 @@
           <a:p>
             <a:pPr algn="l">
               <a:lnSpc>
-                <a:spcPct val="140000"/>
+                <a:spcPts val="1750"/>
               </a:lnSpc>
             </a:pPr>
             <a:r>
@@ -15941,7 +15941,7 @@
           <a:p>
             <a:pPr algn="l">
               <a:lnSpc>
-                <a:spcPct val="140000"/>
+                <a:spcPts val="1609"/>
               </a:lnSpc>
             </a:pPr>
             <a:r>
@@ -15980,7 +15980,7 @@
           <a:p>
             <a:pPr algn="r">
               <a:lnSpc>
-                <a:spcPct val="140000"/>
+                <a:spcPts val="1609"/>
               </a:lnSpc>
             </a:pPr>
             <a:r>
@@ -16019,7 +16019,7 @@
           <a:p>
             <a:pPr algn="l">
               <a:lnSpc>
-                <a:spcPct val="140000"/>
+                <a:spcPts val="1750"/>
               </a:lnSpc>
             </a:pPr>
             <a:r>
@@ -16336,7 +16336,7 @@
           <a:p>
             <a:pPr algn="l">
               <a:lnSpc>
-                <a:spcPct val="140000"/>
+                <a:spcPts val="1609"/>
               </a:lnSpc>
             </a:pPr>
             <a:r>
@@ -16375,7 +16375,7 @@
           <a:p>
             <a:pPr algn="r">
               <a:lnSpc>
-                <a:spcPct val="140000"/>
+                <a:spcPts val="1609"/>
               </a:lnSpc>
             </a:pPr>
             <a:r>
@@ -16414,7 +16414,7 @@
           <a:p>
             <a:pPr algn="l">
               <a:lnSpc>
-                <a:spcPct val="140000"/>
+                <a:spcPts val="1750"/>
               </a:lnSpc>
             </a:pPr>
             <a:r>
@@ -16453,7 +16453,7 @@
           <a:p>
             <a:pPr algn="l">
               <a:lnSpc>
-                <a:spcPct val="116000"/>
+                <a:spcPts val="5220"/>
               </a:lnSpc>
             </a:pPr>
             <a:r>
@@ -16469,7 +16469,7 @@
           <a:p>
             <a:pPr algn="l">
               <a:lnSpc>
-                <a:spcPct val="116000"/>
+                <a:spcPts val="5220"/>
               </a:lnSpc>
             </a:pPr>
             <a:r>
@@ -16537,7 +16537,7 @@
         <p:spPr>
           <a:xfrm>
             <a:off x="914400" y="3994099"/>
-            <a:ext cx="6400800" cy="1013917"/>
+            <a:ext cx="6400800" cy="828294"/>
           </a:xfrm>
           <a:prstGeom prst="rect">
             <a:avLst/>
@@ -16591,7 +16591,7 @@
           <a:p>
             <a:pPr algn="l">
               <a:lnSpc>
-                <a:spcPct val="140000"/>
+                <a:spcPts val="1750"/>
               </a:lnSpc>
             </a:pPr>
             <a:r>
@@ -16674,7 +16674,7 @@
           <a:p>
             <a:pPr algn="l">
               <a:lnSpc>
-                <a:spcPct val="140000"/>
+                <a:spcPts val="1894"/>
               </a:lnSpc>
             </a:pPr>
             <a:r>
@@ -16698,7 +16698,7 @@
         <p:spPr>
           <a:xfrm>
             <a:off x="10424160" y="2514600"/>
-            <a:ext cx="6355080" cy="829391"/>
+            <a:ext cx="6355080" cy="686562"/>
           </a:xfrm>
           <a:prstGeom prst="rect">
             <a:avLst/>
@@ -16745,7 +16745,7 @@
         </p:nvSpPr>
         <p:spPr>
           <a:xfrm>
-            <a:off x="9921240" y="3581735"/>
+            <a:off x="9921240" y="3438906"/>
             <a:ext cx="6858000" cy="7315"/>
           </a:xfrm>
           <a:prstGeom prst="rect">
@@ -16789,7 +16789,7 @@
         </p:nvSpPr>
         <p:spPr>
           <a:xfrm>
-            <a:off x="9921240" y="3769187"/>
+            <a:off x="9921240" y="3626358"/>
             <a:ext cx="365760" cy="274320"/>
           </a:xfrm>
           <a:prstGeom prst="rect">
@@ -16805,7 +16805,7 @@
           <a:p>
             <a:pPr algn="l">
               <a:lnSpc>
-                <a:spcPct val="140000"/>
+                <a:spcPts val="1894"/>
               </a:lnSpc>
             </a:pPr>
             <a:r>
@@ -16828,8 +16828,8 @@
         </p:nvSpPr>
         <p:spPr>
           <a:xfrm>
-            <a:off x="10424160" y="3728039"/>
-            <a:ext cx="6355080" cy="829391"/>
+            <a:off x="10424160" y="3585210"/>
+            <a:ext cx="6355080" cy="686562"/>
           </a:xfrm>
           <a:prstGeom prst="rect">
             <a:avLst/>
@@ -16876,7 +16876,7 @@
         </p:nvSpPr>
         <p:spPr>
           <a:xfrm>
-            <a:off x="9921240" y="4795175"/>
+            <a:off x="9921240" y="4509516"/>
             <a:ext cx="6858000" cy="7315"/>
           </a:xfrm>
           <a:prstGeom prst="rect">
@@ -16920,7 +16920,7 @@
         </p:nvSpPr>
         <p:spPr>
           <a:xfrm>
-            <a:off x="9921240" y="4982627"/>
+            <a:off x="9921240" y="4696968"/>
             <a:ext cx="365760" cy="274320"/>
           </a:xfrm>
           <a:prstGeom prst="rect">
@@ -16936,7 +16936,7 @@
           <a:p>
             <a:pPr algn="l">
               <a:lnSpc>
-                <a:spcPct val="140000"/>
+                <a:spcPts val="1894"/>
               </a:lnSpc>
             </a:pPr>
             <a:r>
@@ -16959,8 +16959,8 @@
         </p:nvSpPr>
         <p:spPr>
           <a:xfrm>
-            <a:off x="10424160" y="4941479"/>
-            <a:ext cx="6355080" cy="460416"/>
+            <a:off x="10424160" y="4655820"/>
+            <a:ext cx="6355080" cy="389001"/>
           </a:xfrm>
           <a:prstGeom prst="rect">
             <a:avLst/>
@@ -17007,7 +17007,7 @@
         </p:nvSpPr>
         <p:spPr>
           <a:xfrm>
-            <a:off x="9921240" y="5639638"/>
+            <a:off x="9921240" y="5282565"/>
             <a:ext cx="6858000" cy="7315"/>
           </a:xfrm>
           <a:prstGeom prst="rect">
@@ -17051,7 +17051,7 @@
         </p:nvSpPr>
         <p:spPr>
           <a:xfrm>
-            <a:off x="9921240" y="5827090"/>
+            <a:off x="9921240" y="5470017"/>
             <a:ext cx="365760" cy="274320"/>
           </a:xfrm>
           <a:prstGeom prst="rect">
@@ -17067,7 +17067,7 @@
           <a:p>
             <a:pPr algn="l">
               <a:lnSpc>
-                <a:spcPct val="140000"/>
+                <a:spcPts val="1894"/>
               </a:lnSpc>
             </a:pPr>
             <a:r>
@@ -17090,8 +17090,8 @@
         </p:nvSpPr>
         <p:spPr>
           <a:xfrm>
-            <a:off x="10424160" y="5785942"/>
-            <a:ext cx="6355080" cy="460416"/>
+            <a:off x="10424160" y="5428869"/>
+            <a:ext cx="6355080" cy="389001"/>
           </a:xfrm>
           <a:prstGeom prst="rect">
             <a:avLst/>
@@ -17138,7 +17138,7 @@
         </p:nvSpPr>
         <p:spPr>
           <a:xfrm>
-            <a:off x="9921240" y="6484102"/>
+            <a:off x="9921240" y="6055614"/>
             <a:ext cx="6858000" cy="7315"/>
           </a:xfrm>
           <a:prstGeom prst="rect">
@@ -17182,7 +17182,7 @@
         </p:nvSpPr>
         <p:spPr>
           <a:xfrm>
-            <a:off x="9921240" y="6671554"/>
+            <a:off x="9921240" y="6243066"/>
             <a:ext cx="365760" cy="274320"/>
           </a:xfrm>
           <a:prstGeom prst="rect">
@@ -17198,7 +17198,7 @@
           <a:p>
             <a:pPr algn="l">
               <a:lnSpc>
-                <a:spcPct val="140000"/>
+                <a:spcPts val="1894"/>
               </a:lnSpc>
             </a:pPr>
             <a:r>
@@ -17221,8 +17221,8 @@
         </p:nvSpPr>
         <p:spPr>
           <a:xfrm>
-            <a:off x="10424160" y="6630406"/>
-            <a:ext cx="6355080" cy="829391"/>
+            <a:off x="10424160" y="6201918"/>
+            <a:ext cx="6355080" cy="686562"/>
           </a:xfrm>
           <a:prstGeom prst="rect">
             <a:avLst/>
@@ -17269,7 +17269,7 @@
         </p:nvSpPr>
         <p:spPr>
           <a:xfrm>
-            <a:off x="9921240" y="7697541"/>
+            <a:off x="9921240" y="7126224"/>
             <a:ext cx="6858000" cy="7315"/>
           </a:xfrm>
           <a:prstGeom prst="rect">
@@ -17313,7 +17313,7 @@
         </p:nvSpPr>
         <p:spPr>
           <a:xfrm>
-            <a:off x="9921240" y="7884993"/>
+            <a:off x="9921240" y="7313676"/>
             <a:ext cx="365760" cy="274320"/>
           </a:xfrm>
           <a:prstGeom prst="rect">
@@ -17329,7 +17329,7 @@
           <a:p>
             <a:pPr algn="l">
               <a:lnSpc>
-                <a:spcPct val="140000"/>
+                <a:spcPts val="1894"/>
               </a:lnSpc>
             </a:pPr>
             <a:r>
@@ -17352,8 +17352,8 @@
         </p:nvSpPr>
         <p:spPr>
           <a:xfrm>
-            <a:off x="10424160" y="7843845"/>
-            <a:ext cx="6355080" cy="460416"/>
+            <a:off x="10424160" y="7272528"/>
+            <a:ext cx="6355080" cy="389001"/>
           </a:xfrm>
           <a:prstGeom prst="rect">
             <a:avLst/>
@@ -17400,7 +17400,7 @@
         </p:nvSpPr>
         <p:spPr>
           <a:xfrm>
-            <a:off x="9921240" y="8542005"/>
+            <a:off x="9921240" y="7899273"/>
             <a:ext cx="6858000" cy="7315"/>
           </a:xfrm>
           <a:prstGeom prst="rect">
@@ -17444,7 +17444,7 @@
         </p:nvSpPr>
         <p:spPr>
           <a:xfrm>
-            <a:off x="9921240" y="8729457"/>
+            <a:off x="9921240" y="8086725"/>
             <a:ext cx="365760" cy="274320"/>
           </a:xfrm>
           <a:prstGeom prst="rect">
@@ -17460,7 +17460,7 @@
           <a:p>
             <a:pPr algn="l">
               <a:lnSpc>
-                <a:spcPct val="140000"/>
+                <a:spcPts val="1894"/>
               </a:lnSpc>
             </a:pPr>
             <a:r>
@@ -17483,8 +17483,8 @@
         </p:nvSpPr>
         <p:spPr>
           <a:xfrm>
-            <a:off x="10424160" y="8688309"/>
-            <a:ext cx="6355080" cy="460416"/>
+            <a:off x="10424160" y="8045577"/>
+            <a:ext cx="6355080" cy="389001"/>
           </a:xfrm>
           <a:prstGeom prst="rect">
             <a:avLst/>
@@ -17531,7 +17531,7 @@
         </p:nvSpPr>
         <p:spPr>
           <a:xfrm>
-            <a:off x="9921240" y="9386468"/>
+            <a:off x="9921240" y="8672322"/>
             <a:ext cx="6858000" cy="7315"/>
           </a:xfrm>
           <a:prstGeom prst="rect">
@@ -17617,7 +17617,7 @@
           <a:p>
             <a:pPr algn="ctr">
               <a:lnSpc>
-                <a:spcPct val="140000"/>
+                <a:spcPts val="2362"/>
               </a:lnSpc>
             </a:pPr>
             <a:r>
@@ -17656,7 +17656,7 @@
           <a:p>
             <a:pPr algn="ctr">
               <a:lnSpc>
-                <a:spcPct val="140000"/>
+                <a:spcPts val="2310"/>
               </a:lnSpc>
             </a:pPr>
             <a:r>
@@ -17765,7 +17765,7 @@
           <a:p>
             <a:pPr algn="l">
               <a:lnSpc>
-                <a:spcPct val="140000"/>
+                <a:spcPts val="1609"/>
               </a:lnSpc>
             </a:pPr>
             <a:r>
@@ -17804,7 +17804,7 @@
           <a:p>
             <a:pPr algn="r">
               <a:lnSpc>
-                <a:spcPct val="140000"/>
+                <a:spcPts val="1609"/>
               </a:lnSpc>
             </a:pPr>
             <a:r>
@@ -17843,7 +17843,7 @@
           <a:p>
             <a:pPr algn="l">
               <a:lnSpc>
-                <a:spcPct val="116000"/>
+                <a:spcPts val="5220"/>
               </a:lnSpc>
             </a:pPr>
             <a:r>
@@ -17970,7 +17970,7 @@
           <a:p>
             <a:pPr algn="l">
               <a:lnSpc>
-                <a:spcPct val="140000"/>
+                <a:spcPts val="2012"/>
               </a:lnSpc>
             </a:pPr>
             <a:r>
@@ -18009,7 +18009,7 @@
           <a:p>
             <a:pPr algn="l">
               <a:lnSpc>
-                <a:spcPct val="140000"/>
+                <a:spcPts val="3640"/>
               </a:lnSpc>
             </a:pPr>
             <a:r>
@@ -18033,7 +18033,7 @@
         <p:spPr>
           <a:xfrm>
             <a:off x="9921240" y="3538728"/>
-            <a:ext cx="6858000" cy="534391"/>
+            <a:ext cx="6858000" cy="441579"/>
           </a:xfrm>
           <a:prstGeom prst="rect">
             <a:avLst/>
@@ -18131,7 +18131,7 @@
           <a:p>
             <a:pPr algn="l">
               <a:lnSpc>
-                <a:spcPct val="140000"/>
+                <a:spcPts val="2012"/>
               </a:lnSpc>
             </a:pPr>
             <a:r>
@@ -18170,7 +18170,7 @@
           <a:p>
             <a:pPr algn="l">
               <a:lnSpc>
-                <a:spcPct val="140000"/>
+                <a:spcPts val="3640"/>
               </a:lnSpc>
             </a:pPr>
             <a:r>
@@ -18194,7 +18194,7 @@
         <p:spPr>
           <a:xfrm>
             <a:off x="9921240" y="4727448"/>
-            <a:ext cx="6858000" cy="534391"/>
+            <a:ext cx="6858000" cy="441579"/>
           </a:xfrm>
           <a:prstGeom prst="rect">
             <a:avLst/>
@@ -18292,7 +18292,7 @@
           <a:p>
             <a:pPr algn="l">
               <a:lnSpc>
-                <a:spcPct val="140000"/>
+                <a:spcPts val="2012"/>
               </a:lnSpc>
             </a:pPr>
             <a:r>
@@ -18331,7 +18331,7 @@
           <a:p>
             <a:pPr algn="l">
               <a:lnSpc>
-                <a:spcPct val="140000"/>
+                <a:spcPts val="3640"/>
               </a:lnSpc>
             </a:pPr>
             <a:r>
@@ -18355,7 +18355,7 @@
         <p:spPr>
           <a:xfrm>
             <a:off x="9921240" y="5916168"/>
-            <a:ext cx="6858000" cy="534391"/>
+            <a:ext cx="6858000" cy="441579"/>
           </a:xfrm>
           <a:prstGeom prst="rect">
             <a:avLst/>
@@ -18453,7 +18453,7 @@
           <a:p>
             <a:pPr algn="l">
               <a:lnSpc>
-                <a:spcPct val="140000"/>
+                <a:spcPts val="2012"/>
               </a:lnSpc>
             </a:pPr>
             <a:r>
@@ -18492,7 +18492,7 @@
           <a:p>
             <a:pPr algn="l">
               <a:lnSpc>
-                <a:spcPct val="140000"/>
+                <a:spcPts val="3640"/>
               </a:lnSpc>
             </a:pPr>
             <a:r>
@@ -18516,7 +18516,7 @@
         <p:spPr>
           <a:xfrm>
             <a:off x="9921240" y="7104888"/>
-            <a:ext cx="6858000" cy="1013917"/>
+            <a:ext cx="6858000" cy="828294"/>
           </a:xfrm>
           <a:prstGeom prst="rect">
             <a:avLst/>
@@ -18614,7 +18614,7 @@
           <a:p>
             <a:pPr algn="l">
               <a:lnSpc>
-                <a:spcPct val="140000"/>
+                <a:spcPts val="2012"/>
               </a:lnSpc>
             </a:pPr>
             <a:r>
@@ -18653,7 +18653,7 @@
           <a:p>
             <a:pPr algn="l">
               <a:lnSpc>
-                <a:spcPct val="140000"/>
+                <a:spcPts val="3640"/>
               </a:lnSpc>
             </a:pPr>
             <a:r>
@@ -18677,7 +18677,7 @@
         <p:spPr>
           <a:xfrm>
             <a:off x="9921240" y="8293608"/>
-            <a:ext cx="6858000" cy="534391"/>
+            <a:ext cx="6858000" cy="441579"/>
           </a:xfrm>
           <a:prstGeom prst="rect">
             <a:avLst/>
@@ -18879,7 +18879,7 @@
           <a:p>
             <a:pPr algn="l">
               <a:lnSpc>
-                <a:spcPct val="140000"/>
+                <a:spcPts val="1609"/>
               </a:lnSpc>
             </a:pPr>
             <a:r>
@@ -18918,7 +18918,7 @@
           <a:p>
             <a:pPr algn="r">
               <a:lnSpc>
-                <a:spcPct val="140000"/>
+                <a:spcPts val="1609"/>
               </a:lnSpc>
             </a:pPr>
             <a:r>
@@ -18957,7 +18957,7 @@
           <a:p>
             <a:pPr algn="l">
               <a:lnSpc>
-                <a:spcPct val="140000"/>
+                <a:spcPts val="8119"/>
               </a:lnSpc>
             </a:pPr>
             <a:r>
@@ -18996,7 +18996,7 @@
           <a:p>
             <a:pPr algn="l">
               <a:lnSpc>
-                <a:spcPct val="105000"/>
+                <a:spcPts val="7350"/>
               </a:lnSpc>
             </a:pPr>
             <a:r>
@@ -19079,7 +19079,7 @@
           <a:p>
             <a:pPr algn="l">
               <a:lnSpc>
-                <a:spcPct val="140000"/>
+                <a:spcPts val="1750"/>
               </a:lnSpc>
             </a:pPr>
             <a:r>
@@ -19188,7 +19188,7 @@
           <a:p>
             <a:pPr algn="l">
               <a:lnSpc>
-                <a:spcPct val="140000"/>
+                <a:spcPts val="1609"/>
               </a:lnSpc>
             </a:pPr>
             <a:r>
@@ -19227,7 +19227,7 @@
           <a:p>
             <a:pPr algn="r">
               <a:lnSpc>
-                <a:spcPct val="140000"/>
+                <a:spcPts val="1609"/>
               </a:lnSpc>
             </a:pPr>
             <a:r>
@@ -19250,7 +19250,7 @@
         </p:nvSpPr>
         <p:spPr>
           <a:xfrm>
-            <a:off x="914400" y="1941195"/>
+            <a:off x="914400" y="2405253"/>
             <a:ext cx="6400800" cy="274320"/>
           </a:xfrm>
           <a:prstGeom prst="rect">
@@ -19266,7 +19266,7 @@
           <a:p>
             <a:pPr algn="l">
               <a:lnSpc>
-                <a:spcPct val="140000"/>
+                <a:spcPts val="1750"/>
               </a:lnSpc>
             </a:pPr>
             <a:r>
@@ -19289,7 +19289,7 @@
         </p:nvSpPr>
         <p:spPr>
           <a:xfrm>
-            <a:off x="914400" y="2416683"/>
+            <a:off x="914400" y="2880741"/>
             <a:ext cx="8412480" cy="1735531"/>
           </a:xfrm>
           <a:prstGeom prst="rect">
@@ -19305,7 +19305,7 @@
           <a:p>
             <a:pPr algn="l">
               <a:lnSpc>
-                <a:spcPct val="116000"/>
+                <a:spcPts val="5220"/>
               </a:lnSpc>
             </a:pPr>
             <a:r>
@@ -19321,7 +19321,7 @@
           <a:p>
             <a:pPr algn="l">
               <a:lnSpc>
-                <a:spcPct val="116000"/>
+                <a:spcPts val="5220"/>
               </a:lnSpc>
             </a:pPr>
             <a:r>
@@ -19344,7 +19344,7 @@
         </p:nvSpPr>
         <p:spPr>
           <a:xfrm>
-            <a:off x="4755673" y="3715515"/>
+            <a:off x="4755673" y="4179573"/>
             <a:ext cx="3382487" cy="12802"/>
           </a:xfrm>
           <a:prstGeom prst="rect">
@@ -19388,8 +19388,8 @@
         </p:nvSpPr>
         <p:spPr>
           <a:xfrm>
-            <a:off x="914400" y="4472254"/>
-            <a:ext cx="6400800" cy="1013917"/>
+            <a:off x="914400" y="4936312"/>
+            <a:ext cx="6400800" cy="828294"/>
           </a:xfrm>
           <a:prstGeom prst="rect">
             <a:avLst/>
@@ -19427,7 +19427,7 @@
         </p:nvSpPr>
         <p:spPr>
           <a:xfrm>
-            <a:off x="914400" y="6016523"/>
+            <a:off x="914400" y="6294958"/>
             <a:ext cx="6400800" cy="825703"/>
           </a:xfrm>
           <a:prstGeom prst="rect">
@@ -19443,19 +19443,97 @@
           <a:p>
             <a:pPr algn="l">
               <a:lnSpc>
+                <a:spcPts val="2618"/>
+              </a:lnSpc>
+            </a:pPr>
+            <a:r>
+              <a:rPr sz="1805" i="0" b="0" spc="160">
+                <a:solidFill>
+                  <a:srgbClr val="2C322E"/>
+                </a:solidFill>
+                <a:latin typeface="Outfit 1 Semi-Bold"/>
+              </a:rPr>
+              <a:t>A PROTEÇÃO É CONSEQUÊNCIA</a:t>
+            </a:r>
+          </a:p>
+          <a:p>
+            <a:pPr algn="l">
+              <a:lnSpc>
+                <a:spcPts val="2618"/>
+              </a:lnSpc>
+            </a:pPr>
+            <a:r>
+              <a:rPr sz="1805" i="0" b="0" spc="160">
+                <a:solidFill>
+                  <a:srgbClr val="2C322E"/>
+                </a:solidFill>
+                <a:latin typeface="Outfit 1 Semi-Bold"/>
+              </a:rPr>
+              <a:t>DO DIAGNÓSTICO.</a:t>
+            </a:r>
+          </a:p>
+        </p:txBody>
+      </p:sp>
+      <p:sp>
+        <p:nvSpPr>
+          <p:cNvPr id="10" name="TextBox 9"/>
+          <p:cNvSpPr txBox="1"/>
+          <p:nvPr/>
+        </p:nvSpPr>
+        <p:spPr>
+          <a:xfrm>
+            <a:off x="9921240" y="3017901"/>
+            <a:ext cx="6858000" cy="1215009"/>
+          </a:xfrm>
+          <a:prstGeom prst="rect">
+            <a:avLst/>
+          </a:prstGeom>
+          <a:noFill/>
+        </p:spPr>
+        <p:txBody>
+          <a:bodyPr wrap="square" anchor="t" lIns="0" rIns="0" tIns="0" bIns="0">
+            <a:spAutoFit/>
+          </a:bodyPr>
+          <a:lstStyle/>
+          <a:p>
+            <a:pPr algn="l">
+              <a:lnSpc>
                 <a:spcPct val="145000"/>
               </a:lnSpc>
             </a:pPr>
             <a:r>
-              <a:rPr sz="1805" i="0" b="0" spc="160">
+              <a:rPr sz="2100" i="0" b="0">
                 <a:solidFill>
                   <a:srgbClr val="2C322E"/>
                 </a:solidFill>
                 <a:latin typeface="Outfit 1 Semi-Bold"/>
               </a:rPr>
-              <a:t>A PROTEÇÃO É CONSEQUÊNCIA</a:t>
-            </a:r>
-          </a:p>
+              <a:t>Lucas Martini estrutura proteção e sucessão para preservar possibilidades quando a vida, a família ou a empresa entram em transição.</a:t>
+            </a:r>
+          </a:p>
+        </p:txBody>
+      </p:sp>
+      <p:sp>
+        <p:nvSpPr>
+          <p:cNvPr id="11" name="TextBox 10"/>
+          <p:cNvSpPr txBox="1"/>
+          <p:nvPr/>
+        </p:nvSpPr>
+        <p:spPr>
+          <a:xfrm>
+            <a:off x="9921240" y="4488942"/>
+            <a:ext cx="6858000" cy="1215009"/>
+          </a:xfrm>
+          <a:prstGeom prst="rect">
+            <a:avLst/>
+          </a:prstGeom>
+          <a:noFill/>
+        </p:spPr>
+        <p:txBody>
+          <a:bodyPr wrap="square" anchor="t" lIns="0" rIns="0" tIns="0" bIns="0">
+            <a:spAutoFit/>
+          </a:bodyPr>
+          <a:lstStyle/>
           <a:p>
             <a:pPr algn="l">
               <a:lnSpc>
@@ -19463,86 +19541,8 @@
               </a:lnSpc>
             </a:pPr>
             <a:r>
-              <a:rPr sz="1805" i="0" b="0" spc="160">
-                <a:solidFill>
-                  <a:srgbClr val="2C322E"/>
-                </a:solidFill>
-                <a:latin typeface="Outfit 1 Semi-Bold"/>
-              </a:rPr>
-              <a:t>DO DIAGNÓSTICO.</a:t>
-            </a:r>
-          </a:p>
-        </p:txBody>
-      </p:sp>
-      <p:sp>
-        <p:nvSpPr>
-          <p:cNvPr id="10" name="TextBox 9"/>
-          <p:cNvSpPr txBox="1"/>
-          <p:nvPr/>
-        </p:nvSpPr>
-        <p:spPr>
-          <a:xfrm>
-            <a:off x="9921240" y="2553843"/>
-            <a:ext cx="6858000" cy="1493444"/>
-          </a:xfrm>
-          <a:prstGeom prst="rect">
-            <a:avLst/>
-          </a:prstGeom>
-          <a:noFill/>
-        </p:spPr>
-        <p:txBody>
-          <a:bodyPr wrap="square" anchor="t" lIns="0" rIns="0" tIns="0" bIns="0">
-            <a:spAutoFit/>
-          </a:bodyPr>
-          <a:lstStyle/>
-          <a:p>
-            <a:pPr algn="l">
-              <a:lnSpc>
-                <a:spcPct val="145000"/>
-              </a:lnSpc>
-            </a:pPr>
-            <a:r>
               <a:rPr sz="2100" i="0" b="0">
                 <a:solidFill>
-                  <a:srgbClr val="2C322E"/>
-                </a:solidFill>
-                <a:latin typeface="Outfit 1 Semi-Bold"/>
-              </a:rPr>
-              <a:t>Lucas Martini estrutura proteção e sucessão para preservar possibilidades quando a vida, a família ou a empresa entram em transição.</a:t>
-            </a:r>
-          </a:p>
-        </p:txBody>
-      </p:sp>
-      <p:sp>
-        <p:nvSpPr>
-          <p:cNvPr id="11" name="TextBox 10"/>
-          <p:cNvSpPr txBox="1"/>
-          <p:nvPr/>
-        </p:nvSpPr>
-        <p:spPr>
-          <a:xfrm>
-            <a:off x="9921240" y="4303319"/>
-            <a:ext cx="6858000" cy="1493444"/>
-          </a:xfrm>
-          <a:prstGeom prst="rect">
-            <a:avLst/>
-          </a:prstGeom>
-          <a:noFill/>
-        </p:spPr>
-        <p:txBody>
-          <a:bodyPr wrap="square" anchor="t" lIns="0" rIns="0" tIns="0" bIns="0">
-            <a:spAutoFit/>
-          </a:bodyPr>
-          <a:lstStyle/>
-          <a:p>
-            <a:pPr algn="l">
-              <a:lnSpc>
-                <a:spcPct val="145000"/>
-              </a:lnSpc>
-            </a:pPr>
-            <a:r>
-              <a:rPr sz="2100" i="0" b="0">
-                <a:solidFill>
                   <a:srgbClr val="5F6661"/>
                 </a:solidFill>
                 <a:latin typeface="Outfit 1 Light"/>
@@ -19560,8 +19560,8 @@
         </p:nvSpPr>
         <p:spPr>
           <a:xfrm>
-            <a:off x="9921240" y="6052795"/>
-            <a:ext cx="6858000" cy="1972970"/>
+            <a:off x="9921240" y="5959983"/>
+            <a:ext cx="6858000" cy="1601724"/>
           </a:xfrm>
           <a:prstGeom prst="rect">
             <a:avLst/>
@@ -19720,7 +19720,7 @@
           <a:p>
             <a:pPr algn="l">
               <a:lnSpc>
-                <a:spcPct val="140000"/>
+                <a:spcPts val="1609"/>
               </a:lnSpc>
             </a:pPr>
             <a:r>
@@ -19759,7 +19759,7 @@
           <a:p>
             <a:pPr algn="r">
               <a:lnSpc>
-                <a:spcPct val="140000"/>
+                <a:spcPts val="1609"/>
               </a:lnSpc>
             </a:pPr>
             <a:r>
@@ -19798,7 +19798,7 @@
           <a:p>
             <a:pPr algn="l">
               <a:lnSpc>
-                <a:spcPct val="140000"/>
+                <a:spcPts val="1750"/>
               </a:lnSpc>
             </a:pPr>
             <a:r>
@@ -19877,7 +19877,7 @@
         <p:spPr>
           <a:xfrm>
             <a:off x="914400" y="6458712"/>
-            <a:ext cx="10972800" cy="1013917"/>
+            <a:ext cx="10972800" cy="828294"/>
           </a:xfrm>
           <a:prstGeom prst="rect">
             <a:avLst/>
@@ -19915,8 +19915,8 @@
         </p:nvSpPr>
         <p:spPr>
           <a:xfrm>
-            <a:off x="914400" y="7728661"/>
-            <a:ext cx="10972800" cy="534391"/>
+            <a:off x="914400" y="7543038"/>
+            <a:ext cx="10972800" cy="441579"/>
           </a:xfrm>
           <a:prstGeom prst="rect">
             <a:avLst/>
@@ -20040,7 +20040,7 @@
           <a:p>
             <a:pPr algn="l">
               <a:lnSpc>
-                <a:spcPct val="140000"/>
+                <a:spcPts val="1609"/>
               </a:lnSpc>
             </a:pPr>
             <a:r>
@@ -20079,7 +20079,7 @@
           <a:p>
             <a:pPr algn="r">
               <a:lnSpc>
-                <a:spcPct val="140000"/>
+                <a:spcPts val="1609"/>
               </a:lnSpc>
             </a:pPr>
             <a:r>
@@ -20102,7 +20102,7 @@
         </p:nvSpPr>
         <p:spPr>
           <a:xfrm>
-            <a:off x="914400" y="1463040"/>
+            <a:off x="914400" y="1665720"/>
             <a:ext cx="6400800" cy="274320"/>
           </a:xfrm>
           <a:prstGeom prst="rect">
@@ -20118,7 +20118,7 @@
           <a:p>
             <a:pPr algn="l">
               <a:lnSpc>
-                <a:spcPct val="140000"/>
+                <a:spcPts val="1750"/>
               </a:lnSpc>
             </a:pPr>
             <a:r>
@@ -20141,7 +20141,7 @@
         </p:nvSpPr>
         <p:spPr>
           <a:xfrm>
-            <a:off x="914400" y="1938528"/>
+            <a:off x="914400" y="2141208"/>
             <a:ext cx="8412480" cy="913486"/>
           </a:xfrm>
           <a:prstGeom prst="rect">
@@ -20157,7 +20157,7 @@
           <a:p>
             <a:pPr algn="l">
               <a:lnSpc>
-                <a:spcPct val="116000"/>
+                <a:spcPts val="5220"/>
               </a:lnSpc>
             </a:pPr>
             <a:r>
@@ -20180,7 +20180,7 @@
         </p:nvSpPr>
         <p:spPr>
           <a:xfrm>
-            <a:off x="7249653" y="2415314"/>
+            <a:off x="7249653" y="2617994"/>
             <a:ext cx="10123947" cy="12802"/>
           </a:xfrm>
           <a:prstGeom prst="rect">
@@ -20224,7 +20224,7 @@
         </p:nvSpPr>
         <p:spPr>
           <a:xfrm>
-            <a:off x="914400" y="4270248"/>
+            <a:off x="914400" y="4472928"/>
             <a:ext cx="5059680" cy="274320"/>
           </a:xfrm>
           <a:prstGeom prst="rect">
@@ -20240,7 +20240,7 @@
           <a:p>
             <a:pPr algn="l">
               <a:lnSpc>
-                <a:spcPct val="140000"/>
+                <a:spcPts val="1750"/>
               </a:lnSpc>
             </a:pPr>
             <a:r>
@@ -20263,7 +20263,7 @@
         </p:nvSpPr>
         <p:spPr>
           <a:xfrm>
-            <a:off x="914400" y="4636008"/>
+            <a:off x="914400" y="4838688"/>
             <a:ext cx="5059680" cy="570230"/>
           </a:xfrm>
           <a:prstGeom prst="rect">
@@ -20302,7 +20302,7 @@
         </p:nvSpPr>
         <p:spPr>
           <a:xfrm>
-            <a:off x="914400" y="5187950"/>
+            <a:off x="914400" y="5390630"/>
             <a:ext cx="5059680" cy="10973"/>
           </a:xfrm>
           <a:prstGeom prst="rect">
@@ -20346,8 +20346,8 @@
         </p:nvSpPr>
         <p:spPr>
           <a:xfrm>
-            <a:off x="914400" y="5443982"/>
-            <a:ext cx="5059680" cy="937193"/>
+            <a:off x="914400" y="5646662"/>
+            <a:ext cx="5059680" cy="766420"/>
           </a:xfrm>
           <a:prstGeom prst="rect">
             <a:avLst/>
@@ -20385,7 +20385,7 @@
         </p:nvSpPr>
         <p:spPr>
           <a:xfrm>
-            <a:off x="6614160" y="4270248"/>
+            <a:off x="6614160" y="4472928"/>
             <a:ext cx="5059680" cy="274320"/>
           </a:xfrm>
           <a:prstGeom prst="rect">
@@ -20401,7 +20401,7 @@
           <a:p>
             <a:pPr algn="l">
               <a:lnSpc>
-                <a:spcPct val="140000"/>
+                <a:spcPts val="1750"/>
               </a:lnSpc>
             </a:pPr>
             <a:r>
@@ -20424,7 +20424,7 @@
         </p:nvSpPr>
         <p:spPr>
           <a:xfrm>
-            <a:off x="6614160" y="4636008"/>
+            <a:off x="6614160" y="4838688"/>
             <a:ext cx="5059680" cy="570230"/>
           </a:xfrm>
           <a:prstGeom prst="rect">
@@ -20463,7 +20463,7 @@
         </p:nvSpPr>
         <p:spPr>
           <a:xfrm>
-            <a:off x="6614160" y="5187950"/>
+            <a:off x="6614160" y="5390630"/>
             <a:ext cx="5059680" cy="10973"/>
           </a:xfrm>
           <a:prstGeom prst="rect">
@@ -20507,8 +20507,8 @@
         </p:nvSpPr>
         <p:spPr>
           <a:xfrm>
-            <a:off x="6614160" y="5443982"/>
-            <a:ext cx="5059680" cy="937193"/>
+            <a:off x="6614160" y="5646662"/>
+            <a:ext cx="5059680" cy="766420"/>
           </a:xfrm>
           <a:prstGeom prst="rect">
             <a:avLst/>
@@ -20546,7 +20546,7 @@
         </p:nvSpPr>
         <p:spPr>
           <a:xfrm>
-            <a:off x="12313920" y="4270248"/>
+            <a:off x="12313920" y="4472928"/>
             <a:ext cx="5059680" cy="274320"/>
           </a:xfrm>
           <a:prstGeom prst="rect">
@@ -20562,7 +20562,7 @@
           <a:p>
             <a:pPr algn="l">
               <a:lnSpc>
-                <a:spcPct val="140000"/>
+                <a:spcPts val="1750"/>
               </a:lnSpc>
             </a:pPr>
             <a:r>
@@ -20585,7 +20585,7 @@
         </p:nvSpPr>
         <p:spPr>
           <a:xfrm>
-            <a:off x="12313920" y="4636008"/>
+            <a:off x="12313920" y="4838688"/>
             <a:ext cx="5059680" cy="570230"/>
           </a:xfrm>
           <a:prstGeom prst="rect">
@@ -20624,7 +20624,7 @@
         </p:nvSpPr>
         <p:spPr>
           <a:xfrm>
-            <a:off x="12313920" y="5187950"/>
+            <a:off x="12313920" y="5390630"/>
             <a:ext cx="5059680" cy="10973"/>
           </a:xfrm>
           <a:prstGeom prst="rect">
@@ -20668,8 +20668,8 @@
         </p:nvSpPr>
         <p:spPr>
           <a:xfrm>
-            <a:off x="12313920" y="5443982"/>
-            <a:ext cx="5059680" cy="1378357"/>
+            <a:off x="12313920" y="5646662"/>
+            <a:ext cx="5059680" cy="1122197"/>
           </a:xfrm>
           <a:prstGeom prst="rect">
             <a:avLst/>
@@ -20707,8 +20707,8 @@
         </p:nvSpPr>
         <p:spPr>
           <a:xfrm>
-            <a:off x="914400" y="7526427"/>
-            <a:ext cx="12179808" cy="1013917"/>
+            <a:off x="914400" y="7472947"/>
+            <a:ext cx="12179808" cy="828294"/>
           </a:xfrm>
           <a:prstGeom prst="rect">
             <a:avLst/>
@@ -20832,7 +20832,7 @@
           <a:p>
             <a:pPr algn="l">
               <a:lnSpc>
-                <a:spcPct val="140000"/>
+                <a:spcPts val="1609"/>
               </a:lnSpc>
             </a:pPr>
             <a:r>
@@ -20871,7 +20871,7 @@
           <a:p>
             <a:pPr algn="r">
               <a:lnSpc>
-                <a:spcPct val="140000"/>
+                <a:spcPts val="1609"/>
               </a:lnSpc>
             </a:pPr>
             <a:r>
@@ -20894,7 +20894,7 @@
         </p:nvSpPr>
         <p:spPr>
           <a:xfrm>
-            <a:off x="914400" y="1463040"/>
+            <a:off x="914400" y="1503299"/>
             <a:ext cx="6400800" cy="274320"/>
           </a:xfrm>
           <a:prstGeom prst="rect">
@@ -20910,7 +20910,7 @@
           <a:p>
             <a:pPr algn="l">
               <a:lnSpc>
-                <a:spcPct val="140000"/>
+                <a:spcPts val="1750"/>
               </a:lnSpc>
             </a:pPr>
             <a:r>
@@ -20933,7 +20933,7 @@
         </p:nvSpPr>
         <p:spPr>
           <a:xfrm>
-            <a:off x="914400" y="1938528"/>
+            <a:off x="914400" y="1978787"/>
             <a:ext cx="8412480" cy="913486"/>
           </a:xfrm>
           <a:prstGeom prst="rect">
@@ -20949,7 +20949,7 @@
           <a:p>
             <a:pPr algn="l">
               <a:lnSpc>
-                <a:spcPct val="116000"/>
+                <a:spcPts val="5220"/>
               </a:lnSpc>
             </a:pPr>
             <a:r>
@@ -20972,7 +20972,7 @@
         </p:nvSpPr>
         <p:spPr>
           <a:xfrm>
-            <a:off x="8507575" y="2415314"/>
+            <a:off x="8507575" y="2455573"/>
             <a:ext cx="8866025" cy="12802"/>
           </a:xfrm>
           <a:prstGeom prst="rect">
@@ -21016,7 +21016,7 @@
         </p:nvSpPr>
         <p:spPr>
           <a:xfrm>
-            <a:off x="914400" y="4270248"/>
+            <a:off x="914400" y="4310507"/>
             <a:ext cx="5059680" cy="274320"/>
           </a:xfrm>
           <a:prstGeom prst="rect">
@@ -21032,7 +21032,7 @@
           <a:p>
             <a:pPr algn="l">
               <a:lnSpc>
-                <a:spcPct val="140000"/>
+                <a:spcPts val="1750"/>
               </a:lnSpc>
             </a:pPr>
             <a:r>
@@ -21055,7 +21055,7 @@
         </p:nvSpPr>
         <p:spPr>
           <a:xfrm>
-            <a:off x="914400" y="4636008"/>
+            <a:off x="914400" y="4676267"/>
             <a:ext cx="5059680" cy="570230"/>
           </a:xfrm>
           <a:prstGeom prst="rect">
@@ -21094,7 +21094,7 @@
         </p:nvSpPr>
         <p:spPr>
           <a:xfrm>
-            <a:off x="914400" y="5187950"/>
+            <a:off x="914400" y="5228209"/>
             <a:ext cx="5059680" cy="10973"/>
           </a:xfrm>
           <a:prstGeom prst="rect">
@@ -21138,8 +21138,8 @@
         </p:nvSpPr>
         <p:spPr>
           <a:xfrm>
-            <a:off x="914400" y="5443982"/>
-            <a:ext cx="5059680" cy="1378357"/>
+            <a:off x="914400" y="5484241"/>
+            <a:ext cx="5059680" cy="1122197"/>
           </a:xfrm>
           <a:prstGeom prst="rect">
             <a:avLst/>
@@ -21177,7 +21177,7 @@
         </p:nvSpPr>
         <p:spPr>
           <a:xfrm>
-            <a:off x="6614160" y="4270248"/>
+            <a:off x="6614160" y="4310507"/>
             <a:ext cx="5059680" cy="274320"/>
           </a:xfrm>
           <a:prstGeom prst="rect">
@@ -21193,7 +21193,7 @@
           <a:p>
             <a:pPr algn="l">
               <a:lnSpc>
-                <a:spcPct val="140000"/>
+                <a:spcPts val="1750"/>
               </a:lnSpc>
             </a:pPr>
             <a:r>
@@ -21216,7 +21216,7 @@
         </p:nvSpPr>
         <p:spPr>
           <a:xfrm>
-            <a:off x="6614160" y="4636008"/>
+            <a:off x="6614160" y="4676267"/>
             <a:ext cx="5059680" cy="570230"/>
           </a:xfrm>
           <a:prstGeom prst="rect">
@@ -21255,7 +21255,7 @@
         </p:nvSpPr>
         <p:spPr>
           <a:xfrm>
-            <a:off x="6614160" y="5187950"/>
+            <a:off x="6614160" y="5228209"/>
             <a:ext cx="5059680" cy="10973"/>
           </a:xfrm>
           <a:prstGeom prst="rect">
@@ -21299,8 +21299,8 @@
         </p:nvSpPr>
         <p:spPr>
           <a:xfrm>
-            <a:off x="6614160" y="5443982"/>
-            <a:ext cx="5059680" cy="2260686"/>
+            <a:off x="6614160" y="5484241"/>
+            <a:ext cx="5059680" cy="1833753"/>
           </a:xfrm>
           <a:prstGeom prst="rect">
             <a:avLst/>
@@ -21338,7 +21338,7 @@
         </p:nvSpPr>
         <p:spPr>
           <a:xfrm>
-            <a:off x="12313920" y="4270248"/>
+            <a:off x="12313920" y="4310507"/>
             <a:ext cx="5059680" cy="274320"/>
           </a:xfrm>
           <a:prstGeom prst="rect">
@@ -21354,7 +21354,7 @@
           <a:p>
             <a:pPr algn="l">
               <a:lnSpc>
-                <a:spcPct val="140000"/>
+                <a:spcPts val="1750"/>
               </a:lnSpc>
             </a:pPr>
             <a:r>
@@ -21377,7 +21377,7 @@
         </p:nvSpPr>
         <p:spPr>
           <a:xfrm>
-            <a:off x="12313920" y="4636008"/>
+            <a:off x="12313920" y="4676267"/>
             <a:ext cx="5059680" cy="570230"/>
           </a:xfrm>
           <a:prstGeom prst="rect">
@@ -21416,7 +21416,7 @@
         </p:nvSpPr>
         <p:spPr>
           <a:xfrm>
-            <a:off x="12313920" y="5187950"/>
+            <a:off x="12313920" y="5228209"/>
             <a:ext cx="5059680" cy="10973"/>
           </a:xfrm>
           <a:prstGeom prst="rect">
@@ -21460,8 +21460,8 @@
         </p:nvSpPr>
         <p:spPr>
           <a:xfrm>
-            <a:off x="12313920" y="5443982"/>
-            <a:ext cx="5059680" cy="1378357"/>
+            <a:off x="12313920" y="5484241"/>
+            <a:ext cx="5059680" cy="1122197"/>
           </a:xfrm>
           <a:prstGeom prst="rect">
             <a:avLst/>
@@ -21499,8 +21499,8 @@
         </p:nvSpPr>
         <p:spPr>
           <a:xfrm>
-            <a:off x="914400" y="8408756"/>
-            <a:ext cx="12179808" cy="534391"/>
+            <a:off x="914400" y="8022082"/>
+            <a:ext cx="12179808" cy="441579"/>
           </a:xfrm>
           <a:prstGeom prst="rect">
             <a:avLst/>
@@ -21633,7 +21633,7 @@
           <a:p>
             <a:pPr algn="l">
               <a:lnSpc>
-                <a:spcPct val="140000"/>
+                <a:spcPts val="1609"/>
               </a:lnSpc>
             </a:pPr>
             <a:r>
@@ -21672,7 +21672,7 @@
           <a:p>
             <a:pPr algn="r">
               <a:lnSpc>
-                <a:spcPct val="140000"/>
+                <a:spcPts val="1609"/>
               </a:lnSpc>
             </a:pPr>
             <a:r>
@@ -21695,7 +21695,7 @@
         </p:nvSpPr>
         <p:spPr>
           <a:xfrm>
-            <a:off x="914400" y="1941195"/>
+            <a:off x="914400" y="2405253"/>
             <a:ext cx="6400800" cy="274320"/>
           </a:xfrm>
           <a:prstGeom prst="rect">
@@ -21711,7 +21711,7 @@
           <a:p>
             <a:pPr algn="l">
               <a:lnSpc>
-                <a:spcPct val="140000"/>
+                <a:spcPts val="1750"/>
               </a:lnSpc>
             </a:pPr>
             <a:r>
@@ -21734,7 +21734,7 @@
         </p:nvSpPr>
         <p:spPr>
           <a:xfrm>
-            <a:off x="914400" y="2416683"/>
+            <a:off x="914400" y="2880741"/>
             <a:ext cx="8412480" cy="913486"/>
           </a:xfrm>
           <a:prstGeom prst="rect">
@@ -21750,7 +21750,7 @@
           <a:p>
             <a:pPr algn="l">
               <a:lnSpc>
-                <a:spcPct val="116000"/>
+                <a:spcPts val="5220"/>
               </a:lnSpc>
             </a:pPr>
             <a:r>
@@ -21773,7 +21773,7 @@
         </p:nvSpPr>
         <p:spPr>
           <a:xfrm>
-            <a:off x="6618034" y="2893469"/>
+            <a:off x="6618034" y="3357527"/>
             <a:ext cx="1520126" cy="12802"/>
           </a:xfrm>
           <a:prstGeom prst="rect">
@@ -21817,8 +21817,8 @@
         </p:nvSpPr>
         <p:spPr>
           <a:xfrm>
-            <a:off x="914400" y="3650209"/>
-            <a:ext cx="6400800" cy="1972970"/>
+            <a:off x="914400" y="4114267"/>
+            <a:ext cx="6400800" cy="1601724"/>
           </a:xfrm>
           <a:prstGeom prst="rect">
             <a:avLst/>
@@ -21856,7 +21856,7 @@
         </p:nvSpPr>
         <p:spPr>
           <a:xfrm>
-            <a:off x="914400" y="6153531"/>
+            <a:off x="914400" y="6246343"/>
             <a:ext cx="6400800" cy="825703"/>
           </a:xfrm>
           <a:prstGeom prst="rect">
@@ -21872,19 +21872,97 @@
           <a:p>
             <a:pPr algn="l">
               <a:lnSpc>
+                <a:spcPts val="2618"/>
+              </a:lnSpc>
+            </a:pPr>
+            <a:r>
+              <a:rPr sz="1805" i="0" b="0" spc="160">
+                <a:solidFill>
+                  <a:srgbClr val="2C322E"/>
+                </a:solidFill>
+                <a:latin typeface="Outfit 1 Semi-Bold"/>
+              </a:rPr>
+              <a:t>PREPARAR ANTES PARA</a:t>
+            </a:r>
+          </a:p>
+          <a:p>
+            <a:pPr algn="l">
+              <a:lnSpc>
+                <a:spcPts val="2618"/>
+              </a:lnSpc>
+            </a:pPr>
+            <a:r>
+              <a:rPr sz="1805" i="0" b="0" spc="160">
+                <a:solidFill>
+                  <a:srgbClr val="2C322E"/>
+                </a:solidFill>
+                <a:latin typeface="Outfit 1 Semi-Bold"/>
+              </a:rPr>
+              <a:t>PRESERVAR ESCOLHAS DEPOIS.</a:t>
+            </a:r>
+          </a:p>
+        </p:txBody>
+      </p:sp>
+      <p:sp>
+        <p:nvSpPr>
+          <p:cNvPr id="10" name="TextBox 9"/>
+          <p:cNvSpPr txBox="1"/>
+          <p:nvPr/>
+        </p:nvSpPr>
+        <p:spPr>
+          <a:xfrm>
+            <a:off x="9921240" y="3017901"/>
+            <a:ext cx="6858000" cy="1601724"/>
+          </a:xfrm>
+          <a:prstGeom prst="rect">
+            <a:avLst/>
+          </a:prstGeom>
+          <a:noFill/>
+        </p:spPr>
+        <p:txBody>
+          <a:bodyPr wrap="square" anchor="t" lIns="0" rIns="0" tIns="0" bIns="0">
+            <a:spAutoFit/>
+          </a:bodyPr>
+          <a:lstStyle/>
+          <a:p>
+            <a:pPr algn="l">
+              <a:lnSpc>
                 <a:spcPct val="145000"/>
               </a:lnSpc>
             </a:pPr>
             <a:r>
-              <a:rPr sz="1805" i="0" b="0" spc="160">
+              <a:rPr sz="2100" i="0" b="0">
                 <a:solidFill>
                   <a:srgbClr val="2C322E"/>
                 </a:solidFill>
                 <a:latin typeface="Outfit 1 Semi-Bold"/>
               </a:rPr>
-              <a:t>PREPARAR ANTES PARA</a:t>
-            </a:r>
-          </a:p>
+              <a:t>Lucas Martini é especialista em proteção e sucessão para pessoas, famílias e empresas que desejam preservar o que construíram e manter possibilidades diante do imprevisto.</a:t>
+            </a:r>
+          </a:p>
+        </p:txBody>
+      </p:sp>
+      <p:sp>
+        <p:nvSpPr>
+          <p:cNvPr id="11" name="TextBox 10"/>
+          <p:cNvSpPr txBox="1"/>
+          <p:nvPr/>
+        </p:nvSpPr>
+        <p:spPr>
+          <a:xfrm>
+            <a:off x="9921240" y="4875657"/>
+            <a:ext cx="6858000" cy="1601724"/>
+          </a:xfrm>
+          <a:prstGeom prst="rect">
+            <a:avLst/>
+          </a:prstGeom>
+          <a:noFill/>
+        </p:spPr>
+        <p:txBody>
+          <a:bodyPr wrap="square" anchor="t" lIns="0" rIns="0" tIns="0" bIns="0">
+            <a:spAutoFit/>
+          </a:bodyPr>
+          <a:lstStyle/>
           <a:p>
             <a:pPr algn="l">
               <a:lnSpc>
@@ -21892,86 +21970,8 @@
               </a:lnSpc>
             </a:pPr>
             <a:r>
-              <a:rPr sz="1805" i="0" b="0" spc="160">
-                <a:solidFill>
-                  <a:srgbClr val="2C322E"/>
-                </a:solidFill>
-                <a:latin typeface="Outfit 1 Semi-Bold"/>
-              </a:rPr>
-              <a:t>PRESERVAR ESCOLHAS DEPOIS.</a:t>
-            </a:r>
-          </a:p>
-        </p:txBody>
-      </p:sp>
-      <p:sp>
-        <p:nvSpPr>
-          <p:cNvPr id="10" name="TextBox 9"/>
-          <p:cNvSpPr txBox="1"/>
-          <p:nvPr/>
-        </p:nvSpPr>
-        <p:spPr>
-          <a:xfrm>
-            <a:off x="9921240" y="2553843"/>
-            <a:ext cx="6858000" cy="1972970"/>
-          </a:xfrm>
-          <a:prstGeom prst="rect">
-            <a:avLst/>
-          </a:prstGeom>
-          <a:noFill/>
-        </p:spPr>
-        <p:txBody>
-          <a:bodyPr wrap="square" anchor="t" lIns="0" rIns="0" tIns="0" bIns="0">
-            <a:spAutoFit/>
-          </a:bodyPr>
-          <a:lstStyle/>
-          <a:p>
-            <a:pPr algn="l">
-              <a:lnSpc>
-                <a:spcPct val="145000"/>
-              </a:lnSpc>
-            </a:pPr>
-            <a:r>
               <a:rPr sz="2100" i="0" b="0">
                 <a:solidFill>
-                  <a:srgbClr val="2C322E"/>
-                </a:solidFill>
-                <a:latin typeface="Outfit 1 Semi-Bold"/>
-              </a:rPr>
-              <a:t>Lucas Martini é especialista em proteção e sucessão para pessoas, famílias e empresas que desejam preservar o que construíram e manter possibilidades diante do imprevisto.</a:t>
-            </a:r>
-          </a:p>
-        </p:txBody>
-      </p:sp>
-      <p:sp>
-        <p:nvSpPr>
-          <p:cNvPr id="11" name="TextBox 10"/>
-          <p:cNvSpPr txBox="1"/>
-          <p:nvPr/>
-        </p:nvSpPr>
-        <p:spPr>
-          <a:xfrm>
-            <a:off x="9921240" y="4782845"/>
-            <a:ext cx="6858000" cy="1972970"/>
-          </a:xfrm>
-          <a:prstGeom prst="rect">
-            <a:avLst/>
-          </a:prstGeom>
-          <a:noFill/>
-        </p:spPr>
-        <p:txBody>
-          <a:bodyPr wrap="square" anchor="t" lIns="0" rIns="0" tIns="0" bIns="0">
-            <a:spAutoFit/>
-          </a:bodyPr>
-          <a:lstStyle/>
-          <a:p>
-            <a:pPr algn="l">
-              <a:lnSpc>
-                <a:spcPct val="145000"/>
-              </a:lnSpc>
-            </a:pPr>
-            <a:r>
-              <a:rPr sz="2100" i="0" b="0">
-                <a:solidFill>
                   <a:srgbClr val="5F6661"/>
                 </a:solidFill>
                 <a:latin typeface="Outfit 1 Light"/>
@@ -21989,8 +21989,8 @@
         </p:nvSpPr>
         <p:spPr>
           <a:xfrm>
-            <a:off x="9921240" y="7011848"/>
-            <a:ext cx="6858000" cy="1013917"/>
+            <a:off x="9921240" y="6733413"/>
+            <a:ext cx="6858000" cy="828294"/>
           </a:xfrm>
           <a:prstGeom prst="rect">
             <a:avLst/>
